--- a/defensa/OASIS_defensa_TFG.pptx
+++ b/defensa/OASIS_defensa_TFG.pptx
@@ -710,12 +710,12 @@
             <a:r>
               <a:rPr lang="en-US" dirty="0"/>
               <a:t>Antes de las cifras, las cuatro piezas que las sostienen.
-La primera es la comparación pareada, que es lo que ven en el esquema: la semilla ene genera exactamente el mismo perfil de demanda en todas las versiones, los mismos vehículos a las mismas horas, así que la diferencia se calcula par a par. El ruido de la demanda es común a los dos miembros, se cancela en la resta, y el contraste gana potencia. Veinte pares: cuatro escenarios por cinco semillas.
+La primera es la comparación pareada, que es lo que ven en el esquema: la semilla ene genera el mismo perfil de demanda en todas las versiones, así que la diferencia se calcula par a par. El ruido de la demanda se cancela en la resta y el contraste gana potencia. Veinte pares: cuatro escenarios por cinco semillas.
 La segunda es el test de Wilcoxon, de rangos con signo. Empecé con un t-test y lo abandoné: tres semillas del escenario nublado dominaban la media, con medias hasta veinte veces la mediana. El contraste describía esas tres tiradas, no a la población.
 La tercera es un umbral de relevancia económica. Medí la dispersión del coste de la propia referencia entre grupos de semillas: nueve euros con treinta y tres por semana. Una diferencia significativa por debajo de eso la declaro operativamente nula, y lo fijé antes de simular.
 Y la cuarta es el oráculo: repetir una tanda con la previsión perfecta. No es desplegable, es una cota superior. Si con error cero una estrategia no gana, ninguna mejora de la previsión va a hacer que gane.
 — — — — —
-NO SE DICE · objetivo 1:33 · Ritmo pausado, una pieza cada vez. Es la diapositiva que te compra credibilidad para todo el bloque siguiente.</a:t>
+NO SE DICE · objetivo 1:27 · Ritmo pausado, una pieza cada vez. Es la diapositiva que te compra credibilidad para todo el bloque siguiente.</a:t>
             </a:r>
             <a:endParaRPr lang="en-US" dirty="0"/>
           </a:p>
@@ -2082,9 +2082,10 @@
             <a:r>
               <a:rPr lang="en-US" dirty="0"/>
               <a:t>Esta es la instalación: la microrred OASIS del departamento, modelada en Simulink sobre la librería Simugrid. Quinientos kilovatios pico de fotovoltaica en marquesina, una batería de un megavatio-hora, un electrolizador PEM de doscientos kilovatios, dos tanques de hidrógeno a distinta presión con su compresor, una pila de combustible y dos cargadores rápidos.
+El caso base con el que se ha dimensionado es el panorama actual proyectado a dos mil treinta, el de las cifras de la diapositiva anterior, y no un escenario de penetración masiva.
 De todas estas cifras, dos están dimensionadas en este trabajo y no heredadas: la potencia del cargador y su número. Las justifico enseguida con los datos de demanda.
 — — — — —
-NO SE DICE · objetivo 0:36 · No recites la tabla: está en pantalla. Lo que aportas hablando es la distinción entre heredado y dimensionado.</a:t>
+NO SE DICE · objetivo 0:51 · No recites la tabla: está en pantalla. Lo que aportas hablando es la distinción entre heredado y dimensionado.</a:t>
             </a:r>
             <a:endParaRPr lang="en-US" dirty="0"/>
           </a:p>
@@ -2172,12 +2173,12 @@
           <a:p>
             <a:r>
               <a:rPr lang="en-US" dirty="0"/>
-              <a:t>El gestor de energía es un único bloque de Simulink con once entradas y seis salidas, y toma tres decisiones.
+              <a:t>El gestor de energía es este único bloque de Simulink, y toma tres decisiones.
 Cuando sobra sol, cómo repartir el excedente entre cargar la batería y producir hidrógeno. Cuando falta, en qué orden cubrir el déficit: batería, pila, red. Y en todo momento, si conviene producir hidrógeno o reponerlo desde fuera, comparando el coste del kilogramo producido aquí con su precio de reposición.
 Todas las versiones que voy a comparar mantienen exactamente esta firma. Cambia el script del bloque de decisión y nada más: el mismo modelo físico, los mismos perfiles de entrada, la misma semilla de demanda.
 Y el objetivo del trabajo no es solo mejorar ese gestor, sino poder atribuir la mejora: cuánto viene de la predicción y cuánto de las reglas que la consumen.
 — — — — —
-NO SE DICE · objetivo 0:59 · «Solo cambia el bloque de decisión» es tu primer blindaje metodológico.</a:t>
+NO SE DICE · objetivo 0:56 · «Solo cambia el bloque de decisión» es tu primer blindaje metodológico.</a:t>
             </a:r>
             <a:endParaRPr lang="en-US" dirty="0"/>
           </a:p>
@@ -2266,11 +2267,12 @@
             <a:r>
               <a:rPr lang="en-US" dirty="0"/>
               <a:t>El primer bloque de datos sirve para dimensionar, y fija dos parámetros de la instalación.
-La fuente es DESL-EPFL, sesiones reales de carga rápida: mil ochocientas setenta y cinco válidas, con una energía media de treinta y dos coma dos kilovatios-hora y ocho sesiones y media al día. Lo contrasto con Caltech, que es carga lenta, para comprobar que son familias distintas.
-De ahí salen las dos decisiones. Los cincuenta kilovatios del cargador, porque cubren una sesión media en treinta y nueve minutos sin exigir transformador de media tensión. Y el número de cargadores por teoría de colas, un modelo eme-eme-ce sobre la hora punta: con dos, la espera se mantiene acotada.
+La fuente es DESL-EPFL, sesiones reales de carga rápida: casi mil novecientas válidas, con una energía media de treinta y dos kilovatios-hora. La contrasto con Caltech, que es carga lenta, para comprobar que son familias distintas.
+De ahí salen las dos decisiones. Los cincuenta kilovatios del cargador, que es el estándar europeo de carga rápida en continua y que con la energía media cubren una sesión en unos cuarenta minutos, sin exigir transformador de media tensión. Y que los cargadores sean dos, por teoría de colas sobre la hora punta: con dos, la espera se mantiene acotada.
+Dimensiono sobre el panorama actual a propósito: es el escenario del que hay datos reales, y escalar hacia arriba siempre es más fácil que hacia abajo, más aún con una arquitectura modular como esta.
 Con esas mismas distribuciones se genera el perfil de demanda de cada simulación. Es estocástico, y eso importará en la comparación.
 — — — — —
-NO SE DICE · objetivo 1:01 · Este bloque es trabajo tuyo de principio a fin. Cuéntalo con calma: es lo que justifica que la instalación sea creíble.</a:t>
+NO SE DICE · objetivo 1:15 · Este bloque es trabajo tuyo de principio a fin. Cuéntalo con calma: es lo que justifica que la instalación sea creíble.</a:t>
             </a:r>
             <a:endParaRPr lang="en-US" dirty="0"/>
           </a:p>
@@ -2358,12 +2360,12 @@
           <a:p>
             <a:r>
               <a:rPr lang="en-US" dirty="0"/>
-              <a:t>El segundo bloque es el de entrenamiento: dos fuentes públicas alineadas hora a hora.
-Para la irradiancia, NASA POWER en Sevilla: diecinueve años horarios con ocho variables, entre ellas un índice de nubosidad calculado y las codificaciones cíclicas de hora y día.
-Para el precio, el mercado diario español vía ENTSO-E: cinco años, catorce variables. Ahí entran los dos lags de precio, el de veinticuatro horas y el semanal, y la capacidad fotovoltaica instalada en España, que pasa de quince gigavatios en dos mil veintiuno a treinta y seis en dos mil veinticinco y explica la caída del precio a mediodía.
-Y un detalle que importa: el split es temporal en los dos casos, nunca aleatorio. Mezclar horas entre entrenamiento y test regalaría información del futuro.
+              <a:t>El segundo bloque es el de entrenamiento, y son dos fuentes públicas alineadas hora a hora.
+Para la irradiancia, NASA POWER, que es un reanálisis meteorológico: de ahí saco, para el punto de Sevilla, casi veinte años de registro horario y las variables que explican la nubosidad. Un detalle que merece la pena: la hora y el día no entran como un número, sino codificados en seno y coseno, para que el modelo sepa que las once y las doce de la noche son contiguas y no los dos extremos de una escala.
+Para el precio, las casaciones del mercado diario español a través de ENTSO-E. Además del histórico, entra el contexto que explica su deriva: sobre todo la capacidad fotovoltaica instalada en España, que ha crecido lo suficiente como para cambiar la forma del precio a mediodía.
+Y un detalle que importa: el reparto entre entrenamiento y prueba es temporal, nunca aleatorio. Mezclar horas le regalaría al modelo información del futuro.
 — — — — —
-NO SE DICE · objetivo 0:56 · La frase del split es la que te compra credibilidad con un tribunal que sabe de aprendizaje automático.</a:t>
+NO SE DICE · objetivo 1:12 · La frase del split es la que te compra credibilidad con un tribunal que sabe de aprendizaje automático.</a:t>
             </a:r>
             <a:endParaRPr lang="en-US" dirty="0"/>
           </a:p>
@@ -13126,33 +13128,629 @@
           </a:p>
         </p:txBody>
       </p:sp>
-      <p:pic>
-        <p:nvPicPr>
-          <p:cNvPr id="4" name="Image 0" descr="img/arquitectura_modulos_oasis.png">    </p:cNvPr>
-          <p:cNvPicPr>
-            <a:picLocks noChangeAspect="1"/>
-          </p:cNvPicPr>
-          <p:nvPr/>
-        </p:nvPicPr>
-        <p:blipFill>
-          <a:blip r:embed="rId1"/>
-          <a:stretch>
-            <a:fillRect/>
-          </a:stretch>
-        </p:blipFill>
-        <p:spPr>
-          <a:xfrm>
-            <a:off x="2916841" y="1536192"/>
-            <a:ext cx="6358013" cy="3035808"/>
-          </a:xfrm>
-          <a:prstGeom prst="rect">
-            <a:avLst/>
-          </a:prstGeom>
-        </p:spPr>
-      </p:pic>
-      <p:sp>
-        <p:nvSpPr>
-          <p:cNvPr id="5" name="Shape 2"/>
+      <p:sp>
+        <p:nvSpPr>
+          <p:cNvPr id="4" name="Shape 2"/>
+          <p:cNvSpPr/>
+          <p:nvPr/>
+        </p:nvSpPr>
+        <p:spPr>
+          <a:xfrm>
+            <a:off x="502920" y="1645920"/>
+            <a:ext cx="3520440" cy="2395728"/>
+          </a:xfrm>
+          <a:prstGeom prst="roundRect">
+            <a:avLst>
+              <a:gd name="adj" fmla="val 1908"/>
+            </a:avLst>
+          </a:prstGeom>
+          <a:solidFill>
+            <a:srgbClr val="F1F5F7"/>
+          </a:solidFill>
+          <a:ln w="12700">
+            <a:solidFill>
+              <a:srgbClr val="DDE3E6"/>
+            </a:solidFill>
+            <a:prstDash val="solid"/>
+          </a:ln>
+        </p:spPr>
+      </p:sp>
+      <p:sp>
+        <p:nvSpPr>
+          <p:cNvPr id="5" name="Text 3"/>
+          <p:cNvSpPr txBox="1"/>
+          <p:nvPr/>
+        </p:nvSpPr>
+        <p:spPr>
+          <a:xfrm>
+            <a:off x="704088" y="1792224"/>
+            <a:ext cx="3118104" cy="237744"/>
+          </a:xfrm>
+          <a:prstGeom prst="rect">
+            <a:avLst/>
+          </a:prstGeom>
+          <a:noFill/>
+          <a:ln/>
+        </p:spPr>
+        <p:txBody>
+          <a:bodyPr wrap="square" lIns="0" tIns="0" rIns="0" bIns="0" rtlCol="0" anchor="ctr"/>
+          <a:lstStyle/>
+          <a:p>
+            <a:pPr indent="0" marL="0">
+              <a:buNone/>
+            </a:pPr>
+            <a:r>
+              <a:rPr lang="en-US" sz="950" b="1" spc="120" kern="0" dirty="0">
+                <a:solidFill>
+                  <a:srgbClr val="C8861E"/>
+                </a:solidFill>
+                <a:latin typeface="Calibri" pitchFamily="34" charset="0"/>
+                <a:ea typeface="Calibri" pitchFamily="34" charset="-122"/>
+                <a:cs typeface="Calibri" pitchFamily="34" charset="-120"/>
+              </a:rPr>
+              <a:t>ENTRADAS · 11 SEÑALES</a:t>
+            </a:r>
+            <a:endParaRPr lang="en-US" sz="950" dirty="0"/>
+          </a:p>
+        </p:txBody>
+      </p:sp>
+      <p:sp>
+        <p:nvSpPr>
+          <p:cNvPr id="6" name="Text 4"/>
+          <p:cNvSpPr txBox="1"/>
+          <p:nvPr/>
+        </p:nvSpPr>
+        <p:spPr>
+          <a:xfrm>
+            <a:off x="704088" y="2103120"/>
+            <a:ext cx="3118104" cy="1792224"/>
+          </a:xfrm>
+          <a:prstGeom prst="rect">
+            <a:avLst/>
+          </a:prstGeom>
+          <a:noFill/>
+          <a:ln/>
+        </p:spPr>
+        <p:txBody>
+          <a:bodyPr wrap="square" lIns="0" tIns="0" rIns="0" bIns="0" rtlCol="0" anchor="t"/>
+          <a:lstStyle/>
+          <a:p>
+            <a:pPr marL="139700" indent="-139700">
+              <a:lnSpc>
+                <a:spcPct val="142000"/>
+              </a:lnSpc>
+              <a:buSzPct val="100000"/>
+              <a:buChar char="·"/>
+            </a:pPr>
+            <a:r>
+              <a:rPr lang="en-US" sz="1200" dirty="0">
+                <a:solidFill>
+                  <a:srgbClr val="1C1C1C"/>
+                </a:solidFill>
+                <a:latin typeface="Calibri" pitchFamily="34" charset="0"/>
+                <a:ea typeface="Calibri" pitchFamily="34" charset="-122"/>
+                <a:cs typeface="Calibri" pitchFamily="34" charset="-120"/>
+              </a:rPr>
+              <a:t>Generación fotovoltaica</a:t>
+            </a:r>
+            <a:endParaRPr lang="en-US" sz="1200" dirty="0"/>
+          </a:p>
+          <a:p>
+            <a:pPr marL="139700" indent="-139700">
+              <a:lnSpc>
+                <a:spcPct val="142000"/>
+              </a:lnSpc>
+              <a:buSzPct val="100000"/>
+              <a:buChar char="·"/>
+            </a:pPr>
+            <a:r>
+              <a:rPr lang="en-US" sz="1200" dirty="0">
+                <a:solidFill>
+                  <a:srgbClr val="1C1C1C"/>
+                </a:solidFill>
+                <a:latin typeface="Calibri" pitchFamily="34" charset="0"/>
+                <a:ea typeface="Calibri" pitchFamily="34" charset="-122"/>
+                <a:cs typeface="Calibri" pitchFamily="34" charset="-120"/>
+              </a:rPr>
+              <a:t>Demanda de los cargadores</a:t>
+            </a:r>
+            <a:endParaRPr lang="en-US" sz="1200" dirty="0"/>
+          </a:p>
+          <a:p>
+            <a:pPr marL="139700" indent="-139700">
+              <a:lnSpc>
+                <a:spcPct val="142000"/>
+              </a:lnSpc>
+              <a:buSzPct val="100000"/>
+              <a:buChar char="·"/>
+            </a:pPr>
+            <a:r>
+              <a:rPr lang="en-US" sz="1200" dirty="0">
+                <a:solidFill>
+                  <a:srgbClr val="1C1C1C"/>
+                </a:solidFill>
+                <a:latin typeface="Calibri" pitchFamily="34" charset="0"/>
+                <a:ea typeface="Calibri" pitchFamily="34" charset="-122"/>
+                <a:cs typeface="Calibri" pitchFamily="34" charset="-120"/>
+              </a:rPr>
+              <a:t>Estado de carga de la batería</a:t>
+            </a:r>
+            <a:endParaRPr lang="en-US" sz="1200" dirty="0"/>
+          </a:p>
+          <a:p>
+            <a:pPr marL="139700" indent="-139700">
+              <a:lnSpc>
+                <a:spcPct val="142000"/>
+              </a:lnSpc>
+              <a:buSzPct val="100000"/>
+              <a:buChar char="·"/>
+            </a:pPr>
+            <a:r>
+              <a:rPr lang="en-US" sz="1200" dirty="0">
+                <a:solidFill>
+                  <a:srgbClr val="1C1C1C"/>
+                </a:solidFill>
+                <a:latin typeface="Calibri" pitchFamily="34" charset="0"/>
+                <a:ea typeface="Calibri" pitchFamily="34" charset="-122"/>
+                <a:cs typeface="Calibri" pitchFamily="34" charset="-120"/>
+              </a:rPr>
+              <a:t>Nivel de los dos tanques de H₂</a:t>
+            </a:r>
+            <a:endParaRPr lang="en-US" sz="1200" dirty="0"/>
+          </a:p>
+          <a:p>
+            <a:pPr marL="139700" indent="-139700">
+              <a:lnSpc>
+                <a:spcPct val="142000"/>
+              </a:lnSpc>
+              <a:buSzPct val="100000"/>
+              <a:buChar char="·"/>
+            </a:pPr>
+            <a:r>
+              <a:rPr lang="en-US" sz="1200" dirty="0">
+                <a:solidFill>
+                  <a:srgbClr val="1C1C1C"/>
+                </a:solidFill>
+                <a:latin typeface="Calibri" pitchFamily="34" charset="0"/>
+                <a:ea typeface="Calibri" pitchFamily="34" charset="-122"/>
+                <a:cs typeface="Calibri" pitchFamily="34" charset="-120"/>
+              </a:rPr>
+              <a:t>Precio de la electricidad</a:t>
+            </a:r>
+            <a:endParaRPr lang="en-US" sz="1200" dirty="0"/>
+          </a:p>
+          <a:p>
+            <a:pPr marL="139700" indent="-139700">
+              <a:lnSpc>
+                <a:spcPct val="142000"/>
+              </a:lnSpc>
+              <a:buSzPct val="100000"/>
+              <a:buChar char="·"/>
+            </a:pPr>
+            <a:r>
+              <a:rPr lang="en-US" sz="1200" dirty="0">
+                <a:solidFill>
+                  <a:srgbClr val="1C1C1C"/>
+                </a:solidFill>
+                <a:latin typeface="Calibri" pitchFamily="34" charset="0"/>
+                <a:ea typeface="Calibri" pitchFamily="34" charset="-122"/>
+                <a:cs typeface="Calibri" pitchFamily="34" charset="-120"/>
+              </a:rPr>
+              <a:t>Demanda de hidrógeno</a:t>
+            </a:r>
+            <a:endParaRPr lang="en-US" sz="1200" dirty="0"/>
+          </a:p>
+        </p:txBody>
+      </p:sp>
+      <p:sp>
+        <p:nvSpPr>
+          <p:cNvPr id="7" name="Shape 5"/>
+          <p:cNvSpPr/>
+          <p:nvPr/>
+        </p:nvSpPr>
+        <p:spPr>
+          <a:xfrm>
+            <a:off x="8220456" y="1645920"/>
+            <a:ext cx="3468319" cy="2395728"/>
+          </a:xfrm>
+          <a:prstGeom prst="roundRect">
+            <a:avLst>
+              <a:gd name="adj" fmla="val 1908"/>
+            </a:avLst>
+          </a:prstGeom>
+          <a:solidFill>
+            <a:srgbClr val="F1F5F7"/>
+          </a:solidFill>
+          <a:ln w="12700">
+            <a:solidFill>
+              <a:srgbClr val="DDE3E6"/>
+            </a:solidFill>
+            <a:prstDash val="solid"/>
+          </a:ln>
+        </p:spPr>
+      </p:sp>
+      <p:sp>
+        <p:nvSpPr>
+          <p:cNvPr id="8" name="Text 6"/>
+          <p:cNvSpPr txBox="1"/>
+          <p:nvPr/>
+        </p:nvSpPr>
+        <p:spPr>
+          <a:xfrm>
+            <a:off x="8421624" y="1792224"/>
+            <a:ext cx="3065983" cy="237744"/>
+          </a:xfrm>
+          <a:prstGeom prst="rect">
+            <a:avLst/>
+          </a:prstGeom>
+          <a:noFill/>
+          <a:ln/>
+        </p:spPr>
+        <p:txBody>
+          <a:bodyPr wrap="square" lIns="0" tIns="0" rIns="0" bIns="0" rtlCol="0" anchor="ctr"/>
+          <a:lstStyle/>
+          <a:p>
+            <a:pPr indent="0" marL="0">
+              <a:buNone/>
+            </a:pPr>
+            <a:r>
+              <a:rPr lang="en-US" sz="950" b="1" spc="120" kern="0" dirty="0">
+                <a:solidFill>
+                  <a:srgbClr val="C8861E"/>
+                </a:solidFill>
+                <a:latin typeface="Calibri" pitchFamily="34" charset="0"/>
+                <a:ea typeface="Calibri" pitchFamily="34" charset="-122"/>
+                <a:cs typeface="Calibri" pitchFamily="34" charset="-120"/>
+              </a:rPr>
+              <a:t>SALIDAS · 6 CONSIGNAS</a:t>
+            </a:r>
+            <a:endParaRPr lang="en-US" sz="950" dirty="0"/>
+          </a:p>
+        </p:txBody>
+      </p:sp>
+      <p:sp>
+        <p:nvSpPr>
+          <p:cNvPr id="9" name="Text 7"/>
+          <p:cNvSpPr txBox="1"/>
+          <p:nvPr/>
+        </p:nvSpPr>
+        <p:spPr>
+          <a:xfrm>
+            <a:off x="8421624" y="2103120"/>
+            <a:ext cx="3065983" cy="1792224"/>
+          </a:xfrm>
+          <a:prstGeom prst="rect">
+            <a:avLst/>
+          </a:prstGeom>
+          <a:noFill/>
+          <a:ln/>
+        </p:spPr>
+        <p:txBody>
+          <a:bodyPr wrap="square" lIns="0" tIns="0" rIns="0" bIns="0" rtlCol="0" anchor="t"/>
+          <a:lstStyle/>
+          <a:p>
+            <a:pPr marL="139700" indent="-139700">
+              <a:lnSpc>
+                <a:spcPct val="142000"/>
+              </a:lnSpc>
+              <a:buSzPct val="100000"/>
+              <a:buChar char="·"/>
+            </a:pPr>
+            <a:r>
+              <a:rPr lang="en-US" sz="1200" dirty="0">
+                <a:solidFill>
+                  <a:srgbClr val="1C1C1C"/>
+                </a:solidFill>
+                <a:latin typeface="Calibri" pitchFamily="34" charset="0"/>
+                <a:ea typeface="Calibri" pitchFamily="34" charset="-122"/>
+                <a:cs typeface="Calibri" pitchFamily="34" charset="-120"/>
+              </a:rPr>
+              <a:t>Consigna de batería</a:t>
+            </a:r>
+            <a:endParaRPr lang="en-US" sz="1200" dirty="0"/>
+          </a:p>
+          <a:p>
+            <a:pPr marL="139700" indent="-139700">
+              <a:lnSpc>
+                <a:spcPct val="142000"/>
+              </a:lnSpc>
+              <a:buSzPct val="100000"/>
+              <a:buChar char="·"/>
+            </a:pPr>
+            <a:r>
+              <a:rPr lang="en-US" sz="1200" dirty="0">
+                <a:solidFill>
+                  <a:srgbClr val="1C1C1C"/>
+                </a:solidFill>
+                <a:latin typeface="Calibri" pitchFamily="34" charset="0"/>
+                <a:ea typeface="Calibri" pitchFamily="34" charset="-122"/>
+                <a:cs typeface="Calibri" pitchFamily="34" charset="-120"/>
+              </a:rPr>
+              <a:t>Consigna de electrolizador</a:t>
+            </a:r>
+            <a:endParaRPr lang="en-US" sz="1200" dirty="0"/>
+          </a:p>
+          <a:p>
+            <a:pPr marL="139700" indent="-139700">
+              <a:lnSpc>
+                <a:spcPct val="142000"/>
+              </a:lnSpc>
+              <a:buSzPct val="100000"/>
+              <a:buChar char="·"/>
+            </a:pPr>
+            <a:r>
+              <a:rPr lang="en-US" sz="1200" dirty="0">
+                <a:solidFill>
+                  <a:srgbClr val="1C1C1C"/>
+                </a:solidFill>
+                <a:latin typeface="Calibri" pitchFamily="34" charset="0"/>
+                <a:ea typeface="Calibri" pitchFamily="34" charset="-122"/>
+                <a:cs typeface="Calibri" pitchFamily="34" charset="-120"/>
+              </a:rPr>
+              <a:t>Consigna de pila de combustible</a:t>
+            </a:r>
+            <a:endParaRPr lang="en-US" sz="1200" dirty="0"/>
+          </a:p>
+          <a:p>
+            <a:pPr marL="139700" indent="-139700">
+              <a:lnSpc>
+                <a:spcPct val="142000"/>
+              </a:lnSpc>
+              <a:buSzPct val="100000"/>
+              <a:buChar char="·"/>
+            </a:pPr>
+            <a:r>
+              <a:rPr lang="en-US" sz="1200" dirty="0">
+                <a:solidFill>
+                  <a:srgbClr val="1C1C1C"/>
+                </a:solidFill>
+                <a:latin typeface="Calibri" pitchFamily="34" charset="0"/>
+                <a:ea typeface="Calibri" pitchFamily="34" charset="-122"/>
+                <a:cs typeface="Calibri" pitchFamily="34" charset="-120"/>
+              </a:rPr>
+              <a:t>Marcha del compresor</a:t>
+            </a:r>
+            <a:endParaRPr lang="en-US" sz="1200" dirty="0"/>
+          </a:p>
+          <a:p>
+            <a:pPr marL="139700" indent="-139700">
+              <a:lnSpc>
+                <a:spcPct val="142000"/>
+              </a:lnSpc>
+              <a:buSzPct val="100000"/>
+              <a:buChar char="·"/>
+            </a:pPr>
+            <a:r>
+              <a:rPr lang="en-US" sz="1200" dirty="0">
+                <a:solidFill>
+                  <a:srgbClr val="1C1C1C"/>
+                </a:solidFill>
+                <a:latin typeface="Calibri" pitchFamily="34" charset="0"/>
+                <a:ea typeface="Calibri" pitchFamily="34" charset="-122"/>
+                <a:cs typeface="Calibri" pitchFamily="34" charset="-120"/>
+              </a:rPr>
+              <a:t>Conexión del electrolizador</a:t>
+            </a:r>
+            <a:endParaRPr lang="en-US" sz="1200" dirty="0"/>
+          </a:p>
+          <a:p>
+            <a:pPr marL="139700" indent="-139700">
+              <a:lnSpc>
+                <a:spcPct val="142000"/>
+              </a:lnSpc>
+              <a:buSzPct val="100000"/>
+              <a:buChar char="·"/>
+            </a:pPr>
+            <a:r>
+              <a:rPr lang="en-US" sz="1200" dirty="0">
+                <a:solidFill>
+                  <a:srgbClr val="1C1C1C"/>
+                </a:solidFill>
+                <a:latin typeface="Calibri" pitchFamily="34" charset="0"/>
+                <a:ea typeface="Calibri" pitchFamily="34" charset="-122"/>
+                <a:cs typeface="Calibri" pitchFamily="34" charset="-120"/>
+              </a:rPr>
+              <a:t>Conexión de la pila</a:t>
+            </a:r>
+            <a:endParaRPr lang="en-US" sz="1200" dirty="0"/>
+          </a:p>
+        </p:txBody>
+      </p:sp>
+      <p:sp>
+        <p:nvSpPr>
+          <p:cNvPr id="10" name="Shape 8"/>
+          <p:cNvSpPr/>
+          <p:nvPr/>
+        </p:nvSpPr>
+        <p:spPr>
+          <a:xfrm>
+            <a:off x="4590288" y="2212848"/>
+            <a:ext cx="3063240" cy="1261872"/>
+          </a:xfrm>
+          <a:prstGeom prst="roundRect">
+            <a:avLst>
+              <a:gd name="adj" fmla="val 4348"/>
+            </a:avLst>
+          </a:prstGeom>
+          <a:solidFill>
+            <a:srgbClr val="10394A"/>
+          </a:solidFill>
+          <a:ln w="12700">
+            <a:solidFill>
+              <a:srgbClr val="10394A"/>
+            </a:solidFill>
+            <a:prstDash val="solid"/>
+          </a:ln>
+        </p:spPr>
+      </p:sp>
+      <p:sp>
+        <p:nvSpPr>
+          <p:cNvPr id="11" name="Text 9"/>
+          <p:cNvSpPr txBox="1"/>
+          <p:nvPr/>
+        </p:nvSpPr>
+        <p:spPr>
+          <a:xfrm>
+            <a:off x="4590288" y="2395728"/>
+            <a:ext cx="3063240" cy="566928"/>
+          </a:xfrm>
+          <a:prstGeom prst="rect">
+            <a:avLst/>
+          </a:prstGeom>
+          <a:noFill/>
+          <a:ln/>
+        </p:spPr>
+        <p:txBody>
+          <a:bodyPr wrap="square" lIns="0" tIns="0" rIns="0" bIns="0" rtlCol="0" anchor="ctr"/>
+          <a:lstStyle/>
+          <a:p>
+            <a:pPr algn="ctr" indent="0" marL="0">
+              <a:buNone/>
+            </a:pPr>
+            <a:r>
+              <a:rPr lang="en-US" sz="3000" b="1" dirty="0">
+                <a:solidFill>
+                  <a:srgbClr val="FFFFFF"/>
+                </a:solidFill>
+                <a:latin typeface="Cambria" pitchFamily="34" charset="0"/>
+                <a:ea typeface="Cambria" pitchFamily="34" charset="-122"/>
+                <a:cs typeface="Cambria" pitchFamily="34" charset="-120"/>
+              </a:rPr>
+              <a:t>EMS</a:t>
+            </a:r>
+            <a:endParaRPr lang="en-US" sz="3000" dirty="0"/>
+          </a:p>
+        </p:txBody>
+      </p:sp>
+      <p:sp>
+        <p:nvSpPr>
+          <p:cNvPr id="12" name="Text 10"/>
+          <p:cNvSpPr txBox="1"/>
+          <p:nvPr/>
+        </p:nvSpPr>
+        <p:spPr>
+          <a:xfrm>
+            <a:off x="4590288" y="2962656"/>
+            <a:ext cx="3063240" cy="274320"/>
+          </a:xfrm>
+          <a:prstGeom prst="rect">
+            <a:avLst/>
+          </a:prstGeom>
+          <a:noFill/>
+          <a:ln/>
+        </p:spPr>
+        <p:txBody>
+          <a:bodyPr wrap="square" lIns="0" tIns="0" rIns="0" bIns="0" rtlCol="0" anchor="ctr"/>
+          <a:lstStyle/>
+          <a:p>
+            <a:pPr algn="ctr" indent="0" marL="0">
+              <a:buNone/>
+            </a:pPr>
+            <a:r>
+              <a:rPr lang="en-US" sz="1150" dirty="0">
+                <a:solidFill>
+                  <a:srgbClr val="A8C4D0"/>
+                </a:solidFill>
+                <a:latin typeface="Calibri" pitchFamily="34" charset="0"/>
+                <a:ea typeface="Calibri" pitchFamily="34" charset="-122"/>
+                <a:cs typeface="Calibri" pitchFamily="34" charset="-120"/>
+              </a:rPr>
+              <a:t>un único bloque de Simulink</a:t>
+            </a:r>
+            <a:endParaRPr lang="en-US" sz="1150" dirty="0"/>
+          </a:p>
+        </p:txBody>
+      </p:sp>
+      <p:sp>
+        <p:nvSpPr>
+          <p:cNvPr id="13" name="Shape 11"/>
+          <p:cNvSpPr/>
+          <p:nvPr/>
+        </p:nvSpPr>
+        <p:spPr>
+          <a:xfrm>
+            <a:off x="4096512" y="2843784"/>
+            <a:ext cx="438912" cy="0"/>
+          </a:xfrm>
+          <a:prstGeom prst="line">
+            <a:avLst/>
+          </a:prstGeom>
+          <a:noFill/>
+          <a:ln w="15875">
+            <a:solidFill>
+              <a:srgbClr val="5F6B72"/>
+            </a:solidFill>
+            <a:prstDash val="solid"/>
+            <a:tailEnd type="triangle"/>
+          </a:ln>
+        </p:spPr>
+      </p:sp>
+      <p:sp>
+        <p:nvSpPr>
+          <p:cNvPr id="14" name="Shape 12"/>
+          <p:cNvSpPr/>
+          <p:nvPr/>
+        </p:nvSpPr>
+        <p:spPr>
+          <a:xfrm>
+            <a:off x="7708392" y="2843784"/>
+            <a:ext cx="438912" cy="0"/>
+          </a:xfrm>
+          <a:prstGeom prst="line">
+            <a:avLst/>
+          </a:prstGeom>
+          <a:noFill/>
+          <a:ln w="15875">
+            <a:solidFill>
+              <a:srgbClr val="5F6B72"/>
+            </a:solidFill>
+            <a:prstDash val="solid"/>
+            <a:tailEnd type="triangle"/>
+          </a:ln>
+        </p:spPr>
+      </p:sp>
+      <p:sp>
+        <p:nvSpPr>
+          <p:cNvPr id="15" name="Text 13"/>
+          <p:cNvSpPr txBox="1"/>
+          <p:nvPr/>
+        </p:nvSpPr>
+        <p:spPr>
+          <a:xfrm>
+            <a:off x="502920" y="4206240"/>
+            <a:ext cx="11185855" cy="292608"/>
+          </a:xfrm>
+          <a:prstGeom prst="rect">
+            <a:avLst/>
+          </a:prstGeom>
+          <a:noFill/>
+          <a:ln/>
+        </p:spPr>
+        <p:txBody>
+          <a:bodyPr wrap="square" lIns="0" tIns="0" rIns="0" bIns="0" rtlCol="0" anchor="ctr"/>
+          <a:lstStyle/>
+          <a:p>
+            <a:pPr algn="ctr" indent="0" marL="0">
+              <a:buNone/>
+            </a:pPr>
+            <a:r>
+              <a:rPr lang="en-US" sz="1150" i="1" dirty="0">
+                <a:solidFill>
+                  <a:srgbClr val="5F6B72"/>
+                </a:solidFill>
+                <a:latin typeface="Calibri" pitchFamily="34" charset="0"/>
+                <a:ea typeface="Calibri" pitchFamily="34" charset="-122"/>
+                <a:cs typeface="Calibri" pitchFamily="34" charset="-120"/>
+              </a:rPr>
+              <a:t>Es lo único que cambia entre versiones: mismo modelo físico, mismos perfiles, misma semilla</a:t>
+            </a:r>
+            <a:endParaRPr lang="en-US" sz="1150" dirty="0"/>
+          </a:p>
+        </p:txBody>
+      </p:sp>
+      <p:sp>
+        <p:nvSpPr>
+          <p:cNvPr id="16" name="Shape 14"/>
           <p:cNvSpPr/>
           <p:nvPr/>
         </p:nvSpPr>
@@ -13172,7 +13770,7 @@
       </p:sp>
       <p:sp>
         <p:nvSpPr>
-          <p:cNvPr id="6" name="Text 3"/>
+          <p:cNvPr id="17" name="Text 15"/>
           <p:cNvSpPr txBox="1"/>
           <p:nvPr/>
         </p:nvSpPr>
@@ -13211,7 +13809,7 @@
       </p:sp>
       <p:sp>
         <p:nvSpPr>
-          <p:cNvPr id="7" name="Text 4"/>
+          <p:cNvPr id="18" name="Text 16"/>
           <p:cNvSpPr txBox="1"/>
           <p:nvPr/>
         </p:nvSpPr>
@@ -13250,7 +13848,7 @@
       </p:sp>
       <p:sp>
         <p:nvSpPr>
-          <p:cNvPr id="8" name="Text 5"/>
+          <p:cNvPr id="19" name="Text 17"/>
           <p:cNvSpPr txBox="1"/>
           <p:nvPr/>
         </p:nvSpPr>
@@ -13292,7 +13890,7 @@
       </p:sp>
       <p:sp>
         <p:nvSpPr>
-          <p:cNvPr id="9" name="Shape 6"/>
+          <p:cNvPr id="20" name="Shape 18"/>
           <p:cNvSpPr/>
           <p:nvPr/>
         </p:nvSpPr>
@@ -13312,7 +13910,7 @@
       </p:sp>
       <p:sp>
         <p:nvSpPr>
-          <p:cNvPr id="10" name="Text 7"/>
+          <p:cNvPr id="21" name="Text 19"/>
           <p:cNvSpPr txBox="1"/>
           <p:nvPr/>
         </p:nvSpPr>
@@ -13351,7 +13949,7 @@
       </p:sp>
       <p:sp>
         <p:nvSpPr>
-          <p:cNvPr id="11" name="Text 8"/>
+          <p:cNvPr id="22" name="Text 20"/>
           <p:cNvSpPr txBox="1"/>
           <p:nvPr/>
         </p:nvSpPr>
@@ -13390,7 +13988,7 @@
       </p:sp>
       <p:sp>
         <p:nvSpPr>
-          <p:cNvPr id="12" name="Text 9"/>
+          <p:cNvPr id="23" name="Text 21"/>
           <p:cNvSpPr txBox="1"/>
           <p:nvPr/>
         </p:nvSpPr>
@@ -13432,7 +14030,7 @@
       </p:sp>
       <p:sp>
         <p:nvSpPr>
-          <p:cNvPr id="13" name="Shape 10"/>
+          <p:cNvPr id="24" name="Shape 22"/>
           <p:cNvSpPr/>
           <p:nvPr/>
         </p:nvSpPr>
@@ -13452,7 +14050,7 @@
       </p:sp>
       <p:sp>
         <p:nvSpPr>
-          <p:cNvPr id="14" name="Text 11"/>
+          <p:cNvPr id="25" name="Text 23"/>
           <p:cNvSpPr txBox="1"/>
           <p:nvPr/>
         </p:nvSpPr>
@@ -13491,7 +14089,7 @@
       </p:sp>
       <p:sp>
         <p:nvSpPr>
-          <p:cNvPr id="15" name="Text 12"/>
+          <p:cNvPr id="26" name="Text 24"/>
           <p:cNvSpPr txBox="1"/>
           <p:nvPr/>
         </p:nvSpPr>
@@ -13530,7 +14128,7 @@
       </p:sp>
       <p:sp>
         <p:nvSpPr>
-          <p:cNvPr id="16" name="Text 13"/>
+          <p:cNvPr id="27" name="Text 25"/>
           <p:cNvSpPr txBox="1"/>
           <p:nvPr/>
         </p:nvSpPr>
@@ -13572,7 +14170,7 @@
       </p:sp>
       <p:sp>
         <p:nvSpPr>
-          <p:cNvPr id="17" name="Shape 14"/>
+          <p:cNvPr id="28" name="Shape 26"/>
           <p:cNvSpPr/>
           <p:nvPr/>
         </p:nvSpPr>
@@ -13594,7 +14192,7 @@
       </p:sp>
       <p:sp>
         <p:nvSpPr>
-          <p:cNvPr id="18" name="Text 15"/>
+          <p:cNvPr id="29" name="Text 27"/>
           <p:cNvSpPr txBox="1"/>
           <p:nvPr/>
         </p:nvSpPr>
@@ -13636,7 +14234,7 @@
       </p:sp>
       <p:sp>
         <p:nvSpPr>
-          <p:cNvPr id="19" name="Text 16"/>
+          <p:cNvPr id="30" name="Text 28"/>
           <p:cNvSpPr txBox="1"/>
           <p:nvPr/>
         </p:nvSpPr>
@@ -13810,48 +14408,9 @@
           </a:prstGeom>
         </p:spPr>
       </p:pic>
-      <p:sp>
-        <p:nvSpPr>
-          <p:cNvPr id="5" name="Text 2"/>
-          <p:cNvSpPr txBox="1"/>
-          <p:nvPr/>
-        </p:nvSpPr>
-        <p:spPr>
-          <a:xfrm>
-            <a:off x="502920" y="4187952"/>
-            <a:ext cx="3576218" cy="274320"/>
-          </a:xfrm>
-          <a:prstGeom prst="rect">
-            <a:avLst/>
-          </a:prstGeom>
-          <a:noFill/>
-          <a:ln/>
-        </p:spPr>
-        <p:txBody>
-          <a:bodyPr wrap="square" lIns="0" tIns="0" rIns="0" bIns="0" rtlCol="0" anchor="ctr"/>
-          <a:lstStyle/>
-          <a:p>
-            <a:pPr algn="ctr" indent="0" marL="0">
-              <a:buNone/>
-            </a:pPr>
-            <a:r>
-              <a:rPr lang="en-US" sz="1050" i="1" dirty="0">
-                <a:solidFill>
-                  <a:srgbClr val="5F6B72"/>
-                </a:solidFill>
-                <a:latin typeface="Calibri" pitchFamily="34" charset="0"/>
-                <a:ea typeface="Calibri" pitchFamily="34" charset="-122"/>
-                <a:cs typeface="Calibri" pitchFamily="34" charset="-120"/>
-              </a:rPr>
-              <a:t>Llegadas por hora del día</a:t>
-            </a:r>
-            <a:endParaRPr lang="en-US" sz="1050" dirty="0"/>
-          </a:p>
-        </p:txBody>
-      </p:sp>
       <p:pic>
         <p:nvPicPr>
-          <p:cNvPr id="6" name="Image 1" descr="img/energia_por_sesion.png">    </p:cNvPr>
+          <p:cNvPr id="5" name="Image 1" descr="img/energia_por_sesion.png">    </p:cNvPr>
           <p:cNvPicPr>
             <a:picLocks noChangeAspect="1"/>
           </p:cNvPicPr>
@@ -13873,48 +14432,9 @@
           </a:prstGeom>
         </p:spPr>
       </p:pic>
-      <p:sp>
-        <p:nvSpPr>
-          <p:cNvPr id="7" name="Text 3"/>
-          <p:cNvSpPr txBox="1"/>
-          <p:nvPr/>
-        </p:nvSpPr>
-        <p:spPr>
-          <a:xfrm>
-            <a:off x="4307738" y="4187952"/>
-            <a:ext cx="3576218" cy="274320"/>
-          </a:xfrm>
-          <a:prstGeom prst="rect">
-            <a:avLst/>
-          </a:prstGeom>
-          <a:noFill/>
-          <a:ln/>
-        </p:spPr>
-        <p:txBody>
-          <a:bodyPr wrap="square" lIns="0" tIns="0" rIns="0" bIns="0" rtlCol="0" anchor="ctr"/>
-          <a:lstStyle/>
-          <a:p>
-            <a:pPr algn="ctr" indent="0" marL="0">
-              <a:buNone/>
-            </a:pPr>
-            <a:r>
-              <a:rPr lang="en-US" sz="1050" i="1" dirty="0">
-                <a:solidFill>
-                  <a:srgbClr val="5F6B72"/>
-                </a:solidFill>
-                <a:latin typeface="Calibri" pitchFamily="34" charset="0"/>
-                <a:ea typeface="Calibri" pitchFamily="34" charset="-122"/>
-                <a:cs typeface="Calibri" pitchFamily="34" charset="-120"/>
-              </a:rPr>
-              <a:t>Energía por sesión</a:t>
-            </a:r>
-            <a:endParaRPr lang="en-US" sz="1050" dirty="0"/>
-          </a:p>
-        </p:txBody>
-      </p:sp>
       <p:pic>
         <p:nvPicPr>
-          <p:cNvPr id="8" name="Image 2" descr="img/colas_espera_cargadores.png">    </p:cNvPr>
+          <p:cNvPr id="6" name="Image 2" descr="img/colas_espera_cargadores.png">    </p:cNvPr>
           <p:cNvPicPr>
             <a:picLocks noChangeAspect="1"/>
           </p:cNvPicPr>
@@ -13938,13 +14458,91 @@
       </p:pic>
       <p:sp>
         <p:nvSpPr>
+          <p:cNvPr id="7" name="Text 2"/>
+          <p:cNvSpPr txBox="1"/>
+          <p:nvPr/>
+        </p:nvSpPr>
+        <p:spPr>
+          <a:xfrm>
+            <a:off x="502920" y="3956707"/>
+            <a:ext cx="3576218" cy="274320"/>
+          </a:xfrm>
+          <a:prstGeom prst="rect">
+            <a:avLst/>
+          </a:prstGeom>
+          <a:noFill/>
+          <a:ln/>
+        </p:spPr>
+        <p:txBody>
+          <a:bodyPr wrap="square" lIns="0" tIns="0" rIns="0" bIns="0" rtlCol="0" anchor="ctr"/>
+          <a:lstStyle/>
+          <a:p>
+            <a:pPr algn="ctr" indent="0" marL="0">
+              <a:buNone/>
+            </a:pPr>
+            <a:r>
+              <a:rPr lang="en-US" sz="1050" i="1" dirty="0">
+                <a:solidFill>
+                  <a:srgbClr val="5F6B72"/>
+                </a:solidFill>
+                <a:latin typeface="Calibri" pitchFamily="34" charset="0"/>
+                <a:ea typeface="Calibri" pitchFamily="34" charset="-122"/>
+                <a:cs typeface="Calibri" pitchFamily="34" charset="-120"/>
+              </a:rPr>
+              <a:t>Llegadas por hora del día</a:t>
+            </a:r>
+            <a:endParaRPr lang="en-US" sz="1050" dirty="0"/>
+          </a:p>
+        </p:txBody>
+      </p:sp>
+      <p:sp>
+        <p:nvSpPr>
+          <p:cNvPr id="8" name="Text 3"/>
+          <p:cNvSpPr txBox="1"/>
+          <p:nvPr/>
+        </p:nvSpPr>
+        <p:spPr>
+          <a:xfrm>
+            <a:off x="4307738" y="3956707"/>
+            <a:ext cx="3576218" cy="274320"/>
+          </a:xfrm>
+          <a:prstGeom prst="rect">
+            <a:avLst/>
+          </a:prstGeom>
+          <a:noFill/>
+          <a:ln/>
+        </p:spPr>
+        <p:txBody>
+          <a:bodyPr wrap="square" lIns="0" tIns="0" rIns="0" bIns="0" rtlCol="0" anchor="ctr"/>
+          <a:lstStyle/>
+          <a:p>
+            <a:pPr algn="ctr" indent="0" marL="0">
+              <a:buNone/>
+            </a:pPr>
+            <a:r>
+              <a:rPr lang="en-US" sz="1050" i="1" dirty="0">
+                <a:solidFill>
+                  <a:srgbClr val="5F6B72"/>
+                </a:solidFill>
+                <a:latin typeface="Calibri" pitchFamily="34" charset="0"/>
+                <a:ea typeface="Calibri" pitchFamily="34" charset="-122"/>
+                <a:cs typeface="Calibri" pitchFamily="34" charset="-120"/>
+              </a:rPr>
+              <a:t>Energía por sesión</a:t>
+            </a:r>
+            <a:endParaRPr lang="en-US" sz="1050" dirty="0"/>
+          </a:p>
+        </p:txBody>
+      </p:sp>
+      <p:sp>
+        <p:nvSpPr>
           <p:cNvPr id="9" name="Text 4"/>
           <p:cNvSpPr txBox="1"/>
           <p:nvPr/>
         </p:nvSpPr>
         <p:spPr>
           <a:xfrm>
-            <a:off x="8112557" y="4187952"/>
+            <a:off x="8112557" y="3956707"/>
             <a:ext cx="3576218" cy="274320"/>
           </a:xfrm>
           <a:prstGeom prst="rect">
@@ -13983,7 +14581,7 @@
         </p:nvSpPr>
         <p:spPr>
           <a:xfrm>
-            <a:off x="502920" y="4572000"/>
+            <a:off x="502920" y="4432195"/>
             <a:ext cx="11185855" cy="274320"/>
           </a:xfrm>
           <a:prstGeom prst="rect">
@@ -14022,7 +14620,7 @@
         </p:nvSpPr>
         <p:spPr>
           <a:xfrm>
-            <a:off x="502920" y="4864608"/>
+            <a:off x="502920" y="4724803"/>
             <a:ext cx="11185855" cy="274320"/>
           </a:xfrm>
           <a:prstGeom prst="rect">
@@ -14061,7 +14659,7 @@
         </p:nvSpPr>
         <p:spPr>
           <a:xfrm>
-            <a:off x="502920" y="5157216"/>
+            <a:off x="502920" y="5017411"/>
             <a:ext cx="11185855" cy="274320"/>
           </a:xfrm>
           <a:prstGeom prst="rect">
@@ -14086,7 +14684,7 @@
                 <a:ea typeface="Calibri" pitchFamily="34" charset="-122"/>
                 <a:cs typeface="Calibri" pitchFamily="34" charset="-120"/>
               </a:rPr>
-              <a:t>De ahí salen los 50 kW del cargador y, por colas M/M/c sobre la hora punta, que sean dos</a:t>
+              <a:t>De ahí salen los 50 kW del cargador —el estándar europeo de carga rápida— y que los cargadores sean dos</a:t>
             </a:r>
             <a:endParaRPr lang="en-US" sz="1250" dirty="0"/>
           </a:p>
@@ -14244,1307 +14842,829 @@
           </a:p>
         </p:txBody>
       </p:sp>
-      <p:graphicFrame>
-        <p:nvGraphicFramePr>
-          <p:cNvPr id="7" name="Table 0"/>
-          <p:cNvGraphicFramePr>
-            <a:graphicFrameLocks noGrp="1"/>
-          </p:cNvGraphicFramePr>
-          <p:nvPr>
-            <p:extLst>
-              <p:ext uri="{D42A27DB-BD31-4B8C-83A1-F6EECF244321}">
-                <p14:modId xmlns:p14="http://schemas.microsoft.com/office/powerpoint/2010/main" val="1579011935"/>
-              </p:ext>
-            </p:extLst>
-          </p:nvPr>
-        </p:nvGraphicFramePr>
-        <p:xfrm>
-          <a:off x="502920" y="1536192"/>
-          <a:ext cx="11185855" cy="914400"/>
-        </p:xfrm>
-        <a:graphic>
-          <a:graphicData uri="http://schemas.openxmlformats.org/drawingml/2006/table">
-            <a:tbl>
-              <a:tblPr/>
-              <a:tblGrid>
-                <a:gridCol w="1691640"/>
-                <a:gridCol w="4754880"/>
-                <a:gridCol w="4739335"/>
-              </a:tblGrid>
-              <a:tr h="566928">
-                <a:tc>
-                  <a:txBody>
-                    <a:bodyPr/>
-                    <a:lstStyle/>
-                    <a:p>
-                      <a:pPr indent="0" marL="0">
-                        <a:buNone/>
-                      </a:pPr>
-                      <a:endParaRPr lang="en-US" sz="1250" dirty="0">
-                        <a:latin typeface="Calibri" charset="0"/>
-                        <a:ea typeface="Calibri" charset="0"/>
-                        <a:cs typeface="Calibri" charset="0"/>
-                      </a:endParaRPr>
-                    </a:p>
-                  </a:txBody>
-                  <a:tcPr marL="91440" marR="91440" marT="91440" marB="91440" anchor="ctr">
-                    <a:lnL w="12700" cap="flat" cmpd="sng" algn="ctr">
-                      <a:solidFill>
-                        <a:srgbClr val="DDE3E6"/>
-                      </a:solidFill>
-                      <a:prstDash val="solid"/>
-                      <a:round/>
-                      <a:headEnd type="none" w="med" len="med"/>
-                      <a:tailEnd type="none" w="med" len="med"/>
-                    </a:lnL>
-                    <a:lnR w="12700" cap="flat" cmpd="sng" algn="ctr">
-                      <a:solidFill>
-                        <a:srgbClr val="DDE3E6"/>
-                      </a:solidFill>
-                      <a:prstDash val="solid"/>
-                      <a:round/>
-                      <a:headEnd type="none" w="med" len="med"/>
-                      <a:tailEnd type="none" w="med" len="med"/>
-                    </a:lnR>
-                    <a:lnT w="12700" cap="flat" cmpd="sng" algn="ctr">
-                      <a:solidFill>
-                        <a:srgbClr val="DDE3E6"/>
-                      </a:solidFill>
-                      <a:prstDash val="solid"/>
-                      <a:round/>
-                      <a:headEnd type="none" w="med" len="med"/>
-                      <a:tailEnd type="none" w="med" len="med"/>
-                    </a:lnT>
-                    <a:lnB w="12700" cap="flat" cmpd="sng" algn="ctr">
-                      <a:solidFill>
-                        <a:srgbClr val="DDE3E6"/>
-                      </a:solidFill>
-                      <a:prstDash val="solid"/>
-                      <a:round/>
-                      <a:headEnd type="none" w="med" len="med"/>
-                      <a:tailEnd type="none" w="med" len="med"/>
-                    </a:lnB>
-                    <a:solidFill>
-                      <a:srgbClr val="10394A"/>
-                    </a:solidFill>
-                  </a:tcPr>
-                </a:tc>
-                <a:tc>
-                  <a:txBody>
-                    <a:bodyPr/>
-                    <a:lstStyle/>
-                    <a:p>
-                      <a:pPr indent="0" marL="0">
-                        <a:buNone/>
-                      </a:pPr>
-                      <a:r>
-                        <a:rPr lang="en-US" sz="1250" b="1" dirty="0">
-                          <a:solidFill>
-                            <a:srgbClr val="FFFFFF"/>
-                          </a:solidFill>
-                          <a:latin typeface="Calibri" pitchFamily="34" charset="0"/>
-                          <a:ea typeface="Calibri" pitchFamily="34" charset="-122"/>
-                          <a:cs typeface="Calibri" pitchFamily="34" charset="-120"/>
-                        </a:rPr>
-                        <a:t>Modelo solar</a:t>
-                      </a:r>
-                      <a:endParaRPr lang="en-US" sz="1250" dirty="0">
-                        <a:latin typeface="Calibri" charset="0"/>
-                        <a:ea typeface="Calibri" charset="0"/>
-                        <a:cs typeface="Calibri" charset="0"/>
-                      </a:endParaRPr>
-                    </a:p>
-                  </a:txBody>
-                  <a:tcPr marL="91440" marR="91440" marT="91440" marB="91440" anchor="ctr">
-                    <a:lnL w="12700" cap="flat" cmpd="sng" algn="ctr">
-                      <a:solidFill>
-                        <a:srgbClr val="DDE3E6"/>
-                      </a:solidFill>
-                      <a:prstDash val="solid"/>
-                      <a:round/>
-                      <a:headEnd type="none" w="med" len="med"/>
-                      <a:tailEnd type="none" w="med" len="med"/>
-                    </a:lnL>
-                    <a:lnR w="12700" cap="flat" cmpd="sng" algn="ctr">
-                      <a:solidFill>
-                        <a:srgbClr val="DDE3E6"/>
-                      </a:solidFill>
-                      <a:prstDash val="solid"/>
-                      <a:round/>
-                      <a:headEnd type="none" w="med" len="med"/>
-                      <a:tailEnd type="none" w="med" len="med"/>
-                    </a:lnR>
-                    <a:lnT w="12700" cap="flat" cmpd="sng" algn="ctr">
-                      <a:solidFill>
-                        <a:srgbClr val="DDE3E6"/>
-                      </a:solidFill>
-                      <a:prstDash val="solid"/>
-                      <a:round/>
-                      <a:headEnd type="none" w="med" len="med"/>
-                      <a:tailEnd type="none" w="med" len="med"/>
-                    </a:lnT>
-                    <a:lnB w="12700" cap="flat" cmpd="sng" algn="ctr">
-                      <a:solidFill>
-                        <a:srgbClr val="DDE3E6"/>
-                      </a:solidFill>
-                      <a:prstDash val="solid"/>
-                      <a:round/>
-                      <a:headEnd type="none" w="med" len="med"/>
-                      <a:tailEnd type="none" w="med" len="med"/>
-                    </a:lnB>
-                    <a:solidFill>
-                      <a:srgbClr val="10394A"/>
-                    </a:solidFill>
-                  </a:tcPr>
-                </a:tc>
-                <a:tc>
-                  <a:txBody>
-                    <a:bodyPr/>
-                    <a:lstStyle/>
-                    <a:p>
-                      <a:pPr indent="0" marL="0">
-                        <a:buNone/>
-                      </a:pPr>
-                      <a:r>
-                        <a:rPr lang="en-US" sz="1250" b="1" dirty="0">
-                          <a:solidFill>
-                            <a:srgbClr val="FFFFFF"/>
-                          </a:solidFill>
-                          <a:latin typeface="Calibri" pitchFamily="34" charset="0"/>
-                          <a:ea typeface="Calibri" pitchFamily="34" charset="-122"/>
-                          <a:cs typeface="Calibri" pitchFamily="34" charset="-120"/>
-                        </a:rPr>
-                        <a:t>Modelo de precio</a:t>
-                      </a:r>
-                      <a:endParaRPr lang="en-US" sz="1250" dirty="0">
-                        <a:latin typeface="Calibri" charset="0"/>
-                        <a:ea typeface="Calibri" charset="0"/>
-                        <a:cs typeface="Calibri" charset="0"/>
-                      </a:endParaRPr>
-                    </a:p>
-                  </a:txBody>
-                  <a:tcPr marL="91440" marR="91440" marT="91440" marB="91440" anchor="ctr">
-                    <a:lnL w="12700" cap="flat" cmpd="sng" algn="ctr">
-                      <a:solidFill>
-                        <a:srgbClr val="DDE3E6"/>
-                      </a:solidFill>
-                      <a:prstDash val="solid"/>
-                      <a:round/>
-                      <a:headEnd type="none" w="med" len="med"/>
-                      <a:tailEnd type="none" w="med" len="med"/>
-                    </a:lnL>
-                    <a:lnR w="12700" cap="flat" cmpd="sng" algn="ctr">
-                      <a:solidFill>
-                        <a:srgbClr val="DDE3E6"/>
-                      </a:solidFill>
-                      <a:prstDash val="solid"/>
-                      <a:round/>
-                      <a:headEnd type="none" w="med" len="med"/>
-                      <a:tailEnd type="none" w="med" len="med"/>
-                    </a:lnR>
-                    <a:lnT w="12700" cap="flat" cmpd="sng" algn="ctr">
-                      <a:solidFill>
-                        <a:srgbClr val="DDE3E6"/>
-                      </a:solidFill>
-                      <a:prstDash val="solid"/>
-                      <a:round/>
-                      <a:headEnd type="none" w="med" len="med"/>
-                      <a:tailEnd type="none" w="med" len="med"/>
-                    </a:lnT>
-                    <a:lnB w="12700" cap="flat" cmpd="sng" algn="ctr">
-                      <a:solidFill>
-                        <a:srgbClr val="DDE3E6"/>
-                      </a:solidFill>
-                      <a:prstDash val="solid"/>
-                      <a:round/>
-                      <a:headEnd type="none" w="med" len="med"/>
-                      <a:tailEnd type="none" w="med" len="med"/>
-                    </a:lnB>
-                    <a:solidFill>
-                      <a:srgbClr val="10394A"/>
-                    </a:solidFill>
-                  </a:tcPr>
-                </a:tc>
-              </a:tr>
-              <a:tr h="566928">
-                <a:tc>
-                  <a:txBody>
-                    <a:bodyPr/>
-                    <a:lstStyle/>
-                    <a:p>
-                      <a:pPr indent="0" marL="0">
-                        <a:buNone/>
-                      </a:pPr>
-                      <a:r>
-                        <a:rPr lang="en-US" sz="1250" b="1" dirty="0">
-                          <a:solidFill>
-                            <a:srgbClr val="10394A"/>
-                          </a:solidFill>
-                          <a:latin typeface="Calibri" pitchFamily="34" charset="0"/>
-                          <a:ea typeface="Calibri" pitchFamily="34" charset="-122"/>
-                          <a:cs typeface="Calibri" pitchFamily="34" charset="-120"/>
-                        </a:rPr>
-                        <a:t>Fuente</a:t>
-                      </a:r>
-                      <a:endParaRPr lang="en-US" sz="1250" dirty="0">
-                        <a:latin typeface="Calibri" charset="0"/>
-                        <a:ea typeface="Calibri" charset="0"/>
-                        <a:cs typeface="Calibri" charset="0"/>
-                      </a:endParaRPr>
-                    </a:p>
-                  </a:txBody>
-                  <a:tcPr marL="91440" marR="91440" marT="91440" marB="91440" anchor="ctr">
-                    <a:lnL w="12700" cap="flat" cmpd="sng" algn="ctr">
-                      <a:solidFill>
-                        <a:srgbClr val="DDE3E6"/>
-                      </a:solidFill>
-                      <a:prstDash val="solid"/>
-                      <a:round/>
-                      <a:headEnd type="none" w="med" len="med"/>
-                      <a:tailEnd type="none" w="med" len="med"/>
-                    </a:lnL>
-                    <a:lnR w="12700" cap="flat" cmpd="sng" algn="ctr">
-                      <a:solidFill>
-                        <a:srgbClr val="DDE3E6"/>
-                      </a:solidFill>
-                      <a:prstDash val="solid"/>
-                      <a:round/>
-                      <a:headEnd type="none" w="med" len="med"/>
-                      <a:tailEnd type="none" w="med" len="med"/>
-                    </a:lnR>
-                    <a:lnT w="12700" cap="flat" cmpd="sng" algn="ctr">
-                      <a:solidFill>
-                        <a:srgbClr val="DDE3E6"/>
-                      </a:solidFill>
-                      <a:prstDash val="solid"/>
-                      <a:round/>
-                      <a:headEnd type="none" w="med" len="med"/>
-                      <a:tailEnd type="none" w="med" len="med"/>
-                    </a:lnT>
-                    <a:lnB w="12700" cap="flat" cmpd="sng" algn="ctr">
-                      <a:solidFill>
-                        <a:srgbClr val="DDE3E6"/>
-                      </a:solidFill>
-                      <a:prstDash val="solid"/>
-                      <a:round/>
-                      <a:headEnd type="none" w="med" len="med"/>
-                      <a:tailEnd type="none" w="med" len="med"/>
-                    </a:lnB>
-                    <a:solidFill>
-                      <a:srgbClr val="FFFFFF"/>
-                    </a:solidFill>
-                  </a:tcPr>
-                </a:tc>
-                <a:tc>
-                  <a:txBody>
-                    <a:bodyPr/>
-                    <a:lstStyle/>
-                    <a:p>
-                      <a:pPr indent="0" marL="0">
-                        <a:buNone/>
-                      </a:pPr>
-                      <a:r>
-                        <a:rPr lang="en-US" sz="1250" dirty="0">
-                          <a:solidFill>
-                            <a:srgbClr val="1C1C1C"/>
-                          </a:solidFill>
-                          <a:latin typeface="Calibri" pitchFamily="34" charset="0"/>
-                          <a:ea typeface="Calibri" pitchFamily="34" charset="-122"/>
-                          <a:cs typeface="Calibri" pitchFamily="34" charset="-120"/>
-                        </a:rPr>
-                        <a:t>NASA POWER, Sevilla (37,39° N)</a:t>
-                      </a:r>
-                      <a:endParaRPr lang="en-US" sz="1250" dirty="0">
-                        <a:latin typeface="Calibri" charset="0"/>
-                        <a:ea typeface="Calibri" charset="0"/>
-                        <a:cs typeface="Calibri" charset="0"/>
-                      </a:endParaRPr>
-                    </a:p>
-                  </a:txBody>
-                  <a:tcPr marL="91440" marR="91440" marT="91440" marB="91440" anchor="ctr">
-                    <a:lnL w="12700" cap="flat" cmpd="sng" algn="ctr">
-                      <a:solidFill>
-                        <a:srgbClr val="DDE3E6"/>
-                      </a:solidFill>
-                      <a:prstDash val="solid"/>
-                      <a:round/>
-                      <a:headEnd type="none" w="med" len="med"/>
-                      <a:tailEnd type="none" w="med" len="med"/>
-                    </a:lnL>
-                    <a:lnR w="12700" cap="flat" cmpd="sng" algn="ctr">
-                      <a:solidFill>
-                        <a:srgbClr val="DDE3E6"/>
-                      </a:solidFill>
-                      <a:prstDash val="solid"/>
-                      <a:round/>
-                      <a:headEnd type="none" w="med" len="med"/>
-                      <a:tailEnd type="none" w="med" len="med"/>
-                    </a:lnR>
-                    <a:lnT w="12700" cap="flat" cmpd="sng" algn="ctr">
-                      <a:solidFill>
-                        <a:srgbClr val="DDE3E6"/>
-                      </a:solidFill>
-                      <a:prstDash val="solid"/>
-                      <a:round/>
-                      <a:headEnd type="none" w="med" len="med"/>
-                      <a:tailEnd type="none" w="med" len="med"/>
-                    </a:lnT>
-                    <a:lnB w="12700" cap="flat" cmpd="sng" algn="ctr">
-                      <a:solidFill>
-                        <a:srgbClr val="DDE3E6"/>
-                      </a:solidFill>
-                      <a:prstDash val="solid"/>
-                      <a:round/>
-                      <a:headEnd type="none" w="med" len="med"/>
-                      <a:tailEnd type="none" w="med" len="med"/>
-                    </a:lnB>
-                    <a:solidFill>
-                      <a:srgbClr val="FFFFFF"/>
-                    </a:solidFill>
-                  </a:tcPr>
-                </a:tc>
-                <a:tc>
-                  <a:txBody>
-                    <a:bodyPr/>
-                    <a:lstStyle/>
-                    <a:p>
-                      <a:pPr indent="0" marL="0">
-                        <a:buNone/>
-                      </a:pPr>
-                      <a:r>
-                        <a:rPr lang="en-US" sz="1250" dirty="0">
-                          <a:solidFill>
-                            <a:srgbClr val="1C1C1C"/>
-                          </a:solidFill>
-                          <a:latin typeface="Calibri" pitchFamily="34" charset="0"/>
-                          <a:ea typeface="Calibri" pitchFamily="34" charset="-122"/>
-                          <a:cs typeface="Calibri" pitchFamily="34" charset="-120"/>
-                        </a:rPr>
-                        <a:t>ENTSO-E, mercado diario España</a:t>
-                      </a:r>
-                      <a:endParaRPr lang="en-US" sz="1250" dirty="0">
-                        <a:latin typeface="Calibri" charset="0"/>
-                        <a:ea typeface="Calibri" charset="0"/>
-                        <a:cs typeface="Calibri" charset="0"/>
-                      </a:endParaRPr>
-                    </a:p>
-                  </a:txBody>
-                  <a:tcPr marL="91440" marR="91440" marT="91440" marB="91440" anchor="ctr">
-                    <a:lnL w="12700" cap="flat" cmpd="sng" algn="ctr">
-                      <a:solidFill>
-                        <a:srgbClr val="DDE3E6"/>
-                      </a:solidFill>
-                      <a:prstDash val="solid"/>
-                      <a:round/>
-                      <a:headEnd type="none" w="med" len="med"/>
-                      <a:tailEnd type="none" w="med" len="med"/>
-                    </a:lnL>
-                    <a:lnR w="12700" cap="flat" cmpd="sng" algn="ctr">
-                      <a:solidFill>
-                        <a:srgbClr val="DDE3E6"/>
-                      </a:solidFill>
-                      <a:prstDash val="solid"/>
-                      <a:round/>
-                      <a:headEnd type="none" w="med" len="med"/>
-                      <a:tailEnd type="none" w="med" len="med"/>
-                    </a:lnR>
-                    <a:lnT w="12700" cap="flat" cmpd="sng" algn="ctr">
-                      <a:solidFill>
-                        <a:srgbClr val="DDE3E6"/>
-                      </a:solidFill>
-                      <a:prstDash val="solid"/>
-                      <a:round/>
-                      <a:headEnd type="none" w="med" len="med"/>
-                      <a:tailEnd type="none" w="med" len="med"/>
-                    </a:lnT>
-                    <a:lnB w="12700" cap="flat" cmpd="sng" algn="ctr">
-                      <a:solidFill>
-                        <a:srgbClr val="DDE3E6"/>
-                      </a:solidFill>
-                      <a:prstDash val="solid"/>
-                      <a:round/>
-                      <a:headEnd type="none" w="med" len="med"/>
-                      <a:tailEnd type="none" w="med" len="med"/>
-                    </a:lnB>
-                    <a:solidFill>
-                      <a:srgbClr val="FFFFFF"/>
-                    </a:solidFill>
-                  </a:tcPr>
-                </a:tc>
-              </a:tr>
-              <a:tr h="566928">
-                <a:tc>
-                  <a:txBody>
-                    <a:bodyPr/>
-                    <a:lstStyle/>
-                    <a:p>
-                      <a:pPr indent="0" marL="0">
-                        <a:buNone/>
-                      </a:pPr>
-                      <a:r>
-                        <a:rPr lang="en-US" sz="1250" b="1" dirty="0">
-                          <a:solidFill>
-                            <a:srgbClr val="10394A"/>
-                          </a:solidFill>
-                          <a:latin typeface="Calibri" pitchFamily="34" charset="0"/>
-                          <a:ea typeface="Calibri" pitchFamily="34" charset="-122"/>
-                          <a:cs typeface="Calibri" pitchFamily="34" charset="-120"/>
-                        </a:rPr>
-                        <a:t>Periodo</a:t>
-                      </a:r>
-                      <a:endParaRPr lang="en-US" sz="1250" dirty="0">
-                        <a:latin typeface="Calibri" charset="0"/>
-                        <a:ea typeface="Calibri" charset="0"/>
-                        <a:cs typeface="Calibri" charset="0"/>
-                      </a:endParaRPr>
-                    </a:p>
-                  </a:txBody>
-                  <a:tcPr marL="91440" marR="91440" marT="91440" marB="91440" anchor="ctr">
-                    <a:lnL w="12700" cap="flat" cmpd="sng" algn="ctr">
-                      <a:solidFill>
-                        <a:srgbClr val="DDE3E6"/>
-                      </a:solidFill>
-                      <a:prstDash val="solid"/>
-                      <a:round/>
-                      <a:headEnd type="none" w="med" len="med"/>
-                      <a:tailEnd type="none" w="med" len="med"/>
-                    </a:lnL>
-                    <a:lnR w="12700" cap="flat" cmpd="sng" algn="ctr">
-                      <a:solidFill>
-                        <a:srgbClr val="DDE3E6"/>
-                      </a:solidFill>
-                      <a:prstDash val="solid"/>
-                      <a:round/>
-                      <a:headEnd type="none" w="med" len="med"/>
-                      <a:tailEnd type="none" w="med" len="med"/>
-                    </a:lnR>
-                    <a:lnT w="12700" cap="flat" cmpd="sng" algn="ctr">
-                      <a:solidFill>
-                        <a:srgbClr val="DDE3E6"/>
-                      </a:solidFill>
-                      <a:prstDash val="solid"/>
-                      <a:round/>
-                      <a:headEnd type="none" w="med" len="med"/>
-                      <a:tailEnd type="none" w="med" len="med"/>
-                    </a:lnT>
-                    <a:lnB w="12700" cap="flat" cmpd="sng" algn="ctr">
-                      <a:solidFill>
-                        <a:srgbClr val="DDE3E6"/>
-                      </a:solidFill>
-                      <a:prstDash val="solid"/>
-                      <a:round/>
-                      <a:headEnd type="none" w="med" len="med"/>
-                      <a:tailEnd type="none" w="med" len="med"/>
-                    </a:lnB>
-                    <a:solidFill>
-                      <a:srgbClr val="F1F5F7"/>
-                    </a:solidFill>
-                  </a:tcPr>
-                </a:tc>
-                <a:tc>
-                  <a:txBody>
-                    <a:bodyPr/>
-                    <a:lstStyle/>
-                    <a:p>
-                      <a:pPr indent="0" marL="0">
-                        <a:buNone/>
-                      </a:pPr>
-                      <a:r>
-                        <a:rPr lang="en-US" sz="1250" dirty="0">
-                          <a:solidFill>
-                            <a:srgbClr val="1C1C1C"/>
-                          </a:solidFill>
-                          <a:latin typeface="Calibri" pitchFamily="34" charset="0"/>
-                          <a:ea typeface="Calibri" pitchFamily="34" charset="-122"/>
-                          <a:cs typeface="Calibri" pitchFamily="34" charset="-120"/>
-                        </a:rPr>
-                        <a:t>2007 – 2025  ·  19 años horarios</a:t>
-                      </a:r>
-                      <a:endParaRPr lang="en-US" sz="1250" dirty="0">
-                        <a:latin typeface="Calibri" charset="0"/>
-                        <a:ea typeface="Calibri" charset="0"/>
-                        <a:cs typeface="Calibri" charset="0"/>
-                      </a:endParaRPr>
-                    </a:p>
-                  </a:txBody>
-                  <a:tcPr marL="91440" marR="91440" marT="91440" marB="91440" anchor="ctr">
-                    <a:lnL w="12700" cap="flat" cmpd="sng" algn="ctr">
-                      <a:solidFill>
-                        <a:srgbClr val="DDE3E6"/>
-                      </a:solidFill>
-                      <a:prstDash val="solid"/>
-                      <a:round/>
-                      <a:headEnd type="none" w="med" len="med"/>
-                      <a:tailEnd type="none" w="med" len="med"/>
-                    </a:lnL>
-                    <a:lnR w="12700" cap="flat" cmpd="sng" algn="ctr">
-                      <a:solidFill>
-                        <a:srgbClr val="DDE3E6"/>
-                      </a:solidFill>
-                      <a:prstDash val="solid"/>
-                      <a:round/>
-                      <a:headEnd type="none" w="med" len="med"/>
-                      <a:tailEnd type="none" w="med" len="med"/>
-                    </a:lnR>
-                    <a:lnT w="12700" cap="flat" cmpd="sng" algn="ctr">
-                      <a:solidFill>
-                        <a:srgbClr val="DDE3E6"/>
-                      </a:solidFill>
-                      <a:prstDash val="solid"/>
-                      <a:round/>
-                      <a:headEnd type="none" w="med" len="med"/>
-                      <a:tailEnd type="none" w="med" len="med"/>
-                    </a:lnT>
-                    <a:lnB w="12700" cap="flat" cmpd="sng" algn="ctr">
-                      <a:solidFill>
-                        <a:srgbClr val="DDE3E6"/>
-                      </a:solidFill>
-                      <a:prstDash val="solid"/>
-                      <a:round/>
-                      <a:headEnd type="none" w="med" len="med"/>
-                      <a:tailEnd type="none" w="med" len="med"/>
-                    </a:lnB>
-                    <a:solidFill>
-                      <a:srgbClr val="F1F5F7"/>
-                    </a:solidFill>
-                  </a:tcPr>
-                </a:tc>
-                <a:tc>
-                  <a:txBody>
-                    <a:bodyPr/>
-                    <a:lstStyle/>
-                    <a:p>
-                      <a:pPr indent="0" marL="0">
-                        <a:buNone/>
-                      </a:pPr>
-                      <a:r>
-                        <a:rPr lang="en-US" sz="1250" dirty="0">
-                          <a:solidFill>
-                            <a:srgbClr val="1C1C1C"/>
-                          </a:solidFill>
-                          <a:latin typeface="Calibri" pitchFamily="34" charset="0"/>
-                          <a:ea typeface="Calibri" pitchFamily="34" charset="-122"/>
-                          <a:cs typeface="Calibri" pitchFamily="34" charset="-120"/>
-                        </a:rPr>
-                        <a:t>2021 – 2025  ·  ≈43 800 horas</a:t>
-                      </a:r>
-                      <a:endParaRPr lang="en-US" sz="1250" dirty="0">
-                        <a:latin typeface="Calibri" charset="0"/>
-                        <a:ea typeface="Calibri" charset="0"/>
-                        <a:cs typeface="Calibri" charset="0"/>
-                      </a:endParaRPr>
-                    </a:p>
-                  </a:txBody>
-                  <a:tcPr marL="91440" marR="91440" marT="91440" marB="91440" anchor="ctr">
-                    <a:lnL w="12700" cap="flat" cmpd="sng" algn="ctr">
-                      <a:solidFill>
-                        <a:srgbClr val="DDE3E6"/>
-                      </a:solidFill>
-                      <a:prstDash val="solid"/>
-                      <a:round/>
-                      <a:headEnd type="none" w="med" len="med"/>
-                      <a:tailEnd type="none" w="med" len="med"/>
-                    </a:lnL>
-                    <a:lnR w="12700" cap="flat" cmpd="sng" algn="ctr">
-                      <a:solidFill>
-                        <a:srgbClr val="DDE3E6"/>
-                      </a:solidFill>
-                      <a:prstDash val="solid"/>
-                      <a:round/>
-                      <a:headEnd type="none" w="med" len="med"/>
-                      <a:tailEnd type="none" w="med" len="med"/>
-                    </a:lnR>
-                    <a:lnT w="12700" cap="flat" cmpd="sng" algn="ctr">
-                      <a:solidFill>
-                        <a:srgbClr val="DDE3E6"/>
-                      </a:solidFill>
-                      <a:prstDash val="solid"/>
-                      <a:round/>
-                      <a:headEnd type="none" w="med" len="med"/>
-                      <a:tailEnd type="none" w="med" len="med"/>
-                    </a:lnT>
-                    <a:lnB w="12700" cap="flat" cmpd="sng" algn="ctr">
-                      <a:solidFill>
-                        <a:srgbClr val="DDE3E6"/>
-                      </a:solidFill>
-                      <a:prstDash val="solid"/>
-                      <a:round/>
-                      <a:headEnd type="none" w="med" len="med"/>
-                      <a:tailEnd type="none" w="med" len="med"/>
-                    </a:lnB>
-                    <a:solidFill>
-                      <a:srgbClr val="F1F5F7"/>
-                    </a:solidFill>
-                  </a:tcPr>
-                </a:tc>
-              </a:tr>
-              <a:tr h="566928">
-                <a:tc>
-                  <a:txBody>
-                    <a:bodyPr/>
-                    <a:lstStyle/>
-                    <a:p>
-                      <a:pPr indent="0" marL="0">
-                        <a:buNone/>
-                      </a:pPr>
-                      <a:r>
-                        <a:rPr lang="en-US" sz="1250" b="1" dirty="0">
-                          <a:solidFill>
-                            <a:srgbClr val="10394A"/>
-                          </a:solidFill>
-                          <a:latin typeface="Calibri" pitchFamily="34" charset="0"/>
-                          <a:ea typeface="Calibri" pitchFamily="34" charset="-122"/>
-                          <a:cs typeface="Calibri" pitchFamily="34" charset="-120"/>
-                        </a:rPr>
-                        <a:t>Features</a:t>
-                      </a:r>
-                      <a:endParaRPr lang="en-US" sz="1250" dirty="0">
-                        <a:latin typeface="Calibri" charset="0"/>
-                        <a:ea typeface="Calibri" charset="0"/>
-                        <a:cs typeface="Calibri" charset="0"/>
-                      </a:endParaRPr>
-                    </a:p>
-                  </a:txBody>
-                  <a:tcPr marL="91440" marR="91440" marT="91440" marB="91440" anchor="ctr">
-                    <a:lnL w="12700" cap="flat" cmpd="sng" algn="ctr">
-                      <a:solidFill>
-                        <a:srgbClr val="DDE3E6"/>
-                      </a:solidFill>
-                      <a:prstDash val="solid"/>
-                      <a:round/>
-                      <a:headEnd type="none" w="med" len="med"/>
-                      <a:tailEnd type="none" w="med" len="med"/>
-                    </a:lnL>
-                    <a:lnR w="12700" cap="flat" cmpd="sng" algn="ctr">
-                      <a:solidFill>
-                        <a:srgbClr val="DDE3E6"/>
-                      </a:solidFill>
-                      <a:prstDash val="solid"/>
-                      <a:round/>
-                      <a:headEnd type="none" w="med" len="med"/>
-                      <a:tailEnd type="none" w="med" len="med"/>
-                    </a:lnR>
-                    <a:lnT w="12700" cap="flat" cmpd="sng" algn="ctr">
-                      <a:solidFill>
-                        <a:srgbClr val="DDE3E6"/>
-                      </a:solidFill>
-                      <a:prstDash val="solid"/>
-                      <a:round/>
-                      <a:headEnd type="none" w="med" len="med"/>
-                      <a:tailEnd type="none" w="med" len="med"/>
-                    </a:lnT>
-                    <a:lnB w="12700" cap="flat" cmpd="sng" algn="ctr">
-                      <a:solidFill>
-                        <a:srgbClr val="DDE3E6"/>
-                      </a:solidFill>
-                      <a:prstDash val="solid"/>
-                      <a:round/>
-                      <a:headEnd type="none" w="med" len="med"/>
-                      <a:tailEnd type="none" w="med" len="med"/>
-                    </a:lnB>
-                    <a:solidFill>
-                      <a:srgbClr val="FFFFFF"/>
-                    </a:solidFill>
-                  </a:tcPr>
-                </a:tc>
-                <a:tc>
-                  <a:txBody>
-                    <a:bodyPr/>
-                    <a:lstStyle/>
-                    <a:p>
-                      <a:pPr indent="0" marL="0">
-                        <a:buNone/>
-                      </a:pPr>
-                      <a:r>
-                        <a:rPr lang="en-US" sz="1250" dirty="0">
-                          <a:solidFill>
-                            <a:srgbClr val="1C1C1C"/>
-                          </a:solidFill>
-                          <a:latin typeface="Calibri" pitchFamily="34" charset="0"/>
-                          <a:ea typeface="Calibri" pitchFamily="34" charset="-122"/>
-                          <a:cs typeface="Calibri" pitchFamily="34" charset="-120"/>
-                        </a:rPr>
-                        <a:t>8 — irradiancia, humedad, presión,</a:t>
-                      </a:r>
-                      <a:endParaRPr lang="en-US" sz="1250" dirty="0">
-                        <a:latin typeface="Calibri" charset="0"/>
-                        <a:ea typeface="Calibri" charset="0"/>
-                        <a:cs typeface="Calibri" charset="0"/>
-                      </a:endParaRPr>
-                    </a:p>
-                    <a:p>
-                      <a:pPr indent="0" marL="0">
-                        <a:buNone/>
-                      </a:pPr>
-                      <a:r>
-                        <a:rPr lang="en-US" sz="1250" dirty="0">
-                          <a:solidFill>
-                            <a:srgbClr val="1C1C1C"/>
-                          </a:solidFill>
-                          <a:latin typeface="Calibri" pitchFamily="34" charset="0"/>
-                          <a:ea typeface="Calibri" pitchFamily="34" charset="-122"/>
-                          <a:cs typeface="Calibri" pitchFamily="34" charset="-120"/>
-                        </a:rPr>
-                        <a:t>índice de nubosidad y codificación cíclica</a:t>
-                      </a:r>
-                      <a:endParaRPr lang="en-US" sz="1250" dirty="0">
-                        <a:latin typeface="Calibri" charset="0"/>
-                        <a:ea typeface="Calibri" charset="0"/>
-                        <a:cs typeface="Calibri" charset="0"/>
-                      </a:endParaRPr>
-                    </a:p>
-                  </a:txBody>
-                  <a:tcPr marL="91440" marR="91440" marT="91440" marB="91440" anchor="ctr">
-                    <a:lnL w="12700" cap="flat" cmpd="sng" algn="ctr">
-                      <a:solidFill>
-                        <a:srgbClr val="DDE3E6"/>
-                      </a:solidFill>
-                      <a:prstDash val="solid"/>
-                      <a:round/>
-                      <a:headEnd type="none" w="med" len="med"/>
-                      <a:tailEnd type="none" w="med" len="med"/>
-                    </a:lnL>
-                    <a:lnR w="12700" cap="flat" cmpd="sng" algn="ctr">
-                      <a:solidFill>
-                        <a:srgbClr val="DDE3E6"/>
-                      </a:solidFill>
-                      <a:prstDash val="solid"/>
-                      <a:round/>
-                      <a:headEnd type="none" w="med" len="med"/>
-                      <a:tailEnd type="none" w="med" len="med"/>
-                    </a:lnR>
-                    <a:lnT w="12700" cap="flat" cmpd="sng" algn="ctr">
-                      <a:solidFill>
-                        <a:srgbClr val="DDE3E6"/>
-                      </a:solidFill>
-                      <a:prstDash val="solid"/>
-                      <a:round/>
-                      <a:headEnd type="none" w="med" len="med"/>
-                      <a:tailEnd type="none" w="med" len="med"/>
-                    </a:lnT>
-                    <a:lnB w="12700" cap="flat" cmpd="sng" algn="ctr">
-                      <a:solidFill>
-                        <a:srgbClr val="DDE3E6"/>
-                      </a:solidFill>
-                      <a:prstDash val="solid"/>
-                      <a:round/>
-                      <a:headEnd type="none" w="med" len="med"/>
-                      <a:tailEnd type="none" w="med" len="med"/>
-                    </a:lnB>
-                    <a:solidFill>
-                      <a:srgbClr val="FFFFFF"/>
-                    </a:solidFill>
-                  </a:tcPr>
-                </a:tc>
-                <a:tc>
-                  <a:txBody>
-                    <a:bodyPr/>
-                    <a:lstStyle/>
-                    <a:p>
-                      <a:pPr indent="0" marL="0">
-                        <a:buNone/>
-                      </a:pPr>
-                      <a:r>
-                        <a:rPr lang="en-US" sz="1250" dirty="0">
-                          <a:solidFill>
-                            <a:srgbClr val="1C1C1C"/>
-                          </a:solidFill>
-                          <a:latin typeface="Calibri" pitchFamily="34" charset="0"/>
-                          <a:ea typeface="Calibri" pitchFamily="34" charset="-122"/>
-                          <a:cs typeface="Calibri" pitchFamily="34" charset="-120"/>
-                        </a:rPr>
-                        <a:t>14 — precio, meteo, lags 24 h y 168 h,</a:t>
-                      </a:r>
-                      <a:endParaRPr lang="en-US" sz="1250" dirty="0">
-                        <a:latin typeface="Calibri" charset="0"/>
-                        <a:ea typeface="Calibri" charset="0"/>
-                        <a:cs typeface="Calibri" charset="0"/>
-                      </a:endParaRPr>
-                    </a:p>
-                    <a:p>
-                      <a:pPr indent="0" marL="0">
-                        <a:buNone/>
-                      </a:pPr>
-                      <a:r>
-                        <a:rPr lang="en-US" sz="1250" dirty="0">
-                          <a:solidFill>
-                            <a:srgbClr val="1C1C1C"/>
-                          </a:solidFill>
-                          <a:latin typeface="Calibri" pitchFamily="34" charset="0"/>
-                          <a:ea typeface="Calibri" pitchFamily="34" charset="-122"/>
-                          <a:cs typeface="Calibri" pitchFamily="34" charset="-120"/>
-                        </a:rPr>
-                        <a:t>capacidad FV instalada y proxy de generación</a:t>
-                      </a:r>
-                      <a:endParaRPr lang="en-US" sz="1250" dirty="0">
-                        <a:latin typeface="Calibri" charset="0"/>
-                        <a:ea typeface="Calibri" charset="0"/>
-                        <a:cs typeface="Calibri" charset="0"/>
-                      </a:endParaRPr>
-                    </a:p>
-                  </a:txBody>
-                  <a:tcPr marL="91440" marR="91440" marT="91440" marB="91440" anchor="ctr">
-                    <a:lnL w="12700" cap="flat" cmpd="sng" algn="ctr">
-                      <a:solidFill>
-                        <a:srgbClr val="DDE3E6"/>
-                      </a:solidFill>
-                      <a:prstDash val="solid"/>
-                      <a:round/>
-                      <a:headEnd type="none" w="med" len="med"/>
-                      <a:tailEnd type="none" w="med" len="med"/>
-                    </a:lnL>
-                    <a:lnR w="12700" cap="flat" cmpd="sng" algn="ctr">
-                      <a:solidFill>
-                        <a:srgbClr val="DDE3E6"/>
-                      </a:solidFill>
-                      <a:prstDash val="solid"/>
-                      <a:round/>
-                      <a:headEnd type="none" w="med" len="med"/>
-                      <a:tailEnd type="none" w="med" len="med"/>
-                    </a:lnR>
-                    <a:lnT w="12700" cap="flat" cmpd="sng" algn="ctr">
-                      <a:solidFill>
-                        <a:srgbClr val="DDE3E6"/>
-                      </a:solidFill>
-                      <a:prstDash val="solid"/>
-                      <a:round/>
-                      <a:headEnd type="none" w="med" len="med"/>
-                      <a:tailEnd type="none" w="med" len="med"/>
-                    </a:lnT>
-                    <a:lnB w="12700" cap="flat" cmpd="sng" algn="ctr">
-                      <a:solidFill>
-                        <a:srgbClr val="DDE3E6"/>
-                      </a:solidFill>
-                      <a:prstDash val="solid"/>
-                      <a:round/>
-                      <a:headEnd type="none" w="med" len="med"/>
-                      <a:tailEnd type="none" w="med" len="med"/>
-                    </a:lnB>
-                    <a:solidFill>
-                      <a:srgbClr val="FFFFFF"/>
-                    </a:solidFill>
-                  </a:tcPr>
-                </a:tc>
-              </a:tr>
-              <a:tr h="566928">
-                <a:tc>
-                  <a:txBody>
-                    <a:bodyPr/>
-                    <a:lstStyle/>
-                    <a:p>
-                      <a:pPr indent="0" marL="0">
-                        <a:buNone/>
-                      </a:pPr>
-                      <a:r>
-                        <a:rPr lang="en-US" sz="1250" b="1" dirty="0">
-                          <a:solidFill>
-                            <a:srgbClr val="10394A"/>
-                          </a:solidFill>
-                          <a:latin typeface="Calibri" pitchFamily="34" charset="0"/>
-                          <a:ea typeface="Calibri" pitchFamily="34" charset="-122"/>
-                          <a:cs typeface="Calibri" pitchFamily="34" charset="-120"/>
-                        </a:rPr>
-                        <a:t>Split</a:t>
-                      </a:r>
-                      <a:endParaRPr lang="en-US" sz="1250" dirty="0">
-                        <a:latin typeface="Calibri" charset="0"/>
-                        <a:ea typeface="Calibri" charset="0"/>
-                        <a:cs typeface="Calibri" charset="0"/>
-                      </a:endParaRPr>
-                    </a:p>
-                  </a:txBody>
-                  <a:tcPr marL="91440" marR="91440" marT="91440" marB="91440" anchor="ctr">
-                    <a:lnL w="12700" cap="flat" cmpd="sng" algn="ctr">
-                      <a:solidFill>
-                        <a:srgbClr val="DDE3E6"/>
-                      </a:solidFill>
-                      <a:prstDash val="solid"/>
-                      <a:round/>
-                      <a:headEnd type="none" w="med" len="med"/>
-                      <a:tailEnd type="none" w="med" len="med"/>
-                    </a:lnL>
-                    <a:lnR w="12700" cap="flat" cmpd="sng" algn="ctr">
-                      <a:solidFill>
-                        <a:srgbClr val="DDE3E6"/>
-                      </a:solidFill>
-                      <a:prstDash val="solid"/>
-                      <a:round/>
-                      <a:headEnd type="none" w="med" len="med"/>
-                      <a:tailEnd type="none" w="med" len="med"/>
-                    </a:lnR>
-                    <a:lnT w="12700" cap="flat" cmpd="sng" algn="ctr">
-                      <a:solidFill>
-                        <a:srgbClr val="DDE3E6"/>
-                      </a:solidFill>
-                      <a:prstDash val="solid"/>
-                      <a:round/>
-                      <a:headEnd type="none" w="med" len="med"/>
-                      <a:tailEnd type="none" w="med" len="med"/>
-                    </a:lnT>
-                    <a:lnB w="12700" cap="flat" cmpd="sng" algn="ctr">
-                      <a:solidFill>
-                        <a:srgbClr val="DDE3E6"/>
-                      </a:solidFill>
-                      <a:prstDash val="solid"/>
-                      <a:round/>
-                      <a:headEnd type="none" w="med" len="med"/>
-                      <a:tailEnd type="none" w="med" len="med"/>
-                    </a:lnB>
-                    <a:solidFill>
-                      <a:srgbClr val="F1F5F7"/>
-                    </a:solidFill>
-                  </a:tcPr>
-                </a:tc>
-                <a:tc>
-                  <a:txBody>
-                    <a:bodyPr/>
-                    <a:lstStyle/>
-                    <a:p>
-                      <a:pPr indent="0" marL="0">
-                        <a:buNone/>
-                      </a:pPr>
-                      <a:r>
-                        <a:rPr lang="en-US" sz="1250" dirty="0">
-                          <a:solidFill>
-                            <a:srgbClr val="1C1C1C"/>
-                          </a:solidFill>
-                          <a:latin typeface="Calibri" pitchFamily="34" charset="0"/>
-                          <a:ea typeface="Calibri" pitchFamily="34" charset="-122"/>
-                          <a:cs typeface="Calibri" pitchFamily="34" charset="-120"/>
-                        </a:rPr>
-                        <a:t>80 / 10 / 10 cronológico</a:t>
-                      </a:r>
-                      <a:endParaRPr lang="en-US" sz="1250" dirty="0">
-                        <a:latin typeface="Calibri" charset="0"/>
-                        <a:ea typeface="Calibri" charset="0"/>
-                        <a:cs typeface="Calibri" charset="0"/>
-                      </a:endParaRPr>
-                    </a:p>
-                  </a:txBody>
-                  <a:tcPr marL="91440" marR="91440" marT="91440" marB="91440" anchor="ctr">
-                    <a:lnL w="12700" cap="flat" cmpd="sng" algn="ctr">
-                      <a:solidFill>
-                        <a:srgbClr val="DDE3E6"/>
-                      </a:solidFill>
-                      <a:prstDash val="solid"/>
-                      <a:round/>
-                      <a:headEnd type="none" w="med" len="med"/>
-                      <a:tailEnd type="none" w="med" len="med"/>
-                    </a:lnL>
-                    <a:lnR w="12700" cap="flat" cmpd="sng" algn="ctr">
-                      <a:solidFill>
-                        <a:srgbClr val="DDE3E6"/>
-                      </a:solidFill>
-                      <a:prstDash val="solid"/>
-                      <a:round/>
-                      <a:headEnd type="none" w="med" len="med"/>
-                      <a:tailEnd type="none" w="med" len="med"/>
-                    </a:lnR>
-                    <a:lnT w="12700" cap="flat" cmpd="sng" algn="ctr">
-                      <a:solidFill>
-                        <a:srgbClr val="DDE3E6"/>
-                      </a:solidFill>
-                      <a:prstDash val="solid"/>
-                      <a:round/>
-                      <a:headEnd type="none" w="med" len="med"/>
-                      <a:tailEnd type="none" w="med" len="med"/>
-                    </a:lnT>
-                    <a:lnB w="12700" cap="flat" cmpd="sng" algn="ctr">
-                      <a:solidFill>
-                        <a:srgbClr val="DDE3E6"/>
-                      </a:solidFill>
-                      <a:prstDash val="solid"/>
-                      <a:round/>
-                      <a:headEnd type="none" w="med" len="med"/>
-                      <a:tailEnd type="none" w="med" len="med"/>
-                    </a:lnB>
-                    <a:solidFill>
-                      <a:srgbClr val="F1F5F7"/>
-                    </a:solidFill>
-                  </a:tcPr>
-                </a:tc>
-                <a:tc>
-                  <a:txBody>
-                    <a:bodyPr/>
-                    <a:lstStyle/>
-                    <a:p>
-                      <a:pPr indent="0" marL="0">
-                        <a:buNone/>
-                      </a:pPr>
-                      <a:r>
-                        <a:rPr lang="en-US" sz="1250" dirty="0">
-                          <a:solidFill>
-                            <a:srgbClr val="1C1C1C"/>
-                          </a:solidFill>
-                          <a:latin typeface="Calibri" pitchFamily="34" charset="0"/>
-                          <a:ea typeface="Calibri" pitchFamily="34" charset="-122"/>
-                          <a:cs typeface="Calibri" pitchFamily="34" charset="-120"/>
-                        </a:rPr>
-                        <a:t>Por años: train 21-23, val 24, test 25</a:t>
-                      </a:r>
-                      <a:endParaRPr lang="en-US" sz="1250" dirty="0">
-                        <a:latin typeface="Calibri" charset="0"/>
-                        <a:ea typeface="Calibri" charset="0"/>
-                        <a:cs typeface="Calibri" charset="0"/>
-                      </a:endParaRPr>
-                    </a:p>
-                  </a:txBody>
-                  <a:tcPr marL="91440" marR="91440" marT="91440" marB="91440" anchor="ctr">
-                    <a:lnL w="12700" cap="flat" cmpd="sng" algn="ctr">
-                      <a:solidFill>
-                        <a:srgbClr val="DDE3E6"/>
-                      </a:solidFill>
-                      <a:prstDash val="solid"/>
-                      <a:round/>
-                      <a:headEnd type="none" w="med" len="med"/>
-                      <a:tailEnd type="none" w="med" len="med"/>
-                    </a:lnL>
-                    <a:lnR w="12700" cap="flat" cmpd="sng" algn="ctr">
-                      <a:solidFill>
-                        <a:srgbClr val="DDE3E6"/>
-                      </a:solidFill>
-                      <a:prstDash val="solid"/>
-                      <a:round/>
-                      <a:headEnd type="none" w="med" len="med"/>
-                      <a:tailEnd type="none" w="med" len="med"/>
-                    </a:lnR>
-                    <a:lnT w="12700" cap="flat" cmpd="sng" algn="ctr">
-                      <a:solidFill>
-                        <a:srgbClr val="DDE3E6"/>
-                      </a:solidFill>
-                      <a:prstDash val="solid"/>
-                      <a:round/>
-                      <a:headEnd type="none" w="med" len="med"/>
-                      <a:tailEnd type="none" w="med" len="med"/>
-                    </a:lnT>
-                    <a:lnB w="12700" cap="flat" cmpd="sng" algn="ctr">
-                      <a:solidFill>
-                        <a:srgbClr val="DDE3E6"/>
-                      </a:solidFill>
-                      <a:prstDash val="solid"/>
-                      <a:round/>
-                      <a:headEnd type="none" w="med" len="med"/>
-                      <a:tailEnd type="none" w="med" len="med"/>
-                    </a:lnB>
-                    <a:solidFill>
-                      <a:srgbClr val="F1F5F7"/>
-                    </a:solidFill>
-                  </a:tcPr>
-                </a:tc>
-              </a:tr>
-              <a:tr h="566928">
-                <a:tc>
-                  <a:txBody>
-                    <a:bodyPr/>
-                    <a:lstStyle/>
-                    <a:p>
-                      <a:pPr indent="0" marL="0">
-                        <a:buNone/>
-                      </a:pPr>
-                      <a:r>
-                        <a:rPr lang="en-US" sz="1250" b="1" dirty="0">
-                          <a:solidFill>
-                            <a:srgbClr val="10394A"/>
-                          </a:solidFill>
-                          <a:latin typeface="Calibri" pitchFamily="34" charset="0"/>
-                          <a:ea typeface="Calibri" pitchFamily="34" charset="-122"/>
-                          <a:cs typeface="Calibri" pitchFamily="34" charset="-120"/>
-                        </a:rPr>
-                        <a:t>Lookback</a:t>
-                      </a:r>
-                      <a:endParaRPr lang="en-US" sz="1250" dirty="0">
-                        <a:latin typeface="Calibri" charset="0"/>
-                        <a:ea typeface="Calibri" charset="0"/>
-                        <a:cs typeface="Calibri" charset="0"/>
-                      </a:endParaRPr>
-                    </a:p>
-                  </a:txBody>
-                  <a:tcPr marL="91440" marR="91440" marT="91440" marB="91440" anchor="ctr">
-                    <a:lnL w="12700" cap="flat" cmpd="sng" algn="ctr">
-                      <a:solidFill>
-                        <a:srgbClr val="DDE3E6"/>
-                      </a:solidFill>
-                      <a:prstDash val="solid"/>
-                      <a:round/>
-                      <a:headEnd type="none" w="med" len="med"/>
-                      <a:tailEnd type="none" w="med" len="med"/>
-                    </a:lnL>
-                    <a:lnR w="12700" cap="flat" cmpd="sng" algn="ctr">
-                      <a:solidFill>
-                        <a:srgbClr val="DDE3E6"/>
-                      </a:solidFill>
-                      <a:prstDash val="solid"/>
-                      <a:round/>
-                      <a:headEnd type="none" w="med" len="med"/>
-                      <a:tailEnd type="none" w="med" len="med"/>
-                    </a:lnR>
-                    <a:lnT w="12700" cap="flat" cmpd="sng" algn="ctr">
-                      <a:solidFill>
-                        <a:srgbClr val="DDE3E6"/>
-                      </a:solidFill>
-                      <a:prstDash val="solid"/>
-                      <a:round/>
-                      <a:headEnd type="none" w="med" len="med"/>
-                      <a:tailEnd type="none" w="med" len="med"/>
-                    </a:lnT>
-                    <a:lnB w="12700" cap="flat" cmpd="sng" algn="ctr">
-                      <a:solidFill>
-                        <a:srgbClr val="DDE3E6"/>
-                      </a:solidFill>
-                      <a:prstDash val="solid"/>
-                      <a:round/>
-                      <a:headEnd type="none" w="med" len="med"/>
-                      <a:tailEnd type="none" w="med" len="med"/>
-                    </a:lnB>
-                    <a:solidFill>
-                      <a:srgbClr val="FFFFFF"/>
-                    </a:solidFill>
-                  </a:tcPr>
-                </a:tc>
-                <a:tc>
-                  <a:txBody>
-                    <a:bodyPr/>
-                    <a:lstStyle/>
-                    <a:p>
-                      <a:pPr indent="0" marL="0">
-                        <a:buNone/>
-                      </a:pPr>
-                      <a:r>
-                        <a:rPr lang="en-US" sz="1250" dirty="0">
-                          <a:solidFill>
-                            <a:srgbClr val="1C1C1C"/>
-                          </a:solidFill>
-                          <a:latin typeface="Calibri" pitchFamily="34" charset="0"/>
-                          <a:ea typeface="Calibri" pitchFamily="34" charset="-122"/>
-                          <a:cs typeface="Calibri" pitchFamily="34" charset="-120"/>
-                        </a:rPr>
-                        <a:t>48 h</a:t>
-                      </a:r>
-                      <a:endParaRPr lang="en-US" sz="1250" dirty="0">
-                        <a:latin typeface="Calibri" charset="0"/>
-                        <a:ea typeface="Calibri" charset="0"/>
-                        <a:cs typeface="Calibri" charset="0"/>
-                      </a:endParaRPr>
-                    </a:p>
-                  </a:txBody>
-                  <a:tcPr marL="91440" marR="91440" marT="91440" marB="91440" anchor="ctr">
-                    <a:lnL w="12700" cap="flat" cmpd="sng" algn="ctr">
-                      <a:solidFill>
-                        <a:srgbClr val="DDE3E6"/>
-                      </a:solidFill>
-                      <a:prstDash val="solid"/>
-                      <a:round/>
-                      <a:headEnd type="none" w="med" len="med"/>
-                      <a:tailEnd type="none" w="med" len="med"/>
-                    </a:lnL>
-                    <a:lnR w="12700" cap="flat" cmpd="sng" algn="ctr">
-                      <a:solidFill>
-                        <a:srgbClr val="DDE3E6"/>
-                      </a:solidFill>
-                      <a:prstDash val="solid"/>
-                      <a:round/>
-                      <a:headEnd type="none" w="med" len="med"/>
-                      <a:tailEnd type="none" w="med" len="med"/>
-                    </a:lnR>
-                    <a:lnT w="12700" cap="flat" cmpd="sng" algn="ctr">
-                      <a:solidFill>
-                        <a:srgbClr val="DDE3E6"/>
-                      </a:solidFill>
-                      <a:prstDash val="solid"/>
-                      <a:round/>
-                      <a:headEnd type="none" w="med" len="med"/>
-                      <a:tailEnd type="none" w="med" len="med"/>
-                    </a:lnT>
-                    <a:lnB w="12700" cap="flat" cmpd="sng" algn="ctr">
-                      <a:solidFill>
-                        <a:srgbClr val="DDE3E6"/>
-                      </a:solidFill>
-                      <a:prstDash val="solid"/>
-                      <a:round/>
-                      <a:headEnd type="none" w="med" len="med"/>
-                      <a:tailEnd type="none" w="med" len="med"/>
-                    </a:lnB>
-                    <a:solidFill>
-                      <a:srgbClr val="FFFFFF"/>
-                    </a:solidFill>
-                  </a:tcPr>
-                </a:tc>
-                <a:tc>
-                  <a:txBody>
-                    <a:bodyPr/>
-                    <a:lstStyle/>
-                    <a:p>
-                      <a:pPr indent="0" marL="0">
-                        <a:buNone/>
-                      </a:pPr>
-                      <a:r>
-                        <a:rPr lang="en-US" sz="1250" dirty="0">
-                          <a:solidFill>
-                            <a:srgbClr val="1C1C1C"/>
-                          </a:solidFill>
-                          <a:latin typeface="Calibri" pitchFamily="34" charset="0"/>
-                          <a:ea typeface="Calibri" pitchFamily="34" charset="-122"/>
-                          <a:cs typeface="Calibri" pitchFamily="34" charset="-120"/>
-                        </a:rPr>
-                        <a:t>168 h  (ciclo semanal completo)</a:t>
-                      </a:r>
-                      <a:endParaRPr lang="en-US" sz="1250" dirty="0">
-                        <a:latin typeface="Calibri" charset="0"/>
-                        <a:ea typeface="Calibri" charset="0"/>
-                        <a:cs typeface="Calibri" charset="0"/>
-                      </a:endParaRPr>
-                    </a:p>
-                  </a:txBody>
-                  <a:tcPr marL="91440" marR="91440" marT="91440" marB="91440" anchor="ctr">
-                    <a:lnL w="12700" cap="flat" cmpd="sng" algn="ctr">
-                      <a:solidFill>
-                        <a:srgbClr val="DDE3E6"/>
-                      </a:solidFill>
-                      <a:prstDash val="solid"/>
-                      <a:round/>
-                      <a:headEnd type="none" w="med" len="med"/>
-                      <a:tailEnd type="none" w="med" len="med"/>
-                    </a:lnL>
-                    <a:lnR w="12700" cap="flat" cmpd="sng" algn="ctr">
-                      <a:solidFill>
-                        <a:srgbClr val="DDE3E6"/>
-                      </a:solidFill>
-                      <a:prstDash val="solid"/>
-                      <a:round/>
-                      <a:headEnd type="none" w="med" len="med"/>
-                      <a:tailEnd type="none" w="med" len="med"/>
-                    </a:lnR>
-                    <a:lnT w="12700" cap="flat" cmpd="sng" algn="ctr">
-                      <a:solidFill>
-                        <a:srgbClr val="DDE3E6"/>
-                      </a:solidFill>
-                      <a:prstDash val="solid"/>
-                      <a:round/>
-                      <a:headEnd type="none" w="med" len="med"/>
-                      <a:tailEnd type="none" w="med" len="med"/>
-                    </a:lnT>
-                    <a:lnB w="12700" cap="flat" cmpd="sng" algn="ctr">
-                      <a:solidFill>
-                        <a:srgbClr val="DDE3E6"/>
-                      </a:solidFill>
-                      <a:prstDash val="solid"/>
-                      <a:round/>
-                      <a:headEnd type="none" w="med" len="med"/>
-                      <a:tailEnd type="none" w="med" len="med"/>
-                    </a:lnB>
-                    <a:solidFill>
-                      <a:srgbClr val="FFFFFF"/>
-                    </a:solidFill>
-                  </a:tcPr>
-                </a:tc>
-              </a:tr>
-            </a:tbl>
-          </a:graphicData>
-        </a:graphic>
-      </p:graphicFrame>
-      <p:sp>
-        <p:nvSpPr>
-          <p:cNvPr id="5" name="Shape 2"/>
+      <p:sp>
+        <p:nvSpPr>
+          <p:cNvPr id="4" name="Shape 2"/>
+          <p:cNvSpPr/>
+          <p:nvPr/>
+        </p:nvSpPr>
+        <p:spPr>
+          <a:xfrm>
+            <a:off x="502920" y="1627632"/>
+            <a:ext cx="5341468" cy="3401568"/>
+          </a:xfrm>
+          <a:prstGeom prst="roundRect">
+            <a:avLst>
+              <a:gd name="adj" fmla="val 1344"/>
+            </a:avLst>
+          </a:prstGeom>
+          <a:solidFill>
+            <a:srgbClr val="FFFFFF"/>
+          </a:solidFill>
+          <a:ln w="12700">
+            <a:solidFill>
+              <a:srgbClr val="DDE3E6"/>
+            </a:solidFill>
+            <a:prstDash val="solid"/>
+          </a:ln>
+        </p:spPr>
+      </p:sp>
+      <p:sp>
+        <p:nvSpPr>
+          <p:cNvPr id="5" name="Text 3"/>
+          <p:cNvSpPr txBox="1"/>
+          <p:nvPr/>
+        </p:nvSpPr>
+        <p:spPr>
+          <a:xfrm>
+            <a:off x="813816" y="1828800"/>
+            <a:ext cx="4719676" cy="219456"/>
+          </a:xfrm>
+          <a:prstGeom prst="rect">
+            <a:avLst/>
+          </a:prstGeom>
+          <a:noFill/>
+          <a:ln/>
+        </p:spPr>
+        <p:txBody>
+          <a:bodyPr wrap="square" lIns="0" tIns="0" rIns="0" bIns="0" rtlCol="0" anchor="ctr"/>
+          <a:lstStyle/>
+          <a:p>
+            <a:pPr indent="0" marL="0">
+              <a:buNone/>
+            </a:pPr>
+            <a:r>
+              <a:rPr lang="en-US" sz="950" b="1" spc="120" kern="0" dirty="0">
+                <a:solidFill>
+                  <a:srgbClr val="C8861E"/>
+                </a:solidFill>
+                <a:latin typeface="Calibri" pitchFamily="34" charset="0"/>
+                <a:ea typeface="Calibri" pitchFamily="34" charset="-122"/>
+                <a:cs typeface="Calibri" pitchFamily="34" charset="-120"/>
+              </a:rPr>
+              <a:t>MODELO SOLAR</a:t>
+            </a:r>
+            <a:endParaRPr lang="en-US" sz="950" dirty="0"/>
+          </a:p>
+        </p:txBody>
+      </p:sp>
+      <p:sp>
+        <p:nvSpPr>
+          <p:cNvPr id="6" name="Text 4"/>
+          <p:cNvSpPr txBox="1"/>
+          <p:nvPr/>
+        </p:nvSpPr>
+        <p:spPr>
+          <a:xfrm>
+            <a:off x="813816" y="2084832"/>
+            <a:ext cx="4719676" cy="420624"/>
+          </a:xfrm>
+          <a:prstGeom prst="rect">
+            <a:avLst/>
+          </a:prstGeom>
+          <a:noFill/>
+          <a:ln/>
+        </p:spPr>
+        <p:txBody>
+          <a:bodyPr wrap="square" lIns="0" tIns="0" rIns="0" bIns="0" rtlCol="0" anchor="ctr"/>
+          <a:lstStyle/>
+          <a:p>
+            <a:pPr indent="0" marL="0">
+              <a:buNone/>
+            </a:pPr>
+            <a:r>
+              <a:rPr lang="en-US" sz="2400" b="1" dirty="0">
+                <a:solidFill>
+                  <a:srgbClr val="10394A"/>
+                </a:solidFill>
+                <a:latin typeface="Cambria" pitchFamily="34" charset="0"/>
+                <a:ea typeface="Cambria" pitchFamily="34" charset="-122"/>
+                <a:cs typeface="Cambria" pitchFamily="34" charset="-120"/>
+              </a:rPr>
+              <a:t>NASA POWER</a:t>
+            </a:r>
+            <a:endParaRPr lang="en-US" sz="2400" dirty="0"/>
+          </a:p>
+        </p:txBody>
+      </p:sp>
+      <p:sp>
+        <p:nvSpPr>
+          <p:cNvPr id="7" name="Text 5"/>
+          <p:cNvSpPr txBox="1"/>
+          <p:nvPr/>
+        </p:nvSpPr>
+        <p:spPr>
+          <a:xfrm>
+            <a:off x="813816" y="2542032"/>
+            <a:ext cx="4719676" cy="274320"/>
+          </a:xfrm>
+          <a:prstGeom prst="rect">
+            <a:avLst/>
+          </a:prstGeom>
+          <a:noFill/>
+          <a:ln/>
+        </p:spPr>
+        <p:txBody>
+          <a:bodyPr wrap="square" lIns="0" tIns="0" rIns="0" bIns="0" rtlCol="0" anchor="ctr"/>
+          <a:lstStyle/>
+          <a:p>
+            <a:pPr indent="0" marL="0">
+              <a:buNone/>
+            </a:pPr>
+            <a:r>
+              <a:rPr lang="en-US" sz="1150" i="1" dirty="0">
+                <a:solidFill>
+                  <a:srgbClr val="5F6B72"/>
+                </a:solidFill>
+                <a:latin typeface="Calibri" pitchFamily="34" charset="0"/>
+                <a:ea typeface="Calibri" pitchFamily="34" charset="-122"/>
+                <a:cs typeface="Calibri" pitchFamily="34" charset="-120"/>
+              </a:rPr>
+              <a:t>Reanálisis meteorológico horario en el punto de Sevilla</a:t>
+            </a:r>
+            <a:endParaRPr lang="en-US" sz="1150" dirty="0"/>
+          </a:p>
+        </p:txBody>
+      </p:sp>
+      <p:sp>
+        <p:nvSpPr>
+          <p:cNvPr id="8" name="Shape 6"/>
+          <p:cNvSpPr/>
+          <p:nvPr/>
+        </p:nvSpPr>
+        <p:spPr>
+          <a:xfrm>
+            <a:off x="813816" y="2926080"/>
+            <a:ext cx="4719676" cy="0"/>
+          </a:xfrm>
+          <a:prstGeom prst="line">
+            <a:avLst/>
+          </a:prstGeom>
+          <a:noFill/>
+          <a:ln w="9525">
+            <a:solidFill>
+              <a:srgbClr val="DDE3E6"/>
+            </a:solidFill>
+            <a:prstDash val="solid"/>
+          </a:ln>
+        </p:spPr>
+      </p:sp>
+      <p:sp>
+        <p:nvSpPr>
+          <p:cNvPr id="9" name="Text 7"/>
+          <p:cNvSpPr txBox="1"/>
+          <p:nvPr/>
+        </p:nvSpPr>
+        <p:spPr>
+          <a:xfrm>
+            <a:off x="813816" y="3072384"/>
+            <a:ext cx="1051560" cy="256032"/>
+          </a:xfrm>
+          <a:prstGeom prst="rect">
+            <a:avLst/>
+          </a:prstGeom>
+          <a:noFill/>
+          <a:ln/>
+        </p:spPr>
+        <p:txBody>
+          <a:bodyPr wrap="square" lIns="0" tIns="0" rIns="0" bIns="0" rtlCol="0" anchor="t"/>
+          <a:lstStyle/>
+          <a:p>
+            <a:pPr indent="0" marL="0">
+              <a:buNone/>
+            </a:pPr>
+            <a:r>
+              <a:rPr lang="en-US" sz="1100" b="1" dirty="0">
+                <a:solidFill>
+                  <a:srgbClr val="10394A"/>
+                </a:solidFill>
+                <a:latin typeface="Calibri" pitchFamily="34" charset="0"/>
+                <a:ea typeface="Calibri" pitchFamily="34" charset="-122"/>
+                <a:cs typeface="Calibri" pitchFamily="34" charset="-120"/>
+              </a:rPr>
+              <a:t>Para qué</a:t>
+            </a:r>
+            <a:endParaRPr lang="en-US" sz="1100" dirty="0"/>
+          </a:p>
+        </p:txBody>
+      </p:sp>
+      <p:sp>
+        <p:nvSpPr>
+          <p:cNvPr id="10" name="Text 8"/>
+          <p:cNvSpPr txBox="1"/>
+          <p:nvPr/>
+        </p:nvSpPr>
+        <p:spPr>
+          <a:xfrm>
+            <a:off x="1911096" y="3072384"/>
+            <a:ext cx="3622396" cy="603504"/>
+          </a:xfrm>
+          <a:prstGeom prst="rect">
+            <a:avLst/>
+          </a:prstGeom>
+          <a:noFill/>
+          <a:ln/>
+        </p:spPr>
+        <p:txBody>
+          <a:bodyPr wrap="square" lIns="0" tIns="0" rIns="0" bIns="0" rtlCol="0" anchor="t"/>
+          <a:lstStyle/>
+          <a:p>
+            <a:pPr indent="0" marL="0">
+              <a:lnSpc>
+                <a:spcPct val="112000"/>
+              </a:lnSpc>
+              <a:buNone/>
+            </a:pPr>
+            <a:r>
+              <a:rPr lang="en-US" sz="1200" dirty="0">
+                <a:solidFill>
+                  <a:srgbClr val="1C1C1C"/>
+                </a:solidFill>
+                <a:latin typeface="Calibri" pitchFamily="34" charset="0"/>
+                <a:ea typeface="Calibri" pitchFamily="34" charset="-122"/>
+                <a:cs typeface="Calibri" pitchFamily="34" charset="-120"/>
+              </a:rPr>
+              <a:t>Entrenar la red que predice la irradiancia de las próximas 24 h</a:t>
+            </a:r>
+            <a:endParaRPr lang="en-US" sz="1200" dirty="0"/>
+          </a:p>
+        </p:txBody>
+      </p:sp>
+      <p:sp>
+        <p:nvSpPr>
+          <p:cNvPr id="11" name="Text 9"/>
+          <p:cNvSpPr txBox="1"/>
+          <p:nvPr/>
+        </p:nvSpPr>
+        <p:spPr>
+          <a:xfrm>
+            <a:off x="813816" y="3749040"/>
+            <a:ext cx="1051560" cy="256032"/>
+          </a:xfrm>
+          <a:prstGeom prst="rect">
+            <a:avLst/>
+          </a:prstGeom>
+          <a:noFill/>
+          <a:ln/>
+        </p:spPr>
+        <p:txBody>
+          <a:bodyPr wrap="square" lIns="0" tIns="0" rIns="0" bIns="0" rtlCol="0" anchor="t"/>
+          <a:lstStyle/>
+          <a:p>
+            <a:pPr indent="0" marL="0">
+              <a:buNone/>
+            </a:pPr>
+            <a:r>
+              <a:rPr lang="en-US" sz="1100" b="1" dirty="0">
+                <a:solidFill>
+                  <a:srgbClr val="10394A"/>
+                </a:solidFill>
+                <a:latin typeface="Calibri" pitchFamily="34" charset="0"/>
+                <a:ea typeface="Calibri" pitchFamily="34" charset="-122"/>
+                <a:cs typeface="Calibri" pitchFamily="34" charset="-120"/>
+              </a:rPr>
+              <a:t>Qué aporta</a:t>
+            </a:r>
+            <a:endParaRPr lang="en-US" sz="1100" dirty="0"/>
+          </a:p>
+        </p:txBody>
+      </p:sp>
+      <p:sp>
+        <p:nvSpPr>
+          <p:cNvPr id="12" name="Text 10"/>
+          <p:cNvSpPr txBox="1"/>
+          <p:nvPr/>
+        </p:nvSpPr>
+        <p:spPr>
+          <a:xfrm>
+            <a:off x="1911096" y="3749040"/>
+            <a:ext cx="3622396" cy="603504"/>
+          </a:xfrm>
+          <a:prstGeom prst="rect">
+            <a:avLst/>
+          </a:prstGeom>
+          <a:noFill/>
+          <a:ln/>
+        </p:spPr>
+        <p:txBody>
+          <a:bodyPr wrap="square" lIns="0" tIns="0" rIns="0" bIns="0" rtlCol="0" anchor="t"/>
+          <a:lstStyle/>
+          <a:p>
+            <a:pPr indent="0" marL="0">
+              <a:lnSpc>
+                <a:spcPct val="112000"/>
+              </a:lnSpc>
+              <a:buNone/>
+            </a:pPr>
+            <a:r>
+              <a:rPr lang="en-US" sz="1200" dirty="0">
+                <a:solidFill>
+                  <a:srgbClr val="1C1C1C"/>
+                </a:solidFill>
+                <a:latin typeface="Calibri" pitchFamily="34" charset="0"/>
+                <a:ea typeface="Calibri" pitchFamily="34" charset="-122"/>
+                <a:cs typeface="Calibri" pitchFamily="34" charset="-120"/>
+              </a:rPr>
+              <a:t>Casi veinte años de registro horario y las variables que explican la nubosidad</a:t>
+            </a:r>
+            <a:endParaRPr lang="en-US" sz="1200" dirty="0"/>
+          </a:p>
+        </p:txBody>
+      </p:sp>
+      <p:sp>
+        <p:nvSpPr>
+          <p:cNvPr id="13" name="Text 11"/>
+          <p:cNvSpPr txBox="1"/>
+          <p:nvPr/>
+        </p:nvSpPr>
+        <p:spPr>
+          <a:xfrm>
+            <a:off x="813816" y="4425696"/>
+            <a:ext cx="1051560" cy="256032"/>
+          </a:xfrm>
+          <a:prstGeom prst="rect">
+            <a:avLst/>
+          </a:prstGeom>
+          <a:noFill/>
+          <a:ln/>
+        </p:spPr>
+        <p:txBody>
+          <a:bodyPr wrap="square" lIns="0" tIns="0" rIns="0" bIns="0" rtlCol="0" anchor="t"/>
+          <a:lstStyle/>
+          <a:p>
+            <a:pPr indent="0" marL="0">
+              <a:buNone/>
+            </a:pPr>
+            <a:r>
+              <a:rPr lang="en-US" sz="1100" b="1" dirty="0">
+                <a:solidFill>
+                  <a:srgbClr val="10394A"/>
+                </a:solidFill>
+                <a:latin typeface="Calibri" pitchFamily="34" charset="0"/>
+                <a:ea typeface="Calibri" pitchFamily="34" charset="-122"/>
+                <a:cs typeface="Calibri" pitchFamily="34" charset="-120"/>
+              </a:rPr>
+              <a:t>Un detalle</a:t>
+            </a:r>
+            <a:endParaRPr lang="en-US" sz="1100" dirty="0"/>
+          </a:p>
+        </p:txBody>
+      </p:sp>
+      <p:sp>
+        <p:nvSpPr>
+          <p:cNvPr id="14" name="Text 12"/>
+          <p:cNvSpPr txBox="1"/>
+          <p:nvPr/>
+        </p:nvSpPr>
+        <p:spPr>
+          <a:xfrm>
+            <a:off x="1911096" y="4425696"/>
+            <a:ext cx="3622396" cy="603504"/>
+          </a:xfrm>
+          <a:prstGeom prst="rect">
+            <a:avLst/>
+          </a:prstGeom>
+          <a:noFill/>
+          <a:ln/>
+        </p:spPr>
+        <p:txBody>
+          <a:bodyPr wrap="square" lIns="0" tIns="0" rIns="0" bIns="0" rtlCol="0" anchor="t"/>
+          <a:lstStyle/>
+          <a:p>
+            <a:pPr indent="0" marL="0">
+              <a:lnSpc>
+                <a:spcPct val="112000"/>
+              </a:lnSpc>
+              <a:buNone/>
+            </a:pPr>
+            <a:r>
+              <a:rPr lang="en-US" sz="1200" dirty="0">
+                <a:solidFill>
+                  <a:srgbClr val="1C1C1C"/>
+                </a:solidFill>
+                <a:latin typeface="Calibri" pitchFamily="34" charset="0"/>
+                <a:ea typeface="Calibri" pitchFamily="34" charset="-122"/>
+                <a:cs typeface="Calibri" pitchFamily="34" charset="-120"/>
+              </a:rPr>
+              <a:t>La hora y el día entran en seno y coseno, para que las 23 h y las 0 h sean contiguas y no los extremos de una escala</a:t>
+            </a:r>
+            <a:endParaRPr lang="en-US" sz="1200" dirty="0"/>
+          </a:p>
+        </p:txBody>
+      </p:sp>
+      <p:sp>
+        <p:nvSpPr>
+          <p:cNvPr id="15" name="Shape 13"/>
+          <p:cNvSpPr/>
+          <p:nvPr/>
+        </p:nvSpPr>
+        <p:spPr>
+          <a:xfrm>
+            <a:off x="6347308" y="1627632"/>
+            <a:ext cx="5341468" cy="3401568"/>
+          </a:xfrm>
+          <a:prstGeom prst="roundRect">
+            <a:avLst>
+              <a:gd name="adj" fmla="val 1344"/>
+            </a:avLst>
+          </a:prstGeom>
+          <a:solidFill>
+            <a:srgbClr val="FFFFFF"/>
+          </a:solidFill>
+          <a:ln w="12700">
+            <a:solidFill>
+              <a:srgbClr val="DDE3E6"/>
+            </a:solidFill>
+            <a:prstDash val="solid"/>
+          </a:ln>
+        </p:spPr>
+      </p:sp>
+      <p:sp>
+        <p:nvSpPr>
+          <p:cNvPr id="16" name="Text 14"/>
+          <p:cNvSpPr txBox="1"/>
+          <p:nvPr/>
+        </p:nvSpPr>
+        <p:spPr>
+          <a:xfrm>
+            <a:off x="6658204" y="1828800"/>
+            <a:ext cx="4719676" cy="219456"/>
+          </a:xfrm>
+          <a:prstGeom prst="rect">
+            <a:avLst/>
+          </a:prstGeom>
+          <a:noFill/>
+          <a:ln/>
+        </p:spPr>
+        <p:txBody>
+          <a:bodyPr wrap="square" lIns="0" tIns="0" rIns="0" bIns="0" rtlCol="0" anchor="ctr"/>
+          <a:lstStyle/>
+          <a:p>
+            <a:pPr indent="0" marL="0">
+              <a:buNone/>
+            </a:pPr>
+            <a:r>
+              <a:rPr lang="en-US" sz="950" b="1" spc="120" kern="0" dirty="0">
+                <a:solidFill>
+                  <a:srgbClr val="C8861E"/>
+                </a:solidFill>
+                <a:latin typeface="Calibri" pitchFamily="34" charset="0"/>
+                <a:ea typeface="Calibri" pitchFamily="34" charset="-122"/>
+                <a:cs typeface="Calibri" pitchFamily="34" charset="-120"/>
+              </a:rPr>
+              <a:t>MODELO DE PRECIO</a:t>
+            </a:r>
+            <a:endParaRPr lang="en-US" sz="950" dirty="0"/>
+          </a:p>
+        </p:txBody>
+      </p:sp>
+      <p:sp>
+        <p:nvSpPr>
+          <p:cNvPr id="17" name="Text 15"/>
+          <p:cNvSpPr txBox="1"/>
+          <p:nvPr/>
+        </p:nvSpPr>
+        <p:spPr>
+          <a:xfrm>
+            <a:off x="6658204" y="2084832"/>
+            <a:ext cx="4719676" cy="420624"/>
+          </a:xfrm>
+          <a:prstGeom prst="rect">
+            <a:avLst/>
+          </a:prstGeom>
+          <a:noFill/>
+          <a:ln/>
+        </p:spPr>
+        <p:txBody>
+          <a:bodyPr wrap="square" lIns="0" tIns="0" rIns="0" bIns="0" rtlCol="0" anchor="ctr"/>
+          <a:lstStyle/>
+          <a:p>
+            <a:pPr indent="0" marL="0">
+              <a:buNone/>
+            </a:pPr>
+            <a:r>
+              <a:rPr lang="en-US" sz="2400" b="1" dirty="0">
+                <a:solidFill>
+                  <a:srgbClr val="10394A"/>
+                </a:solidFill>
+                <a:latin typeface="Cambria" pitchFamily="34" charset="0"/>
+                <a:ea typeface="Cambria" pitchFamily="34" charset="-122"/>
+                <a:cs typeface="Cambria" pitchFamily="34" charset="-120"/>
+              </a:rPr>
+              <a:t>ENTSO-E</a:t>
+            </a:r>
+            <a:endParaRPr lang="en-US" sz="2400" dirty="0"/>
+          </a:p>
+        </p:txBody>
+      </p:sp>
+      <p:sp>
+        <p:nvSpPr>
+          <p:cNvPr id="18" name="Text 16"/>
+          <p:cNvSpPr txBox="1"/>
+          <p:nvPr/>
+        </p:nvSpPr>
+        <p:spPr>
+          <a:xfrm>
+            <a:off x="6658204" y="2542032"/>
+            <a:ext cx="4719676" cy="274320"/>
+          </a:xfrm>
+          <a:prstGeom prst="rect">
+            <a:avLst/>
+          </a:prstGeom>
+          <a:noFill/>
+          <a:ln/>
+        </p:spPr>
+        <p:txBody>
+          <a:bodyPr wrap="square" lIns="0" tIns="0" rIns="0" bIns="0" rtlCol="0" anchor="ctr"/>
+          <a:lstStyle/>
+          <a:p>
+            <a:pPr indent="0" marL="0">
+              <a:buNone/>
+            </a:pPr>
+            <a:r>
+              <a:rPr lang="en-US" sz="1150" i="1" dirty="0">
+                <a:solidFill>
+                  <a:srgbClr val="5F6B72"/>
+                </a:solidFill>
+                <a:latin typeface="Calibri" pitchFamily="34" charset="0"/>
+                <a:ea typeface="Calibri" pitchFamily="34" charset="-122"/>
+                <a:cs typeface="Calibri" pitchFamily="34" charset="-120"/>
+              </a:rPr>
+              <a:t>Casaciones del mercado diario español, hora a hora</a:t>
+            </a:r>
+            <a:endParaRPr lang="en-US" sz="1150" dirty="0"/>
+          </a:p>
+        </p:txBody>
+      </p:sp>
+      <p:sp>
+        <p:nvSpPr>
+          <p:cNvPr id="19" name="Shape 17"/>
+          <p:cNvSpPr/>
+          <p:nvPr/>
+        </p:nvSpPr>
+        <p:spPr>
+          <a:xfrm>
+            <a:off x="6658204" y="2926080"/>
+            <a:ext cx="4719676" cy="0"/>
+          </a:xfrm>
+          <a:prstGeom prst="line">
+            <a:avLst/>
+          </a:prstGeom>
+          <a:noFill/>
+          <a:ln w="9525">
+            <a:solidFill>
+              <a:srgbClr val="DDE3E6"/>
+            </a:solidFill>
+            <a:prstDash val="solid"/>
+          </a:ln>
+        </p:spPr>
+      </p:sp>
+      <p:sp>
+        <p:nvSpPr>
+          <p:cNvPr id="20" name="Text 18"/>
+          <p:cNvSpPr txBox="1"/>
+          <p:nvPr/>
+        </p:nvSpPr>
+        <p:spPr>
+          <a:xfrm>
+            <a:off x="6658204" y="3072384"/>
+            <a:ext cx="1051560" cy="256032"/>
+          </a:xfrm>
+          <a:prstGeom prst="rect">
+            <a:avLst/>
+          </a:prstGeom>
+          <a:noFill/>
+          <a:ln/>
+        </p:spPr>
+        <p:txBody>
+          <a:bodyPr wrap="square" lIns="0" tIns="0" rIns="0" bIns="0" rtlCol="0" anchor="t"/>
+          <a:lstStyle/>
+          <a:p>
+            <a:pPr indent="0" marL="0">
+              <a:buNone/>
+            </a:pPr>
+            <a:r>
+              <a:rPr lang="en-US" sz="1100" b="1" dirty="0">
+                <a:solidFill>
+                  <a:srgbClr val="10394A"/>
+                </a:solidFill>
+                <a:latin typeface="Calibri" pitchFamily="34" charset="0"/>
+                <a:ea typeface="Calibri" pitchFamily="34" charset="-122"/>
+                <a:cs typeface="Calibri" pitchFamily="34" charset="-120"/>
+              </a:rPr>
+              <a:t>Para qué</a:t>
+            </a:r>
+            <a:endParaRPr lang="en-US" sz="1100" dirty="0"/>
+          </a:p>
+        </p:txBody>
+      </p:sp>
+      <p:sp>
+        <p:nvSpPr>
+          <p:cNvPr id="21" name="Text 19"/>
+          <p:cNvSpPr txBox="1"/>
+          <p:nvPr/>
+        </p:nvSpPr>
+        <p:spPr>
+          <a:xfrm>
+            <a:off x="7755484" y="3072384"/>
+            <a:ext cx="3622396" cy="603504"/>
+          </a:xfrm>
+          <a:prstGeom prst="rect">
+            <a:avLst/>
+          </a:prstGeom>
+          <a:noFill/>
+          <a:ln/>
+        </p:spPr>
+        <p:txBody>
+          <a:bodyPr wrap="square" lIns="0" tIns="0" rIns="0" bIns="0" rtlCol="0" anchor="t"/>
+          <a:lstStyle/>
+          <a:p>
+            <a:pPr indent="0" marL="0">
+              <a:lnSpc>
+                <a:spcPct val="112000"/>
+              </a:lnSpc>
+              <a:buNone/>
+            </a:pPr>
+            <a:r>
+              <a:rPr lang="en-US" sz="1200" dirty="0">
+                <a:solidFill>
+                  <a:srgbClr val="1C1C1C"/>
+                </a:solidFill>
+                <a:latin typeface="Calibri" pitchFamily="34" charset="0"/>
+                <a:ea typeface="Calibri" pitchFamily="34" charset="-122"/>
+                <a:cs typeface="Calibri" pitchFamily="34" charset="-120"/>
+              </a:rPr>
+              <a:t>Entrenar la red que predice el precio de las próximas 24 h</a:t>
+            </a:r>
+            <a:endParaRPr lang="en-US" sz="1200" dirty="0"/>
+          </a:p>
+        </p:txBody>
+      </p:sp>
+      <p:sp>
+        <p:nvSpPr>
+          <p:cNvPr id="22" name="Text 20"/>
+          <p:cNvSpPr txBox="1"/>
+          <p:nvPr/>
+        </p:nvSpPr>
+        <p:spPr>
+          <a:xfrm>
+            <a:off x="6658204" y="3749040"/>
+            <a:ext cx="1051560" cy="256032"/>
+          </a:xfrm>
+          <a:prstGeom prst="rect">
+            <a:avLst/>
+          </a:prstGeom>
+          <a:noFill/>
+          <a:ln/>
+        </p:spPr>
+        <p:txBody>
+          <a:bodyPr wrap="square" lIns="0" tIns="0" rIns="0" bIns="0" rtlCol="0" anchor="t"/>
+          <a:lstStyle/>
+          <a:p>
+            <a:pPr indent="0" marL="0">
+              <a:buNone/>
+            </a:pPr>
+            <a:r>
+              <a:rPr lang="en-US" sz="1100" b="1" dirty="0">
+                <a:solidFill>
+                  <a:srgbClr val="10394A"/>
+                </a:solidFill>
+                <a:latin typeface="Calibri" pitchFamily="34" charset="0"/>
+                <a:ea typeface="Calibri" pitchFamily="34" charset="-122"/>
+                <a:cs typeface="Calibri" pitchFamily="34" charset="-120"/>
+              </a:rPr>
+              <a:t>Qué aporta</a:t>
+            </a:r>
+            <a:endParaRPr lang="en-US" sz="1100" dirty="0"/>
+          </a:p>
+        </p:txBody>
+      </p:sp>
+      <p:sp>
+        <p:nvSpPr>
+          <p:cNvPr id="23" name="Text 21"/>
+          <p:cNvSpPr txBox="1"/>
+          <p:nvPr/>
+        </p:nvSpPr>
+        <p:spPr>
+          <a:xfrm>
+            <a:off x="7755484" y="3749040"/>
+            <a:ext cx="3622396" cy="603504"/>
+          </a:xfrm>
+          <a:prstGeom prst="rect">
+            <a:avLst/>
+          </a:prstGeom>
+          <a:noFill/>
+          <a:ln/>
+        </p:spPr>
+        <p:txBody>
+          <a:bodyPr wrap="square" lIns="0" tIns="0" rIns="0" bIns="0" rtlCol="0" anchor="t"/>
+          <a:lstStyle/>
+          <a:p>
+            <a:pPr indent="0" marL="0">
+              <a:lnSpc>
+                <a:spcPct val="112000"/>
+              </a:lnSpc>
+              <a:buNone/>
+            </a:pPr>
+            <a:r>
+              <a:rPr lang="en-US" sz="1200" dirty="0">
+                <a:solidFill>
+                  <a:srgbClr val="1C1C1C"/>
+                </a:solidFill>
+                <a:latin typeface="Calibri" pitchFamily="34" charset="0"/>
+                <a:ea typeface="Calibri" pitchFamily="34" charset="-122"/>
+                <a:cs typeface="Calibri" pitchFamily="34" charset="-120"/>
+              </a:rPr>
+              <a:t>El histórico y el contexto que explica su deriva, como la capacidad fotovoltaica instalada en España</a:t>
+            </a:r>
+            <a:endParaRPr lang="en-US" sz="1200" dirty="0"/>
+          </a:p>
+        </p:txBody>
+      </p:sp>
+      <p:sp>
+        <p:nvSpPr>
+          <p:cNvPr id="24" name="Text 22"/>
+          <p:cNvSpPr txBox="1"/>
+          <p:nvPr/>
+        </p:nvSpPr>
+        <p:spPr>
+          <a:xfrm>
+            <a:off x="6658204" y="4425696"/>
+            <a:ext cx="1051560" cy="256032"/>
+          </a:xfrm>
+          <a:prstGeom prst="rect">
+            <a:avLst/>
+          </a:prstGeom>
+          <a:noFill/>
+          <a:ln/>
+        </p:spPr>
+        <p:txBody>
+          <a:bodyPr wrap="square" lIns="0" tIns="0" rIns="0" bIns="0" rtlCol="0" anchor="t"/>
+          <a:lstStyle/>
+          <a:p>
+            <a:pPr indent="0" marL="0">
+              <a:buNone/>
+            </a:pPr>
+            <a:r>
+              <a:rPr lang="en-US" sz="1100" b="1" dirty="0">
+                <a:solidFill>
+                  <a:srgbClr val="10394A"/>
+                </a:solidFill>
+                <a:latin typeface="Calibri" pitchFamily="34" charset="0"/>
+                <a:ea typeface="Calibri" pitchFamily="34" charset="-122"/>
+                <a:cs typeface="Calibri" pitchFamily="34" charset="-120"/>
+              </a:rPr>
+              <a:t>Un detalle</a:t>
+            </a:r>
+            <a:endParaRPr lang="en-US" sz="1100" dirty="0"/>
+          </a:p>
+        </p:txBody>
+      </p:sp>
+      <p:sp>
+        <p:nvSpPr>
+          <p:cNvPr id="25" name="Text 23"/>
+          <p:cNvSpPr txBox="1"/>
+          <p:nvPr/>
+        </p:nvSpPr>
+        <p:spPr>
+          <a:xfrm>
+            <a:off x="7755484" y="4425696"/>
+            <a:ext cx="3622396" cy="603504"/>
+          </a:xfrm>
+          <a:prstGeom prst="rect">
+            <a:avLst/>
+          </a:prstGeom>
+          <a:noFill/>
+          <a:ln/>
+        </p:spPr>
+        <p:txBody>
+          <a:bodyPr wrap="square" lIns="0" tIns="0" rIns="0" bIns="0" rtlCol="0" anchor="t"/>
+          <a:lstStyle/>
+          <a:p>
+            <a:pPr indent="0" marL="0">
+              <a:lnSpc>
+                <a:spcPct val="112000"/>
+              </a:lnSpc>
+              <a:buNone/>
+            </a:pPr>
+            <a:r>
+              <a:rPr lang="en-US" sz="1200" dirty="0">
+                <a:solidFill>
+                  <a:srgbClr val="1C1C1C"/>
+                </a:solidFill>
+                <a:latin typeface="Calibri" pitchFamily="34" charset="0"/>
+                <a:ea typeface="Calibri" pitchFamily="34" charset="-122"/>
+                <a:cs typeface="Calibri" pitchFamily="34" charset="-120"/>
+              </a:rPr>
+              <a:t>Entran el precio de hace 24 h y el de hace una semana: los dos ciclos del mercado</a:t>
+            </a:r>
+            <a:endParaRPr lang="en-US" sz="1200" dirty="0"/>
+          </a:p>
+        </p:txBody>
+      </p:sp>
+      <p:sp>
+        <p:nvSpPr>
+          <p:cNvPr id="26" name="Shape 24"/>
           <p:cNvSpPr/>
           <p:nvPr/>
         </p:nvSpPr>
@@ -15566,7 +15686,7 @@
       </p:sp>
       <p:sp>
         <p:nvSpPr>
-          <p:cNvPr id="6" name="Text 3"/>
+          <p:cNvPr id="27" name="Text 25"/>
           <p:cNvSpPr txBox="1"/>
           <p:nvPr/>
         </p:nvSpPr>
@@ -15600,7 +15720,7 @@
                 <a:ea typeface="Calibri" pitchFamily="34" charset="-122"/>
                 <a:cs typeface="Calibri" pitchFamily="34" charset="-120"/>
               </a:rPr>
-              <a:t>El split es temporal, nunca aleatorio: mezclar horas entre train y test regalaría información del futuro.</a:t>
+              <a:t>El reparto entre entrenamiento y prueba es temporal, nunca aleatorio: mezclar horas le regalaría al modelo información del futuro.</a:t>
             </a:r>
             <a:endParaRPr lang="en-US" sz="1350" dirty="0"/>
           </a:p>
@@ -15608,7 +15728,7 @@
       </p:sp>
       <p:sp>
         <p:nvSpPr>
-          <p:cNvPr id="7" name="Text 4"/>
+          <p:cNvPr id="28" name="Text 26"/>
           <p:cNvSpPr txBox="1"/>
           <p:nvPr/>
         </p:nvSpPr>

--- a/defensa/OASIS_defensa_TFG.pptx
+++ b/defensa/OASIS_defensa_TFG.pptx
@@ -710,12 +710,12 @@
             <a:r>
               <a:rPr lang="en-US" dirty="0"/>
               <a:t>Antes de las cifras, las cuatro piezas que las sostienen.
-La primera es la comparación pareada, que es lo que ven en el esquema: la semilla ene genera el mismo perfil de demanda en todas las versiones, así que la diferencia se calcula par a par. El ruido de la demanda se cancela en la resta y el contraste gana potencia. Veinte pares: cuatro escenarios por cinco semillas.
-La segunda es el test de Wilcoxon, de rangos con signo. Empecé con un t-test y lo abandoné: tres semillas del escenario nublado dominaban la media, con medias hasta veinte veces la mediana. El contraste describía esas tres tiradas, no a la población.
-La tercera es un umbral de relevancia económica. Medí la dispersión del coste de la propia referencia entre grupos de semillas: nueve euros con treinta y tres por semana. Una diferencia significativa por debajo de eso la declaro operativamente nula, y lo fijé antes de simular.
-Y la cuarta es el oráculo: repetir una tanda con la previsión perfecta. No es desplegable, es una cota superior. Si con error cero una estrategia no gana, ninguna mejora de la previsión va a hacer que gane.
+La primera es comparar en pareja, que es el esquema: la misma semilla genera el mismo perfil de demanda para todas las versiones, así que comparo dos versiones sobre la misma semana y no dos promedios. El azar de la demanda se va en la resta. Veinte pares: cuatro escenarios por cinco semillas.
+La segunda es el test de Wilcoxon: en vez de mirar si la media mejora, mira si las diferencias caen siempre del mismo lado. Lo elegí porque unas pocas semanas nubladas muy caras bastaban para arrastrar la media.
+La tercera es un umbral de relevancia, y es el que me pongo en contra: por debajo de nueve euros a la semana, que es lo que varía la propia referencia solo por cambiar de semillas, lo doy por empate. Fijado antes de simular.
+Y la cuarta es el oráculo: repetir la tanda con la previsión perfecta. Es un techo. Si con previsión perfecta una idea no gana, mejorar la predicción no la va a salvar.
 — — — — —
-NO SE DICE · objetivo 1:27 · Ritmo pausado, una pieza cada vez. Es la diapositiva que te compra credibilidad para todo el bloque siguiente.</a:t>
+NO SE DICE · objetivo 1:19 · Ritmo pausado, una pieza cada vez. Es la diapositiva que te compra credibilidad para todo el bloque siguiente.</a:t>
             </a:r>
             <a:endParaRPr lang="en-US" dirty="0"/>
           </a:p>
@@ -895,12 +895,12 @@
           <a:p>
             <a:r>
               <a:rPr lang="en-US" dirty="0"/>
-              <a:t>La Versión B añade las dos previsiones donde la heurística ya decidía: la solar desplaza el reparto cuando anticipa que va a caer el excedente, y la de precio gobierna un arbitraje de batería.
-Y tiene una victoria clara: el servicio de hidrógeno. Mantiene el tanque de alta más lleno y pasa menos tiempo en nivel crítico, en treinta y nueve de cuarenta pares. Y escala con la calidad de la previsión: con oráculo se multiplica por diez. El mecanismo funciona; lo que limita es la previsión, no el diseño.
-En coste empata: trece céntimos sobre un recibo diario de unos cuarenta y cinco euros, y tampoco gana con previsión perfecta.
-De ahí sale la regla de diseño que aplico después: una primera implementación que traducía «el precio va a subir» en una acción de magnitud fija empeoraba el coste, y más cuanto mejor era la previsión. La acción tiene que estar condicionada y su magnitud salir del margen económico.
+              <a:t>La Versión B es la misma heurística con las dos previsiones metidas dentro. No cambia la arquitectura: cambia lo que mira la regla en el momento de decidir.
+La previsión solar entra en el reparto del excedente: antes dependía solo del estado de carga de ese instante; ahora, si la previsión anticipa que el excedente va a caer, el reparto se desplaza hacia la batería antes de que caiga. Y la de precio gobierna un arbitraje de batería.
+B tiene una victoria y un empate. La victoria es el servicio de hidrógeno, en treinta y nueve de cuarenta pares, y lo importante no es el tamaño sino que escala con la calidad de la previsión: con el oráculo se multiplica por diez. El mecanismo está bien planteado; lo que limita es la predicción.
+El empate es el coste, y de ahí sale la regla de diseño que aplico después: la primera versión del arbitraje traducía «el precio va a subir» en una acción de tamaño fijo, y empeoraba el coste, más cuanto mejor era la previsión. Una acción disparada por una previsión tiene que estar condicionada, y su tamaño salir del margen económico disponible.
 — — — — —
-NO SE DICE · objetivo 1:11 · Tono de quien informa. B tiene su victoria y la cuentas primero; el empate en coste viene después y sin disculpas.</a:t>
+NO SE DICE · objetivo 1:26 · Tono de quien informa. B tiene su victoria y la cuentas primero; el empate en coste viene después y sin disculpas.</a:t>
             </a:r>
             <a:endParaRPr lang="en-US" dirty="0"/>
           </a:p>
@@ -988,12 +988,12 @@
           <a:p>
             <a:r>
               <a:rPr lang="en-US" dirty="0"/>
-              <a:t>Al descomponer la importación de la Versión A por destinos aparece esto, y es lo que motiva el tercer gestor. Fíjense solo en la primera barra: las otras dos son la Versión C, que veremos enseguida.
-De los mil trescientos veintiún kilovatios-hora que la referencia compra a la red en una semana, mil seis —el setenta y seis por ciento— van al electrolizador, a ciento veintiuno con cinco euros el megavatio-hora. Los vehículos son el veintiuno por ciento.
-Y en los instantes exactos en que compra esa energía, la batería está al ochenta y cinco por ciento de carga de media, y nunca baja del sesenta y nueve.
-El motivo está en el orden del código: en la rama de déficit la batería cubre los vehículos y, en un paso posterior, la decisión económica enciende el electrolizador; esa carga nueva no se le vuelve a ofrecer a la batería, así que la absorbe la red. Toda la información necesaria ya estaba en las entradas.
+              <a:t>Al descomponer la importación de la Versión A por destinos aparece esto, y es lo que motiva el tercer gestor.
+De los mil trescientos veintiún kilovatios-hora que compra a la red en una semana, el setenta y seis por ciento van al electrolizador, a ciento veintiuno con cinco euros el megavatio-hora. Y en los instantes exactos en que los compra, la batería está al ochenta y cinco por ciento de media.
+Pongan eso junto al otro lado del balance: en esa misma semana la estación exporta catorce mil kilovatios-hora a treinta y nueve euros. Vende diez veces más energía de la que compra, y la compra tres veces más cara de lo que la vende. Está pasando la misma energía dos veces por el contador, y perdiendo en los dos sentidos.
+El motivo está en el orden del código: la batería cubre primero los vehículos y, en un paso posterior, la decisión económica enciende el electrolizador; esa carga nueva no se le vuelve a ofrecer, así que la absorbe la red.
 — — — — —
-NO SE DICE · objetivo 1:14 · Sobrio. Es un diagnóstico de ingeniería, no una revelación. Deja aire entre las tres cifras y sigue.</a:t>
+NO SE DICE · objetivo 1:17 · Sobrio. Es un diagnóstico de ingeniería, no una revelación. Deja aire entre las tres cifras y sigue.</a:t>
             </a:r>
             <a:endParaRPr lang="en-US" dirty="0"/>
           </a:p>
@@ -1081,12 +1081,13 @@
           <a:p>
             <a:r>
               <a:rPr lang="en-US" dirty="0"/>
-              <a:t>La Versión C separa dos decisiones que la heurística tomaba juntas: de dónde sale la energía del electrolizador y cuándo conviene producir. Cada cambio tiene su interruptor.
-El primero son diez líneas. En la rama de déficit, la carga que crea la decisión de producir hidrógeno se ofrece a la batería antes que a la red, mientras el estado de carga esté por encima de una reserva del sesenta por ciento. Ese sesenta sale del contrafactual: con ese piso, el setenta y nueve por ciento de esa importación podía haber salido de la batería. Y no consume ninguna previsión.
-El segundo es un planificador: se estima cuánto hidrógeno falta y cuánto excedente gratis va a haber, y se produce si la hora actual está entre las ene más baratas del horizonte.
-Lo que hace defendible esta regla es que solo usa el orden de los precios: contar cuántas horas futuras son más baratas es invariante a cualquier transformación monótona de la previsión.
+              <a:t>La Versión C separa dos decisiones que la heurística tomaba juntas: de dónde sale la energía del electrolizador y cuándo conviene producir. En pantalla, los cuatro pasos de la lógica común, con los dos que sustituyo en ámbar. Cada uno tiene su interruptor.
+El primero son diez líneas: la carga que crea la decisión de producir hidrógeno se le ofrece a la batería antes que a la red, mientras el estado de carga esté por encima del sesenta por ciento. Ese sesenta no es arbitrario, sale del contrafactual del diagnóstico anterior.
+El segundo es un planificador: estima cuánto hidrógeno falta y cuánto excedente gratis viene, y de ahí salen las horas de electrolizador que hay que comprar a la red, que se colocan en las más baratas del horizonte.
+Conviene precisar de dónde sale ese precio. El mercado diario publica sobre la una de la tarde las veinticuatro horas del día siguiente: la parte del horizonte que ya está publicada se usa tal cual, y solo se predice el tramo que aún no ha salido a mercado.
+Y lo que hace defendible la regla es que solo usa el orden: la decisión es «estoy entre las ene más baratas, sí o no». Eso no cambia si la previsión falla en el nivel mientras acierte en el orden. Sumarle diez euros a todas las horas da el mismo plan.
 — — — — —
-NO SE DICE · objetivo 1:12 · La invariancia monótona es el argumento más elegante del trabajo. Dilo despacio.</a:t>
+NO SE DICE · objetivo 1:42 · La invariancia monótona es el argumento más elegante del trabajo. Dilo despacio.</a:t>
             </a:r>
             <a:endParaRPr lang="en-US" dirty="0"/>
           </a:p>
@@ -1547,13 +1548,13 @@
           <a:p>
             <a:r>
               <a:rPr lang="en-US" dirty="0"/>
-              <a:t>El transporte es una cuarta parte de las emisiones de gases de efecto invernadero de la Unión, y casi tres cuartas partes de esa fracción son transporte por carretera. Es uno de los focos que el Pacto Verde Europeo tiene que cerrar para dos mil cincuenta.
-El marco regulatorio ya pone fechas. La Hoja de Ruta del Hidrógeno española fija entre cien y ciento cincuenta hidrogeneras públicas para dos mil treinta, y sitúa los corredores de repostaje verde como línea prioritaria. El PNIEC fija cinco millones y medio de vehículos eléctricos para esa misma fecha, y el reglamento europeo AFIR convierte el despliegue de recarga en objetivos vinculantes.
+              <a:t>El transporte es una cuarta parte de las emisiones de la Unión, y casi tres cuartas partes de esa fracción son carretera. Es uno de los focos que el Pacto Verde Europeo tiene que cerrar.
+El marco ya pone fechas. La Hoja de Ruta del Hidrógeno española fija entre cien y ciento cincuenta hidrogeneras públicas para dos mil treinta y sitúa los corredores de repostaje verde como prioridad; el PNIEC fija cinco millones y medio de vehículos eléctricos para esa fecha; y el reglamento europeo AFIR convierte el despliegue de recarga en objetivos vinculantes.
 El problema es esa fragmentación: cada vector arrastra hoy su propia infraestructura y su propia inversión.
-Y ya hay precedentes de integrarlas. Repsol inauguró en enero de dos mil veinticinco la estación de Morro Jable, en Fuerteventura: fotovoltaica, baterías, pila de hidrógeno y recarga eléctrica. Es prácticamente la combinación de componentes de OASIS, a menor escala y sin electrolizador propio.
+Y ya hay precedentes de integrarlas. Repsol inauguró en dos mil veinticinco la estación de Morro Jable, en Fuerteventura: fotovoltaica, baterías, pila de hidrógeno y recarga eléctrica. Es casi la combinación de OASIS, a menor escala y sin electrolizador propio.
 Con esa integración el reto deja de ser de dimensionamiento y pasa a ser de operación: decidir, en cada instante, de dónde sale cada kilovatio.
 — — — — —
-NO SE DICE · objetivo 1:26 · Las dos referencias que demuestran que has investigado —H2ME y Morro Jable— van habladas, no en pantalla. Morro Jable es tu mejor baza: casi los mismos componentes que OASIS.</a:t>
+NO SE DICE · objetivo 1:18 · Las dos referencias que demuestran que has investigado —H2ME y Morro Jable— van habladas, no en pantalla. Morro Jable es tu mejor baza: casi los mismos componentes que OASIS.</a:t>
             </a:r>
             <a:endParaRPr lang="en-US" dirty="0"/>
           </a:p>
@@ -2267,12 +2268,12 @@
             <a:r>
               <a:rPr lang="en-US" dirty="0"/>
               <a:t>El primer bloque de datos sirve para dimensionar, y fija dos parámetros de la instalación.
-La fuente es DESL-EPFL, sesiones reales de carga rápida: casi mil novecientas válidas, con una energía media de treinta y dos kilovatios-hora. La contrasto con Caltech, que es carga lenta, para comprobar que son familias distintas.
+La fuente es DESL-EPFL, casi mil novecientas sesiones reales de carga rápida, con una energía media de treinta y dos kilovatios-hora. La contrasto con Caltech, que es carga lenta, para comprobar que son familias distintas.
 De ahí salen las dos decisiones. Los cincuenta kilovatios del cargador, que es el estándar europeo de carga rápida en continua y que con la energía media cubren una sesión en unos cuarenta minutos, sin exigir transformador de media tensión. Y que los cargadores sean dos, por teoría de colas sobre la hora punta: con dos, la espera se mantiene acotada.
 Dimensiono sobre el panorama actual a propósito: es el escenario del que hay datos reales, y escalar hacia arriba siempre es más fácil que hacia abajo, más aún con una arquitectura modular como esta.
-Con esas mismas distribuciones se genera el perfil de demanda de cada simulación. Es estocástico, y eso importará en la comparación.
+Con esas distribuciones se genera el perfil de demanda de cada simulación. Es estocástico, y eso importará en la comparación.
 — — — — —
-NO SE DICE · objetivo 1:15 · Este bloque es trabajo tuyo de principio a fin. Cuéntalo con calma: es lo que justifica que la instalación sea creíble.</a:t>
+NO SE DICE · objetivo 1:14 · Este bloque es trabajo tuyo de principio a fin. Cuéntalo con calma: es lo que justifica que la instalación sea creíble.</a:t>
             </a:r>
             <a:endParaRPr lang="en-US" dirty="0"/>
           </a:p>
@@ -2453,11 +2454,11 @@
           <a:p>
             <a:r>
               <a:rPr lang="en-US" dirty="0"/>
-              <a:t>Las dos redes comparten arquitectura: dos capas LSTM apiladas, de ciento veintiocho y sesenta y cuatro unidades, con dropout, capa densa y salida de veinticuatro valores, que es el horizonte de un día.
-Las dos se entrenan con Adam y paran por criterio de validación: la solar en la época veintiuno de trescientas, la de precio en la veintinueve de doscientas. En pantalla, la curva de RMSE: azul entrenamiento, negro validación. No se separan: no hay sobreajuste.
-Una diferencia que sí importa: el modelo solar puede imponer que la irradiancia predicha no sea negativa. El de precio no, porque el precio spot admite negativos, y eso obliga después a un tratamiento distinto.
+              <a:t>Las dos redes comparten arquitectura: dos capas LSTM apiladas, de ciento veintiocho y sesenta y cuatro unidades, con dropout, capa densa y salida de veinticuatro valores, el horizonte de un día. Se entrenan con Adam y paran por criterio de validación. En pantalla, la curva de RMSE: azul entrenamiento, negro validación. No se separan: no hay sobreajuste.
+Entreno con RMSE, el error cuadrático medio, porque al elevar al cuadrado penaliza mucho más un fallo grande que varios pequeños, y aquí lo que rompe una decisión es el fallo grande: no ver una punta de precio o una caída de sol. Para comparar modelos uso después el error absoluto medio, que está en las unidades de la variable y no lo dominan cuatro horas atípicas.
+Una diferencia que importa: el modelo solar puede imponer que la irradiancia predicha no sea negativa. El de precio no, porque el precio admite negativos.
 — — — — —
-NO SE DICE · objetivo 0:50 · Rápida. Es la diapositiva de «así están hechas», no de resultados.</a:t>
+NO SE DICE · objetivo 1:06 · Rápida. Es la diapositiva de «así están hechas», no de resultados.</a:t>
             </a:r>
             <a:endParaRPr lang="en-US" dirty="0"/>
           </a:p>
@@ -2545,12 +2546,12 @@
           <a:p>
             <a:r>
               <a:rPr lang="en-US" dirty="0"/>
-              <a:t>Y aquí está el resultado que determina lo que finalmente se despliega.
-Las dos redes se evalúan contra líneas base no triviales: la solar contra la persistencia de cielo claro, la de precio contra la persistencia de veinticuatro horas, que es la referencia mínima que exigen las guías del campo. Ninguna la bate en el agregado de veinticuatro horas: la solar queda un ocho coma ocho por ciento por detrás, la de precio un siete coma uno.
-El diagnóstico es distinto en cada una. La solar predice irradiancia en bruto y tiene que reconstruir la geometría solar que la línea base recibe gratis: aporta hasta la cuarta hora y pierde después. La de precio ha aprendido el perfil calendario-solar, que es justo lo que la persistencia reproduce sin coste.
-Y detecté y corregí una realimentación del buffer de precio que degradaba el error un veintisiete coma siete por ciento. Todas las cifras de esta defensa son posteriores a esa corrección.
+              <a:t>Y aquí está el problema, el resultado que reorientó este capítulo.
+Cada red se evalúa contra su línea base: la solar contra la persistencia de cielo claro, la de precio contra la de veinticuatro horas. Y no es una vara de medir cualquiera: en estas dos series el día de hoy se parece muchísimo al de ayer, así que «lo mismo que ayer» acierta la mayor parte del tiempo. Es una referencia dura.
+Ninguna de las dos la bate: la solar queda un ocho coma ocho por ciento por detrás, la de precio un siete coma uno.
+Pero el motivo de esa derrota es lo que abre la solución. Una red recurrente está pensada para anticipar cambios, no para repetir lo de ayer. En las horas en que no cambia nada, que son la mayoría, la persistencia es imbatible; en las que sí cambia, que son las que deciden, aporta la red. Aciertan en sitios distintos: la salida no es elegir una, sino combinarlas.
 — — — — —
-NO SE DICE · objetivo 1:12 · Presentar esto como resultado medido, no como fallo. Es lo que demuestra que validaste contra la referencia correcta.</a:t>
+NO SE DICE · objetivo 1:13 · Presentar esto como resultado medido, no como fallo. Es lo que demuestra que validaste contra la referencia correcta.</a:t>
             </a:r>
             <a:endParaRPr lang="en-US" dirty="0"/>
           </a:p>
@@ -2639,9 +2640,10 @@
             <a:r>
               <a:rPr lang="en-US" dirty="0"/>
               <a:t>La solución tiene tres partes, y ninguna exige reentrenar.
-La primera es física: proyectar la predicción sobre la envolvente de cielo claro, es decir, no permitir que la irradiancia prevista supere a la de cielo despejado. Con eso el error diurno baja alrededor de un seis por ciento.
-La segunda es la que da nombre a la diapositiva: ponderar la red con su propia línea base. Una combinación convexa con un peso distinto por cada hora del horizonte, ajustado sobre validación, nunca sobre test. Los dos predictores cometen errores poco correlacionados —la red captura el perfil, la persistencia el nivel del día— y esa es la situación en la que combinar aporta. El resultado: más cinco coma ocho por ciento en solar y más seis coma seis en precio.
-Y la tercera es la corrección del lazo cerrado, realimentando con el precio real de la hora ya transcurrida, que sigue siendo estrictamente causal.
+La primera es física: acotar la predicción a la envolvente de cielo claro, no dejar que la irradiancia prevista supere la de un día despejado. Con eso el error absoluto medio diurno —cuánto me equivoco de media cada hora, en las unidades de la variable— baja de cincuenta y nueve a cincuenta y seis vatios-hora por metro cuadrado.
+La segunda da nombre a la diapositiva: ponderar la red con su propia línea base, una combinación convexa con un peso distinto por cada hora del horizonte, ajustado en validación y nunca en test.
+La tercera es la corrección del lazo cerrado, realimentando con el precio real de la hora ya transcurrida, que sigue siendo causal.
+El resultado son esas dos cifras, y conviene decir sobre qué se miden: no sobre no predecir nada, sino sobre la persistencia, que ya acierta la mayor parte del tiempo.
 — — — — —
 NO SE DICE · objetivo 1:08 · Esta es la diapositiva que cierra el bloque de redes. Deja claro que lo desplegado es la señal combinada.</a:t>
             </a:r>
@@ -3670,7 +3672,7 @@
         </p:nvSpPr>
         <p:spPr>
           <a:xfrm>
-            <a:off x="502920" y="2779776"/>
+            <a:off x="502920" y="2651760"/>
             <a:ext cx="1325880" cy="548640"/>
           </a:xfrm>
           <a:prstGeom prst="roundRect">
@@ -3697,7 +3699,7 @@
         </p:nvSpPr>
         <p:spPr>
           <a:xfrm>
-            <a:off x="502920" y="2779776"/>
+            <a:off x="502920" y="2651760"/>
             <a:ext cx="1325880" cy="548640"/>
           </a:xfrm>
           <a:prstGeom prst="rect">
@@ -3736,7 +3738,7 @@
         </p:nvSpPr>
         <p:spPr>
           <a:xfrm>
-            <a:off x="1892808" y="3054096"/>
+            <a:off x="1892808" y="2926080"/>
             <a:ext cx="365760" cy="0"/>
           </a:xfrm>
           <a:prstGeom prst="line">
@@ -3760,7 +3762,7 @@
         </p:nvSpPr>
         <p:spPr>
           <a:xfrm>
-            <a:off x="2322576" y="2596896"/>
+            <a:off x="2322576" y="2468880"/>
             <a:ext cx="2514600" cy="914400"/>
           </a:xfrm>
           <a:prstGeom prst="roundRect">
@@ -3787,7 +3789,7 @@
         </p:nvSpPr>
         <p:spPr>
           <a:xfrm>
-            <a:off x="2322576" y="2651760"/>
+            <a:off x="2322576" y="2523744"/>
             <a:ext cx="2514600" cy="475488"/>
           </a:xfrm>
           <a:prstGeom prst="rect">
@@ -3826,7 +3828,7 @@
         </p:nvSpPr>
         <p:spPr>
           <a:xfrm>
-            <a:off x="2377440" y="3072384"/>
+            <a:off x="2377440" y="2944368"/>
             <a:ext cx="2404872" cy="384048"/>
           </a:xfrm>
           <a:prstGeom prst="rect">
@@ -3868,7 +3870,7 @@
         </p:nvSpPr>
         <p:spPr>
           <a:xfrm>
-            <a:off x="4901184" y="3054096"/>
+            <a:off x="4901184" y="2926080"/>
             <a:ext cx="310896" cy="0"/>
           </a:xfrm>
           <a:prstGeom prst="line">
@@ -3891,8 +3893,8 @@
         </p:nvSpPr>
         <p:spPr>
           <a:xfrm>
-            <a:off x="5212080" y="2167128"/>
-            <a:ext cx="0" cy="1316736"/>
+            <a:off x="5212080" y="2194560"/>
+            <a:ext cx="0" cy="1463040"/>
           </a:xfrm>
           <a:prstGeom prst="line">
             <a:avLst/>
@@ -3914,7 +3916,7 @@
         </p:nvSpPr>
         <p:spPr>
           <a:xfrm>
-            <a:off x="5212080" y="2167128"/>
+            <a:off x="5212080" y="2194560"/>
             <a:ext cx="128016" cy="0"/>
           </a:xfrm>
           <a:prstGeom prst="line">
@@ -3938,31 +3940,7 @@
         </p:nvSpPr>
         <p:spPr>
           <a:xfrm>
-            <a:off x="5212080" y="3483864"/>
-            <a:ext cx="128016" cy="0"/>
-          </a:xfrm>
-          <a:prstGeom prst="line">
-            <a:avLst/>
-          </a:prstGeom>
-          <a:noFill/>
-          <a:ln w="12700">
-            <a:solidFill>
-              <a:srgbClr val="5F6B72"/>
-            </a:solidFill>
-            <a:prstDash val="solid"/>
-            <a:tailEnd type="triangle"/>
-          </a:ln>
-        </p:spPr>
-      </p:sp>
-      <p:sp>
-        <p:nvSpPr>
-          <p:cNvPr id="14" name="Shape 12"/>
-          <p:cNvSpPr/>
-          <p:nvPr/>
-        </p:nvSpPr>
-        <p:spPr>
-          <a:xfrm>
-            <a:off x="5340096" y="1892808"/>
+            <a:off x="5340096" y="1920240"/>
             <a:ext cx="1874520" cy="548640"/>
           </a:xfrm>
           <a:prstGeom prst="roundRect">
@@ -3983,13 +3961,13 @@
       </p:sp>
       <p:sp>
         <p:nvSpPr>
-          <p:cNvPr id="15" name="Text 13"/>
-          <p:cNvSpPr txBox="1"/>
-          <p:nvPr/>
-        </p:nvSpPr>
-        <p:spPr>
-          <a:xfrm>
-            <a:off x="5340096" y="1892808"/>
+          <p:cNvPr id="14" name="Text 12"/>
+          <p:cNvSpPr txBox="1"/>
+          <p:nvPr/>
+        </p:nvSpPr>
+        <p:spPr>
+          <a:xfrm>
+            <a:off x="5340096" y="1920240"/>
             <a:ext cx="1874520" cy="548640"/>
           </a:xfrm>
           <a:prstGeom prst="rect">
@@ -4019,6 +3997,30 @@
             <a:endParaRPr lang="en-US" sz="1250" dirty="0"/>
           </a:p>
         </p:txBody>
+      </p:sp>
+      <p:sp>
+        <p:nvSpPr>
+          <p:cNvPr id="15" name="Shape 13"/>
+          <p:cNvSpPr/>
+          <p:nvPr/>
+        </p:nvSpPr>
+        <p:spPr>
+          <a:xfrm>
+            <a:off x="5212080" y="2926080"/>
+            <a:ext cx="128016" cy="0"/>
+          </a:xfrm>
+          <a:prstGeom prst="line">
+            <a:avLst/>
+          </a:prstGeom>
+          <a:noFill/>
+          <a:ln w="12700">
+            <a:solidFill>
+              <a:srgbClr val="5F6B72"/>
+            </a:solidFill>
+            <a:prstDash val="solid"/>
+            <a:tailEnd type="triangle"/>
+          </a:ln>
+        </p:spPr>
       </p:sp>
       <p:sp>
         <p:nvSpPr>
@@ -4028,7 +4030,97 @@
         </p:nvSpPr>
         <p:spPr>
           <a:xfrm>
-            <a:off x="5340096" y="3209544"/>
+            <a:off x="5340096" y="2651760"/>
+            <a:ext cx="1874520" cy="548640"/>
+          </a:xfrm>
+          <a:prstGeom prst="roundRect">
+            <a:avLst>
+              <a:gd name="adj" fmla="val 10000"/>
+            </a:avLst>
+          </a:prstGeom>
+          <a:solidFill>
+            <a:srgbClr val="FFFFFF"/>
+          </a:solidFill>
+          <a:ln w="12700">
+            <a:solidFill>
+              <a:srgbClr val="DDE3E6"/>
+            </a:solidFill>
+            <a:prstDash val="solid"/>
+          </a:ln>
+        </p:spPr>
+      </p:sp>
+      <p:sp>
+        <p:nvSpPr>
+          <p:cNvPr id="17" name="Text 15"/>
+          <p:cNvSpPr txBox="1"/>
+          <p:nvPr/>
+        </p:nvSpPr>
+        <p:spPr>
+          <a:xfrm>
+            <a:off x="5340096" y="2651760"/>
+            <a:ext cx="1874520" cy="548640"/>
+          </a:xfrm>
+          <a:prstGeom prst="rect">
+            <a:avLst/>
+          </a:prstGeom>
+          <a:noFill/>
+          <a:ln/>
+        </p:spPr>
+        <p:txBody>
+          <a:bodyPr wrap="square" lIns="0" tIns="0" rIns="0" bIns="0" rtlCol="0" anchor="ctr"/>
+          <a:lstStyle/>
+          <a:p>
+            <a:pPr algn="ctr" indent="0" marL="0">
+              <a:buNone/>
+            </a:pPr>
+            <a:r>
+              <a:rPr lang="en-US" sz="1250" b="1" dirty="0">
+                <a:solidFill>
+                  <a:srgbClr val="10394A"/>
+                </a:solidFill>
+                <a:latin typeface="Calibri" pitchFamily="34" charset="0"/>
+                <a:ea typeface="Calibri" pitchFamily="34" charset="-122"/>
+                <a:cs typeface="Calibri" pitchFamily="34" charset="-120"/>
+              </a:rPr>
+              <a:t>Versión B</a:t>
+            </a:r>
+            <a:endParaRPr lang="en-US" sz="1250" dirty="0"/>
+          </a:p>
+        </p:txBody>
+      </p:sp>
+      <p:sp>
+        <p:nvSpPr>
+          <p:cNvPr id="18" name="Shape 16"/>
+          <p:cNvSpPr/>
+          <p:nvPr/>
+        </p:nvSpPr>
+        <p:spPr>
+          <a:xfrm>
+            <a:off x="5212080" y="3657600"/>
+            <a:ext cx="128016" cy="0"/>
+          </a:xfrm>
+          <a:prstGeom prst="line">
+            <a:avLst/>
+          </a:prstGeom>
+          <a:noFill/>
+          <a:ln w="12700">
+            <a:solidFill>
+              <a:srgbClr val="5F6B72"/>
+            </a:solidFill>
+            <a:prstDash val="solid"/>
+            <a:tailEnd type="triangle"/>
+          </a:ln>
+        </p:spPr>
+      </p:sp>
+      <p:sp>
+        <p:nvSpPr>
+          <p:cNvPr id="19" name="Shape 17"/>
+          <p:cNvSpPr/>
+          <p:nvPr/>
+        </p:nvSpPr>
+        <p:spPr>
+          <a:xfrm>
+            <a:off x="5340096" y="3383280"/>
             <a:ext cx="1874520" cy="548640"/>
           </a:xfrm>
           <a:prstGeom prst="roundRect">
@@ -4049,13 +4141,13 @@
       </p:sp>
       <p:sp>
         <p:nvSpPr>
-          <p:cNvPr id="17" name="Text 15"/>
-          <p:cNvSpPr txBox="1"/>
-          <p:nvPr/>
-        </p:nvSpPr>
-        <p:spPr>
-          <a:xfrm>
-            <a:off x="5340096" y="3209544"/>
+          <p:cNvPr id="20" name="Text 18"/>
+          <p:cNvSpPr txBox="1"/>
+          <p:nvPr/>
+        </p:nvSpPr>
+        <p:spPr>
+          <a:xfrm>
+            <a:off x="5340096" y="3383280"/>
             <a:ext cx="1874520" cy="548640"/>
           </a:xfrm>
           <a:prstGeom prst="rect">
@@ -4088,52 +4180,13 @@
       </p:sp>
       <p:sp>
         <p:nvSpPr>
-          <p:cNvPr id="18" name="Text 16"/>
-          <p:cNvSpPr txBox="1"/>
-          <p:nvPr/>
-        </p:nvSpPr>
-        <p:spPr>
-          <a:xfrm>
-            <a:off x="5340096" y="2487168"/>
-            <a:ext cx="1874520" cy="402336"/>
-          </a:xfrm>
-          <a:prstGeom prst="rect">
-            <a:avLst/>
-          </a:prstGeom>
-          <a:noFill/>
-          <a:ln/>
-        </p:spPr>
-        <p:txBody>
-          <a:bodyPr wrap="square" lIns="0" tIns="0" rIns="0" bIns="0" rtlCol="0" anchor="ctr"/>
-          <a:lstStyle/>
-          <a:p>
-            <a:pPr algn="ctr" indent="0" marL="0">
-              <a:buNone/>
-            </a:pPr>
-            <a:r>
-              <a:rPr lang="en-US" sz="1000" i="1" dirty="0">
-                <a:solidFill>
-                  <a:srgbClr val="C8861E"/>
-                </a:solidFill>
-                <a:latin typeface="Calibri" pitchFamily="34" charset="0"/>
-                <a:ea typeface="Calibri" pitchFamily="34" charset="-122"/>
-                <a:cs typeface="Calibri" pitchFamily="34" charset="-120"/>
-              </a:rPr>
-              <a:t>misma demanda, distinto gestor</a:t>
-            </a:r>
-            <a:endParaRPr lang="en-US" sz="1000" dirty="0"/>
-          </a:p>
-        </p:txBody>
-      </p:sp>
-      <p:sp>
-        <p:nvSpPr>
-          <p:cNvPr id="19" name="Shape 17"/>
+          <p:cNvPr id="21" name="Shape 19"/>
           <p:cNvSpPr/>
           <p:nvPr/>
         </p:nvSpPr>
         <p:spPr>
           <a:xfrm>
-            <a:off x="7278624" y="2167128"/>
+            <a:off x="7278624" y="2194560"/>
             <a:ext cx="374904" cy="0"/>
           </a:xfrm>
           <a:prstGeom prst="line">
@@ -4151,13 +4204,13 @@
       </p:sp>
       <p:sp>
         <p:nvSpPr>
-          <p:cNvPr id="20" name="Shape 18"/>
+          <p:cNvPr id="22" name="Shape 20"/>
           <p:cNvSpPr/>
           <p:nvPr/>
         </p:nvSpPr>
         <p:spPr>
           <a:xfrm>
-            <a:off x="7278624" y="3483864"/>
+            <a:off x="7278624" y="2926080"/>
             <a:ext cx="374904" cy="0"/>
           </a:xfrm>
           <a:prstGeom prst="line">
@@ -4175,37 +4228,14 @@
       </p:sp>
       <p:sp>
         <p:nvSpPr>
-          <p:cNvPr id="21" name="Shape 19"/>
+          <p:cNvPr id="23" name="Shape 21"/>
           <p:cNvSpPr/>
           <p:nvPr/>
         </p:nvSpPr>
         <p:spPr>
           <a:xfrm>
-            <a:off x="7653528" y="2167128"/>
-            <a:ext cx="0" cy="1316736"/>
-          </a:xfrm>
-          <a:prstGeom prst="line">
-            <a:avLst/>
-          </a:prstGeom>
-          <a:noFill/>
-          <a:ln w="12700">
-            <a:solidFill>
-              <a:srgbClr val="5F6B72"/>
-            </a:solidFill>
-            <a:prstDash val="solid"/>
-          </a:ln>
-        </p:spPr>
-      </p:sp>
-      <p:sp>
-        <p:nvSpPr>
-          <p:cNvPr id="22" name="Shape 20"/>
-          <p:cNvSpPr/>
-          <p:nvPr/>
-        </p:nvSpPr>
-        <p:spPr>
-          <a:xfrm>
-            <a:off x="7653528" y="3054096"/>
-            <a:ext cx="128016" cy="0"/>
+            <a:off x="7278624" y="3657600"/>
+            <a:ext cx="374904" cy="0"/>
           </a:xfrm>
           <a:prstGeom prst="line">
             <a:avLst/>
@@ -4222,13 +4252,60 @@
       </p:sp>
       <p:sp>
         <p:nvSpPr>
-          <p:cNvPr id="23" name="Shape 21"/>
+          <p:cNvPr id="24" name="Shape 22"/>
           <p:cNvSpPr/>
           <p:nvPr/>
         </p:nvSpPr>
         <p:spPr>
           <a:xfrm>
-            <a:off x="7781544" y="2596896"/>
+            <a:off x="7653528" y="2194560"/>
+            <a:ext cx="0" cy="1463040"/>
+          </a:xfrm>
+          <a:prstGeom prst="line">
+            <a:avLst/>
+          </a:prstGeom>
+          <a:noFill/>
+          <a:ln w="12700">
+            <a:solidFill>
+              <a:srgbClr val="5F6B72"/>
+            </a:solidFill>
+            <a:prstDash val="solid"/>
+          </a:ln>
+        </p:spPr>
+      </p:sp>
+      <p:sp>
+        <p:nvSpPr>
+          <p:cNvPr id="25" name="Shape 23"/>
+          <p:cNvSpPr/>
+          <p:nvPr/>
+        </p:nvSpPr>
+        <p:spPr>
+          <a:xfrm>
+            <a:off x="7653528" y="2926080"/>
+            <a:ext cx="128016" cy="0"/>
+          </a:xfrm>
+          <a:prstGeom prst="line">
+            <a:avLst/>
+          </a:prstGeom>
+          <a:noFill/>
+          <a:ln w="12700">
+            <a:solidFill>
+              <a:srgbClr val="5F6B72"/>
+            </a:solidFill>
+            <a:prstDash val="solid"/>
+            <a:tailEnd type="triangle"/>
+          </a:ln>
+        </p:spPr>
+      </p:sp>
+      <p:sp>
+        <p:nvSpPr>
+          <p:cNvPr id="26" name="Shape 24"/>
+          <p:cNvSpPr/>
+          <p:nvPr/>
+        </p:nvSpPr>
+        <p:spPr>
+          <a:xfrm>
+            <a:off x="7781544" y="2468880"/>
             <a:ext cx="2057400" cy="914400"/>
           </a:xfrm>
           <a:prstGeom prst="roundRect">
@@ -4249,13 +4326,13 @@
       </p:sp>
       <p:sp>
         <p:nvSpPr>
-          <p:cNvPr id="24" name="Text 22"/>
-          <p:cNvSpPr txBox="1"/>
-          <p:nvPr/>
-        </p:nvSpPr>
-        <p:spPr>
-          <a:xfrm>
-            <a:off x="7781544" y="2651760"/>
+          <p:cNvPr id="27" name="Text 25"/>
+          <p:cNvSpPr txBox="1"/>
+          <p:nvPr/>
+        </p:nvSpPr>
+        <p:spPr>
+          <a:xfrm>
+            <a:off x="7781544" y="2523744"/>
             <a:ext cx="2057400" cy="475488"/>
           </a:xfrm>
           <a:prstGeom prst="rect">
@@ -4280,7 +4357,7 @@
                 <a:ea typeface="Calibri" pitchFamily="34" charset="-122"/>
                 <a:cs typeface="Calibri" pitchFamily="34" charset="-120"/>
               </a:rPr>
-              <a:t>Diferencia del par</a:t>
+              <a:t>Diferencia entre dos versiones</a:t>
             </a:r>
             <a:endParaRPr lang="en-US" sz="1250" dirty="0"/>
           </a:p>
@@ -4288,13 +4365,13 @@
       </p:sp>
       <p:sp>
         <p:nvSpPr>
-          <p:cNvPr id="25" name="Text 23"/>
-          <p:cNvSpPr txBox="1"/>
-          <p:nvPr/>
-        </p:nvSpPr>
-        <p:spPr>
-          <a:xfrm>
-            <a:off x="7836408" y="3072384"/>
+          <p:cNvPr id="28" name="Text 26"/>
+          <p:cNvSpPr txBox="1"/>
+          <p:nvPr/>
+        </p:nvSpPr>
+        <p:spPr>
+          <a:xfrm>
+            <a:off x="7836408" y="2944368"/>
             <a:ext cx="1947672" cy="384048"/>
           </a:xfrm>
           <a:prstGeom prst="rect">
@@ -4322,7 +4399,7 @@
                 <a:ea typeface="Calibri" pitchFamily="34" charset="-122"/>
                 <a:cs typeface="Calibri" pitchFamily="34" charset="-120"/>
               </a:rPr>
-              <a:t>C − A, en euros por semana</a:t>
+              <a:t>sobre la misma semana, en euros</a:t>
             </a:r>
             <a:endParaRPr lang="en-US" sz="950" dirty="0"/>
           </a:p>
@@ -4330,13 +4407,13 @@
       </p:sp>
       <p:sp>
         <p:nvSpPr>
-          <p:cNvPr id="26" name="Text 24"/>
-          <p:cNvSpPr txBox="1"/>
-          <p:nvPr/>
-        </p:nvSpPr>
-        <p:spPr>
-          <a:xfrm>
-            <a:off x="10113264" y="2578608"/>
+          <p:cNvPr id="29" name="Text 27"/>
+          <p:cNvSpPr txBox="1"/>
+          <p:nvPr/>
+        </p:nvSpPr>
+        <p:spPr>
+          <a:xfrm>
+            <a:off x="10113264" y="2450592"/>
             <a:ext cx="1575511" cy="566928"/>
           </a:xfrm>
           <a:prstGeom prst="rect">
@@ -4369,13 +4446,13 @@
       </p:sp>
       <p:sp>
         <p:nvSpPr>
-          <p:cNvPr id="27" name="Text 25"/>
-          <p:cNvSpPr txBox="1"/>
-          <p:nvPr/>
-        </p:nvSpPr>
-        <p:spPr>
-          <a:xfrm>
-            <a:off x="10149840" y="3127248"/>
+          <p:cNvPr id="30" name="Text 28"/>
+          <p:cNvSpPr txBox="1"/>
+          <p:nvPr/>
+        </p:nvSpPr>
+        <p:spPr>
+          <a:xfrm>
+            <a:off x="10149840" y="2999232"/>
             <a:ext cx="1575511" cy="310896"/>
           </a:xfrm>
           <a:prstGeom prst="rect">
@@ -4408,13 +4485,13 @@
       </p:sp>
       <p:sp>
         <p:nvSpPr>
-          <p:cNvPr id="28" name="Text 26"/>
-          <p:cNvSpPr txBox="1"/>
-          <p:nvPr/>
-        </p:nvSpPr>
-        <p:spPr>
-          <a:xfrm>
-            <a:off x="502920" y="3968496"/>
+          <p:cNvPr id="31" name="Text 29"/>
+          <p:cNvSpPr txBox="1"/>
+          <p:nvPr/>
+        </p:nvSpPr>
+        <p:spPr>
+          <a:xfrm>
+            <a:off x="502920" y="4096512"/>
             <a:ext cx="11185855" cy="310896"/>
           </a:xfrm>
           <a:prstGeom prst="rect">
@@ -4439,7 +4516,7 @@
                 <a:ea typeface="Calibri" pitchFamily="34" charset="-122"/>
                 <a:cs typeface="Calibri" pitchFamily="34" charset="-120"/>
               </a:rPr>
-              <a:t>El ruido de la demanda es común a los dos miembros del par y se cancela en la resta: el contraste se hace sobre las 20 diferencias, no sobre dos medias.</a:t>
+              <a:t>La misma semilla corre en todas las versiones, así que el azar de la demanda se cancela en la resta: el contraste se hace sobre las 20 diferencias, no sobre dos promedios.</a:t>
             </a:r>
             <a:endParaRPr lang="en-US" sz="1150" dirty="0"/>
           </a:p>
@@ -4447,7 +4524,7 @@
       </p:sp>
       <p:sp>
         <p:nvSpPr>
-          <p:cNvPr id="29" name="Shape 27"/>
+          <p:cNvPr id="32" name="Shape 30"/>
           <p:cNvSpPr/>
           <p:nvPr/>
         </p:nvSpPr>
@@ -4470,7 +4547,7 @@
       </p:sp>
       <p:sp>
         <p:nvSpPr>
-          <p:cNvPr id="30" name="Text 28"/>
+          <p:cNvPr id="33" name="Text 31"/>
           <p:cNvSpPr txBox="1"/>
           <p:nvPr/>
         </p:nvSpPr>
@@ -4501,7 +4578,7 @@
                 <a:ea typeface="Cambria" pitchFamily="34" charset="-122"/>
                 <a:cs typeface="Cambria" pitchFamily="34" charset="-120"/>
               </a:rPr>
-              <a:t>Pareado por semilla</a:t>
+              <a:t>Comparar en pareja</a:t>
             </a:r>
             <a:endParaRPr lang="en-US" sz="1500" dirty="0"/>
           </a:p>
@@ -4509,7 +4586,7 @@
       </p:sp>
       <p:sp>
         <p:nvSpPr>
-          <p:cNvPr id="31" name="Text 29"/>
+          <p:cNvPr id="34" name="Text 32"/>
           <p:cNvSpPr txBox="1"/>
           <p:nvPr/>
         </p:nvSpPr>
@@ -4543,7 +4620,7 @@
                 <a:ea typeface="Calibri" pitchFamily="34" charset="-122"/>
                 <a:cs typeface="Calibri" pitchFamily="34" charset="-120"/>
               </a:rPr>
-              <a:t>La semilla n genera exactamente el mismo perfil de demanda en todas las versiones</a:t>
+              <a:t>Cada versión se mide contra otra sobre la misma semana, no contra un promedio</a:t>
             </a:r>
             <a:endParaRPr lang="en-US" sz="1200" dirty="0"/>
           </a:p>
@@ -4551,7 +4628,7 @@
       </p:sp>
       <p:sp>
         <p:nvSpPr>
-          <p:cNvPr id="32" name="Text 30"/>
+          <p:cNvPr id="35" name="Text 33"/>
           <p:cNvSpPr txBox="1"/>
           <p:nvPr/>
         </p:nvSpPr>
@@ -4590,7 +4667,7 @@
       </p:sp>
       <p:sp>
         <p:nvSpPr>
-          <p:cNvPr id="33" name="Text 31"/>
+          <p:cNvPr id="36" name="Text 34"/>
           <p:cNvSpPr txBox="1"/>
           <p:nvPr/>
         </p:nvSpPr>
@@ -4624,7 +4701,7 @@
                 <a:ea typeface="Calibri" pitchFamily="34" charset="-122"/>
                 <a:cs typeface="Calibri" pitchFamily="34" charset="-120"/>
               </a:rPr>
-              <a:t>Rangos con signo, no medias: tres semillas nubladas llegaban a dominarlas</a:t>
+              <a:t>Mira si las diferencias caen siempre del mismo lado, en vez de promediarlas</a:t>
             </a:r>
             <a:endParaRPr lang="en-US" sz="1200" dirty="0"/>
           </a:p>
@@ -4632,7 +4709,7 @@
       </p:sp>
       <p:sp>
         <p:nvSpPr>
-          <p:cNvPr id="34" name="Text 32"/>
+          <p:cNvPr id="37" name="Text 35"/>
           <p:cNvSpPr txBox="1"/>
           <p:nvPr/>
         </p:nvSpPr>
@@ -4671,7 +4748,7 @@
       </p:sp>
       <p:sp>
         <p:nvSpPr>
-          <p:cNvPr id="35" name="Text 33"/>
+          <p:cNvPr id="38" name="Text 36"/>
           <p:cNvSpPr txBox="1"/>
           <p:nvPr/>
         </p:nvSpPr>
@@ -4705,7 +4782,7 @@
                 <a:ea typeface="Calibri" pitchFamily="34" charset="-122"/>
                 <a:cs typeface="Calibri" pitchFamily="34" charset="-120"/>
               </a:rPr>
-              <a:t>9,33 €/semana, la dispersión de la propia referencia. Fijado antes de simular</a:t>
+              <a:t>Por debajo de 9,33 €/semana lo doy por empate. Fijado antes de simular</a:t>
             </a:r>
             <a:endParaRPr lang="en-US" sz="1200" dirty="0"/>
           </a:p>
@@ -4713,7 +4790,7 @@
       </p:sp>
       <p:sp>
         <p:nvSpPr>
-          <p:cNvPr id="36" name="Text 34"/>
+          <p:cNvPr id="39" name="Text 37"/>
           <p:cNvSpPr txBox="1"/>
           <p:nvPr/>
         </p:nvSpPr>
@@ -4752,7 +4829,7 @@
       </p:sp>
       <p:sp>
         <p:nvSpPr>
-          <p:cNvPr id="37" name="Text 35"/>
+          <p:cNvPr id="40" name="Text 38"/>
           <p:cNvSpPr txBox="1"/>
           <p:nvPr/>
         </p:nvSpPr>
@@ -4786,7 +4863,7 @@
                 <a:ea typeface="Calibri" pitchFamily="34" charset="-122"/>
                 <a:cs typeface="Calibri" pitchFamily="34" charset="-120"/>
               </a:rPr>
-              <a:t>La misma tanda con la previsión perfecta: es la cota superior, no una versión</a:t>
+              <a:t>La misma tanda con previsión perfecta: marca el techo de lo alcanzable</a:t>
             </a:r>
             <a:endParaRPr lang="en-US" sz="1200" dirty="0"/>
           </a:p>
@@ -4794,7 +4871,7 @@
       </p:sp>
       <p:sp>
         <p:nvSpPr>
-          <p:cNvPr id="38" name="Text 36"/>
+          <p:cNvPr id="41" name="Text 39"/>
           <p:cNvSpPr txBox="1"/>
           <p:nvPr/>
         </p:nvSpPr>
@@ -5257,7 +5334,7 @@
                 <a:ea typeface="Calibri" pitchFamily="34" charset="-122"/>
                 <a:cs typeface="Calibri" pitchFamily="34" charset="-120"/>
               </a:rPr>
-              <a:t>Tanque tampón, compresor y tanque surtidor con sus umbrales</a:t>
+              <a:t>Tanque pulmón, compresor y tanque surtidor con sus umbrales</a:t>
             </a:r>
             <a:endParaRPr lang="en-US" sz="1350" dirty="0"/>
           </a:p>
@@ -6520,7 +6597,7 @@
                 <a:ea typeface="Calibri" pitchFamily="34" charset="-122"/>
                 <a:cs typeface="Calibri" pitchFamily="34" charset="-120"/>
               </a:rPr>
-              <a:t>La información necesaria ya estaba en las entradas de la Versión A: ninguna previsión hacía falta para ver esto.</a:t>
+              <a:t>En esa misma semana la estación exporta 14 012 kWh a 39,3 €/MWh: vende diez veces más energía de la que compra, y la compra tres veces más cara.</a:t>
             </a:r>
             <a:endParaRPr lang="en-US" sz="1350" dirty="0"/>
           </a:p>
@@ -6678,56 +6755,32 @@
           </a:p>
         </p:txBody>
       </p:sp>
-      <p:pic>
-        <p:nvPicPr>
-          <p:cNvPr id="4" name="Image 0" descr="img/ems_logica_C.png">    </p:cNvPr>
-          <p:cNvPicPr>
-            <a:picLocks noChangeAspect="1"/>
-          </p:cNvPicPr>
-          <p:nvPr/>
-        </p:nvPicPr>
-        <p:blipFill>
-          <a:blip r:embed="rId1"/>
-          <a:stretch>
-            <a:fillRect/>
-          </a:stretch>
-        </p:blipFill>
-        <p:spPr>
-          <a:xfrm>
-            <a:off x="754380" y="1536192"/>
-            <a:ext cx="6217920" cy="3886200"/>
-          </a:xfrm>
-          <a:prstGeom prst="rect">
-            <a:avLst/>
-          </a:prstGeom>
-        </p:spPr>
-      </p:pic>
-      <p:sp>
-        <p:nvSpPr>
-          <p:cNvPr id="5" name="Text 2"/>
-          <p:cNvSpPr txBox="1"/>
-          <p:nvPr/>
-        </p:nvSpPr>
-        <p:spPr>
-          <a:xfrm>
-            <a:off x="7498080" y="1536192"/>
-            <a:ext cx="4206240" cy="274320"/>
-          </a:xfrm>
-          <a:prstGeom prst="rect">
-            <a:avLst/>
-          </a:prstGeom>
-          <a:noFill/>
-          <a:ln/>
-        </p:spPr>
-        <p:txBody>
-          <a:bodyPr wrap="square" lIns="0" tIns="0" rIns="0" bIns="0" rtlCol="0" anchor="ctr"/>
-          <a:lstStyle/>
-          <a:p>
-            <a:pPr indent="0" marL="0">
-              <a:buNone/>
-            </a:pPr>
-            <a:r>
-              <a:rPr lang="en-US" sz="1000" b="1" spc="140" kern="0" dirty="0">
+      <p:sp>
+        <p:nvSpPr>
+          <p:cNvPr id="4" name="Text 2"/>
+          <p:cNvSpPr txBox="1"/>
+          <p:nvPr/>
+        </p:nvSpPr>
+        <p:spPr>
+          <a:xfrm>
+            <a:off x="502920" y="1517904"/>
+            <a:ext cx="11185855" cy="256032"/>
+          </a:xfrm>
+          <a:prstGeom prst="rect">
+            <a:avLst/>
+          </a:prstGeom>
+          <a:noFill/>
+          <a:ln/>
+        </p:spPr>
+        <p:txBody>
+          <a:bodyPr wrap="square" lIns="0" tIns="0" rIns="0" bIns="0" rtlCol="0" anchor="ctr"/>
+          <a:lstStyle/>
+          <a:p>
+            <a:pPr indent="0" marL="0">
+              <a:buNone/>
+            </a:pPr>
+            <a:r>
+              <a:rPr lang="en-US" sz="1050" b="1" spc="130" kern="0" dirty="0">
                 <a:solidFill>
                   <a:srgbClr val="C8861E"/>
                 </a:solidFill>
@@ -6735,77 +6788,913 @@
                 <a:ea typeface="Calibri" pitchFamily="34" charset="-122"/>
                 <a:cs typeface="Calibri" pitchFamily="34" charset="-120"/>
               </a:rPr>
-              <a:t>VERSIÓN C · dos cambios, cada uno con su interruptor</a:t>
-            </a:r>
-            <a:endParaRPr lang="en-US" sz="1000" dirty="0"/>
-          </a:p>
-        </p:txBody>
-      </p:sp>
-      <p:sp>
-        <p:nvSpPr>
-          <p:cNvPr id="6" name="Text 3"/>
-          <p:cNvSpPr txBox="1"/>
-          <p:nvPr/>
-        </p:nvSpPr>
-        <p:spPr>
-          <a:xfrm>
-            <a:off x="7498080" y="1993392"/>
-            <a:ext cx="320040" cy="320040"/>
-          </a:xfrm>
-          <a:prstGeom prst="rect">
-            <a:avLst/>
-          </a:prstGeom>
-          <a:noFill/>
-          <a:ln/>
-        </p:spPr>
-        <p:txBody>
-          <a:bodyPr wrap="square" lIns="0" tIns="0" rIns="0" bIns="0" rtlCol="0" anchor="ctr"/>
-          <a:lstStyle/>
-          <a:p>
-            <a:pPr indent="0" marL="0">
-              <a:buNone/>
-            </a:pPr>
-            <a:r>
-              <a:rPr lang="en-US" sz="1700" b="1" dirty="0">
-                <a:solidFill>
-                  <a:srgbClr val="C8861E"/>
+              <a:t>La lógica común, en cuatro pasos · la Versión C sustituye dos de ellos</a:t>
+            </a:r>
+            <a:endParaRPr lang="en-US" sz="1050" dirty="0"/>
+          </a:p>
+        </p:txBody>
+      </p:sp>
+      <p:sp>
+        <p:nvSpPr>
+          <p:cNvPr id="5" name="Shape 3"/>
+          <p:cNvSpPr/>
+          <p:nvPr/>
+        </p:nvSpPr>
+        <p:spPr>
+          <a:xfrm>
+            <a:off x="502920" y="1901952"/>
+            <a:ext cx="2631872" cy="1188720"/>
+          </a:xfrm>
+          <a:prstGeom prst="roundRect">
+            <a:avLst>
+              <a:gd name="adj" fmla="val 3846"/>
+            </a:avLst>
+          </a:prstGeom>
+          <a:solidFill>
+            <a:srgbClr val="F1F5F7"/>
+          </a:solidFill>
+          <a:ln w="12700">
+            <a:solidFill>
+              <a:srgbClr val="DDE3E6"/>
+            </a:solidFill>
+            <a:prstDash val="solid"/>
+          </a:ln>
+        </p:spPr>
+      </p:sp>
+      <p:sp>
+        <p:nvSpPr>
+          <p:cNvPr id="6" name="Text 4"/>
+          <p:cNvSpPr txBox="1"/>
+          <p:nvPr/>
+        </p:nvSpPr>
+        <p:spPr>
+          <a:xfrm>
+            <a:off x="667512" y="2029968"/>
+            <a:ext cx="2302688" cy="292608"/>
+          </a:xfrm>
+          <a:prstGeom prst="rect">
+            <a:avLst/>
+          </a:prstGeom>
+          <a:noFill/>
+          <a:ln/>
+        </p:spPr>
+        <p:txBody>
+          <a:bodyPr wrap="square" lIns="0" tIns="0" rIns="0" bIns="0" rtlCol="0" anchor="ctr"/>
+          <a:lstStyle/>
+          <a:p>
+            <a:pPr indent="0" marL="0">
+              <a:buNone/>
+            </a:pPr>
+            <a:r>
+              <a:rPr lang="en-US" sz="1300" b="1" dirty="0">
+                <a:solidFill>
+                  <a:srgbClr val="10394A"/>
+                </a:solidFill>
+                <a:latin typeface="Calibri" pitchFamily="34" charset="0"/>
+                <a:ea typeface="Calibri" pitchFamily="34" charset="-122"/>
+                <a:cs typeface="Calibri" pitchFamily="34" charset="-120"/>
+              </a:rPr>
+              <a:t>1 · Balance</a:t>
+            </a:r>
+            <a:endParaRPr lang="en-US" sz="1300" dirty="0"/>
+          </a:p>
+        </p:txBody>
+      </p:sp>
+      <p:sp>
+        <p:nvSpPr>
+          <p:cNvPr id="7" name="Text 5"/>
+          <p:cNvSpPr txBox="1"/>
+          <p:nvPr/>
+        </p:nvSpPr>
+        <p:spPr>
+          <a:xfrm>
+            <a:off x="667512" y="2359152"/>
+            <a:ext cx="2302688" cy="621792"/>
+          </a:xfrm>
+          <a:prstGeom prst="rect">
+            <a:avLst/>
+          </a:prstGeom>
+          <a:noFill/>
+          <a:ln/>
+        </p:spPr>
+        <p:txBody>
+          <a:bodyPr wrap="square" lIns="0" tIns="0" rIns="0" bIns="0" rtlCol="0" anchor="t"/>
+          <a:lstStyle/>
+          <a:p>
+            <a:pPr indent="0" marL="0">
+              <a:lnSpc>
+                <a:spcPct val="112000"/>
+              </a:lnSpc>
+              <a:buNone/>
+            </a:pPr>
+            <a:r>
+              <a:rPr lang="en-US" sz="1100" dirty="0">
+                <a:solidFill>
+                  <a:srgbClr val="5F6B72"/>
+                </a:solidFill>
+                <a:latin typeface="Calibri" pitchFamily="34" charset="0"/>
+                <a:ea typeface="Calibri" pitchFamily="34" charset="-122"/>
+                <a:cs typeface="Calibri" pitchFamily="34" charset="-120"/>
+              </a:rPr>
+              <a:t>Excedente = fotovoltaica − carga</a:t>
+            </a:r>
+            <a:endParaRPr lang="en-US" sz="1100" dirty="0"/>
+          </a:p>
+        </p:txBody>
+      </p:sp>
+      <p:sp>
+        <p:nvSpPr>
+          <p:cNvPr id="8" name="Shape 6"/>
+          <p:cNvSpPr/>
+          <p:nvPr/>
+        </p:nvSpPr>
+        <p:spPr>
+          <a:xfrm>
+            <a:off x="3162224" y="2496312"/>
+            <a:ext cx="164592" cy="0"/>
+          </a:xfrm>
+          <a:prstGeom prst="line">
+            <a:avLst/>
+          </a:prstGeom>
+          <a:noFill/>
+          <a:ln w="12700">
+            <a:solidFill>
+              <a:srgbClr val="5F6B72"/>
+            </a:solidFill>
+            <a:prstDash val="solid"/>
+            <a:tailEnd type="triangle"/>
+          </a:ln>
+        </p:spPr>
+      </p:sp>
+      <p:sp>
+        <p:nvSpPr>
+          <p:cNvPr id="9" name="Shape 7"/>
+          <p:cNvSpPr/>
+          <p:nvPr/>
+        </p:nvSpPr>
+        <p:spPr>
+          <a:xfrm>
+            <a:off x="3354248" y="1901952"/>
+            <a:ext cx="2631872" cy="1188720"/>
+          </a:xfrm>
+          <a:prstGeom prst="roundRect">
+            <a:avLst>
+              <a:gd name="adj" fmla="val 3846"/>
+            </a:avLst>
+          </a:prstGeom>
+          <a:solidFill>
+            <a:srgbClr val="F1F5F7"/>
+          </a:solidFill>
+          <a:ln w="12700">
+            <a:solidFill>
+              <a:srgbClr val="DDE3E6"/>
+            </a:solidFill>
+            <a:prstDash val="solid"/>
+          </a:ln>
+        </p:spPr>
+      </p:sp>
+      <p:sp>
+        <p:nvSpPr>
+          <p:cNvPr id="10" name="Text 8"/>
+          <p:cNvSpPr txBox="1"/>
+          <p:nvPr/>
+        </p:nvSpPr>
+        <p:spPr>
+          <a:xfrm>
+            <a:off x="3518840" y="2029968"/>
+            <a:ext cx="2302688" cy="292608"/>
+          </a:xfrm>
+          <a:prstGeom prst="rect">
+            <a:avLst/>
+          </a:prstGeom>
+          <a:noFill/>
+          <a:ln/>
+        </p:spPr>
+        <p:txBody>
+          <a:bodyPr wrap="square" lIns="0" tIns="0" rIns="0" bIns="0" rtlCol="0" anchor="ctr"/>
+          <a:lstStyle/>
+          <a:p>
+            <a:pPr indent="0" marL="0">
+              <a:buNone/>
+            </a:pPr>
+            <a:r>
+              <a:rPr lang="en-US" sz="1300" b="1" dirty="0">
+                <a:solidFill>
+                  <a:srgbClr val="10394A"/>
+                </a:solidFill>
+                <a:latin typeface="Calibri" pitchFamily="34" charset="0"/>
+                <a:ea typeface="Calibri" pitchFamily="34" charset="-122"/>
+                <a:cs typeface="Calibri" pitchFamily="34" charset="-120"/>
+              </a:rPr>
+              <a:t>2 · Sobra energía</a:t>
+            </a:r>
+            <a:endParaRPr lang="en-US" sz="1300" dirty="0"/>
+          </a:p>
+        </p:txBody>
+      </p:sp>
+      <p:sp>
+        <p:nvSpPr>
+          <p:cNvPr id="11" name="Text 9"/>
+          <p:cNvSpPr txBox="1"/>
+          <p:nvPr/>
+        </p:nvSpPr>
+        <p:spPr>
+          <a:xfrm>
+            <a:off x="3518840" y="2359152"/>
+            <a:ext cx="2302688" cy="621792"/>
+          </a:xfrm>
+          <a:prstGeom prst="rect">
+            <a:avLst/>
+          </a:prstGeom>
+          <a:noFill/>
+          <a:ln/>
+        </p:spPr>
+        <p:txBody>
+          <a:bodyPr wrap="square" lIns="0" tIns="0" rIns="0" bIns="0" rtlCol="0" anchor="t"/>
+          <a:lstStyle/>
+          <a:p>
+            <a:pPr indent="0" marL="0">
+              <a:lnSpc>
+                <a:spcPct val="112000"/>
+              </a:lnSpc>
+              <a:buNone/>
+            </a:pPr>
+            <a:r>
+              <a:rPr lang="en-US" sz="1100" dirty="0">
+                <a:solidFill>
+                  <a:srgbClr val="5F6B72"/>
+                </a:solidFill>
+                <a:latin typeface="Calibri" pitchFamily="34" charset="0"/>
+                <a:ea typeface="Calibri" pitchFamily="34" charset="-122"/>
+                <a:cs typeface="Calibri" pitchFamily="34" charset="-120"/>
+              </a:rPr>
+              <a:t>Repartir entre batería y electrolizador según el estado de carga</a:t>
+            </a:r>
+            <a:endParaRPr lang="en-US" sz="1100" dirty="0"/>
+          </a:p>
+        </p:txBody>
+      </p:sp>
+      <p:sp>
+        <p:nvSpPr>
+          <p:cNvPr id="12" name="Shape 10"/>
+          <p:cNvSpPr/>
+          <p:nvPr/>
+        </p:nvSpPr>
+        <p:spPr>
+          <a:xfrm>
+            <a:off x="6013552" y="2496312"/>
+            <a:ext cx="164592" cy="0"/>
+          </a:xfrm>
+          <a:prstGeom prst="line">
+            <a:avLst/>
+          </a:prstGeom>
+          <a:noFill/>
+          <a:ln w="12700">
+            <a:solidFill>
+              <a:srgbClr val="5F6B72"/>
+            </a:solidFill>
+            <a:prstDash val="solid"/>
+            <a:tailEnd type="triangle"/>
+          </a:ln>
+        </p:spPr>
+      </p:sp>
+      <p:sp>
+        <p:nvSpPr>
+          <p:cNvPr id="13" name="Shape 11"/>
+          <p:cNvSpPr/>
+          <p:nvPr/>
+        </p:nvSpPr>
+        <p:spPr>
+          <a:xfrm>
+            <a:off x="6205576" y="1901952"/>
+            <a:ext cx="2631872" cy="1188720"/>
+          </a:xfrm>
+          <a:prstGeom prst="roundRect">
+            <a:avLst>
+              <a:gd name="adj" fmla="val 3846"/>
+            </a:avLst>
+          </a:prstGeom>
+          <a:solidFill>
+            <a:srgbClr val="FFFFFF"/>
+          </a:solidFill>
+          <a:ln w="19050">
+            <a:solidFill>
+              <a:srgbClr val="C8861E"/>
+            </a:solidFill>
+            <a:prstDash val="solid"/>
+          </a:ln>
+        </p:spPr>
+      </p:sp>
+      <p:sp>
+        <p:nvSpPr>
+          <p:cNvPr id="14" name="Text 12"/>
+          <p:cNvSpPr txBox="1"/>
+          <p:nvPr/>
+        </p:nvSpPr>
+        <p:spPr>
+          <a:xfrm>
+            <a:off x="6370168" y="2029968"/>
+            <a:ext cx="2302688" cy="292608"/>
+          </a:xfrm>
+          <a:prstGeom prst="rect">
+            <a:avLst/>
+          </a:prstGeom>
+          <a:noFill/>
+          <a:ln/>
+        </p:spPr>
+        <p:txBody>
+          <a:bodyPr wrap="square" lIns="0" tIns="0" rIns="0" bIns="0" rtlCol="0" anchor="ctr"/>
+          <a:lstStyle/>
+          <a:p>
+            <a:pPr indent="0" marL="0">
+              <a:buNone/>
+            </a:pPr>
+            <a:r>
+              <a:rPr lang="en-US" sz="1300" b="1" dirty="0">
+                <a:solidFill>
+                  <a:srgbClr val="10394A"/>
+                </a:solidFill>
+                <a:latin typeface="Calibri" pitchFamily="34" charset="0"/>
+                <a:ea typeface="Calibri" pitchFamily="34" charset="-122"/>
+                <a:cs typeface="Calibri" pitchFamily="34" charset="-120"/>
+              </a:rPr>
+              <a:t>3 · Falta energía</a:t>
+            </a:r>
+            <a:endParaRPr lang="en-US" sz="1300" dirty="0"/>
+          </a:p>
+        </p:txBody>
+      </p:sp>
+      <p:sp>
+        <p:nvSpPr>
+          <p:cNvPr id="15" name="Text 13"/>
+          <p:cNvSpPr txBox="1"/>
+          <p:nvPr/>
+        </p:nvSpPr>
+        <p:spPr>
+          <a:xfrm>
+            <a:off x="6370168" y="2359152"/>
+            <a:ext cx="2302688" cy="621792"/>
+          </a:xfrm>
+          <a:prstGeom prst="rect">
+            <a:avLst/>
+          </a:prstGeom>
+          <a:noFill/>
+          <a:ln/>
+        </p:spPr>
+        <p:txBody>
+          <a:bodyPr wrap="square" lIns="0" tIns="0" rIns="0" bIns="0" rtlCol="0" anchor="t"/>
+          <a:lstStyle/>
+          <a:p>
+            <a:pPr indent="0" marL="0">
+              <a:lnSpc>
+                <a:spcPct val="112000"/>
+              </a:lnSpc>
+              <a:buNone/>
+            </a:pPr>
+            <a:r>
+              <a:rPr lang="en-US" sz="1100" dirty="0">
+                <a:solidFill>
+                  <a:srgbClr val="5F6B72"/>
+                </a:solidFill>
+                <a:latin typeface="Calibri" pitchFamily="34" charset="0"/>
+                <a:ea typeface="Calibri" pitchFamily="34" charset="-122"/>
+                <a:cs typeface="Calibri" pitchFamily="34" charset="-120"/>
+              </a:rPr>
+              <a:t>Cubrir el déficit por orden: batería, pila, red</a:t>
+            </a:r>
+            <a:endParaRPr lang="en-US" sz="1100" dirty="0"/>
+          </a:p>
+        </p:txBody>
+      </p:sp>
+      <p:sp>
+        <p:nvSpPr>
+          <p:cNvPr id="16" name="Shape 14"/>
+          <p:cNvSpPr/>
+          <p:nvPr/>
+        </p:nvSpPr>
+        <p:spPr>
+          <a:xfrm>
+            <a:off x="8453399" y="1755648"/>
+            <a:ext cx="310896" cy="310896"/>
+          </a:xfrm>
+          <a:prstGeom prst="ellipse">
+            <a:avLst/>
+          </a:prstGeom>
+          <a:solidFill>
+            <a:srgbClr val="C8861E"/>
+          </a:solidFill>
+          <a:ln/>
+        </p:spPr>
+      </p:sp>
+      <p:sp>
+        <p:nvSpPr>
+          <p:cNvPr id="17" name="Text 15"/>
+          <p:cNvSpPr txBox="1"/>
+          <p:nvPr/>
+        </p:nvSpPr>
+        <p:spPr>
+          <a:xfrm>
+            <a:off x="8453399" y="1755648"/>
+            <a:ext cx="310896" cy="310896"/>
+          </a:xfrm>
+          <a:prstGeom prst="rect">
+            <a:avLst/>
+          </a:prstGeom>
+          <a:noFill/>
+          <a:ln/>
+        </p:spPr>
+        <p:txBody>
+          <a:bodyPr wrap="square" lIns="0" tIns="0" rIns="0" bIns="0" rtlCol="0" anchor="ctr"/>
+          <a:lstStyle/>
+          <a:p>
+            <a:pPr algn="ctr" indent="0" marL="0">
+              <a:buNone/>
+            </a:pPr>
+            <a:r>
+              <a:rPr lang="en-US" sz="1200" b="1" dirty="0">
+                <a:solidFill>
+                  <a:srgbClr val="10394A"/>
+                </a:solidFill>
+                <a:latin typeface="Calibri" pitchFamily="34" charset="0"/>
+                <a:ea typeface="Calibri" pitchFamily="34" charset="-122"/>
+                <a:cs typeface="Calibri" pitchFamily="34" charset="-120"/>
+              </a:rPr>
+              <a:t>1</a:t>
+            </a:r>
+            <a:endParaRPr lang="en-US" sz="1200" dirty="0"/>
+          </a:p>
+        </p:txBody>
+      </p:sp>
+      <p:sp>
+        <p:nvSpPr>
+          <p:cNvPr id="18" name="Shape 16"/>
+          <p:cNvSpPr/>
+          <p:nvPr/>
+        </p:nvSpPr>
+        <p:spPr>
+          <a:xfrm>
+            <a:off x="8864879" y="2496312"/>
+            <a:ext cx="164592" cy="0"/>
+          </a:xfrm>
+          <a:prstGeom prst="line">
+            <a:avLst/>
+          </a:prstGeom>
+          <a:noFill/>
+          <a:ln w="12700">
+            <a:solidFill>
+              <a:srgbClr val="5F6B72"/>
+            </a:solidFill>
+            <a:prstDash val="solid"/>
+            <a:tailEnd type="triangle"/>
+          </a:ln>
+        </p:spPr>
+      </p:sp>
+      <p:sp>
+        <p:nvSpPr>
+          <p:cNvPr id="19" name="Shape 17"/>
+          <p:cNvSpPr/>
+          <p:nvPr/>
+        </p:nvSpPr>
+        <p:spPr>
+          <a:xfrm>
+            <a:off x="9056903" y="1901952"/>
+            <a:ext cx="2631872" cy="1188720"/>
+          </a:xfrm>
+          <a:prstGeom prst="roundRect">
+            <a:avLst>
+              <a:gd name="adj" fmla="val 3846"/>
+            </a:avLst>
+          </a:prstGeom>
+          <a:solidFill>
+            <a:srgbClr val="FFFFFF"/>
+          </a:solidFill>
+          <a:ln w="19050">
+            <a:solidFill>
+              <a:srgbClr val="C8861E"/>
+            </a:solidFill>
+            <a:prstDash val="solid"/>
+          </a:ln>
+        </p:spPr>
+      </p:sp>
+      <p:sp>
+        <p:nvSpPr>
+          <p:cNvPr id="20" name="Text 18"/>
+          <p:cNvSpPr txBox="1"/>
+          <p:nvPr/>
+        </p:nvSpPr>
+        <p:spPr>
+          <a:xfrm>
+            <a:off x="9221495" y="2029968"/>
+            <a:ext cx="2302688" cy="292608"/>
+          </a:xfrm>
+          <a:prstGeom prst="rect">
+            <a:avLst/>
+          </a:prstGeom>
+          <a:noFill/>
+          <a:ln/>
+        </p:spPr>
+        <p:txBody>
+          <a:bodyPr wrap="square" lIns="0" tIns="0" rIns="0" bIns="0" rtlCol="0" anchor="ctr"/>
+          <a:lstStyle/>
+          <a:p>
+            <a:pPr indent="0" marL="0">
+              <a:buNone/>
+            </a:pPr>
+            <a:r>
+              <a:rPr lang="en-US" sz="1300" b="1" dirty="0">
+                <a:solidFill>
+                  <a:srgbClr val="10394A"/>
+                </a:solidFill>
+                <a:latin typeface="Calibri" pitchFamily="34" charset="0"/>
+                <a:ea typeface="Calibri" pitchFamily="34" charset="-122"/>
+                <a:cs typeface="Calibri" pitchFamily="34" charset="-120"/>
+              </a:rPr>
+              <a:t>4 · ¿Producir H₂?</a:t>
+            </a:r>
+            <a:endParaRPr lang="en-US" sz="1300" dirty="0"/>
+          </a:p>
+        </p:txBody>
+      </p:sp>
+      <p:sp>
+        <p:nvSpPr>
+          <p:cNvPr id="21" name="Text 19"/>
+          <p:cNvSpPr txBox="1"/>
+          <p:nvPr/>
+        </p:nvSpPr>
+        <p:spPr>
+          <a:xfrm>
+            <a:off x="9221495" y="2359152"/>
+            <a:ext cx="2302688" cy="621792"/>
+          </a:xfrm>
+          <a:prstGeom prst="rect">
+            <a:avLst/>
+          </a:prstGeom>
+          <a:noFill/>
+          <a:ln/>
+        </p:spPr>
+        <p:txBody>
+          <a:bodyPr wrap="square" lIns="0" tIns="0" rIns="0" bIns="0" rtlCol="0" anchor="t"/>
+          <a:lstStyle/>
+          <a:p>
+            <a:pPr indent="0" marL="0">
+              <a:lnSpc>
+                <a:spcPct val="112000"/>
+              </a:lnSpc>
+              <a:buNone/>
+            </a:pPr>
+            <a:r>
+              <a:rPr lang="en-US" sz="1100" dirty="0">
+                <a:solidFill>
+                  <a:srgbClr val="5F6B72"/>
+                </a:solidFill>
+                <a:latin typeface="Calibri" pitchFamily="34" charset="0"/>
+                <a:ea typeface="Calibri" pitchFamily="34" charset="-122"/>
+                <a:cs typeface="Calibri" pitchFamily="34" charset="-120"/>
+              </a:rPr>
+              <a:t>Comparar el coste de producirlo con su precio de reposición</a:t>
+            </a:r>
+            <a:endParaRPr lang="en-US" sz="1100" dirty="0"/>
+          </a:p>
+        </p:txBody>
+      </p:sp>
+      <p:sp>
+        <p:nvSpPr>
+          <p:cNvPr id="22" name="Shape 20"/>
+          <p:cNvSpPr/>
+          <p:nvPr/>
+        </p:nvSpPr>
+        <p:spPr>
+          <a:xfrm>
+            <a:off x="11304727" y="1755648"/>
+            <a:ext cx="310896" cy="310896"/>
+          </a:xfrm>
+          <a:prstGeom prst="ellipse">
+            <a:avLst/>
+          </a:prstGeom>
+          <a:solidFill>
+            <a:srgbClr val="C8861E"/>
+          </a:solidFill>
+          <a:ln/>
+        </p:spPr>
+      </p:sp>
+      <p:sp>
+        <p:nvSpPr>
+          <p:cNvPr id="23" name="Text 21"/>
+          <p:cNvSpPr txBox="1"/>
+          <p:nvPr/>
+        </p:nvSpPr>
+        <p:spPr>
+          <a:xfrm>
+            <a:off x="11304727" y="1755648"/>
+            <a:ext cx="310896" cy="310896"/>
+          </a:xfrm>
+          <a:prstGeom prst="rect">
+            <a:avLst/>
+          </a:prstGeom>
+          <a:noFill/>
+          <a:ln/>
+        </p:spPr>
+        <p:txBody>
+          <a:bodyPr wrap="square" lIns="0" tIns="0" rIns="0" bIns="0" rtlCol="0" anchor="ctr"/>
+          <a:lstStyle/>
+          <a:p>
+            <a:pPr algn="ctr" indent="0" marL="0">
+              <a:buNone/>
+            </a:pPr>
+            <a:r>
+              <a:rPr lang="en-US" sz="1200" b="1" dirty="0">
+                <a:solidFill>
+                  <a:srgbClr val="10394A"/>
+                </a:solidFill>
+                <a:latin typeface="Calibri" pitchFamily="34" charset="0"/>
+                <a:ea typeface="Calibri" pitchFamily="34" charset="-122"/>
+                <a:cs typeface="Calibri" pitchFamily="34" charset="-120"/>
+              </a:rPr>
+              <a:t>2</a:t>
+            </a:r>
+            <a:endParaRPr lang="en-US" sz="1200" dirty="0"/>
+          </a:p>
+        </p:txBody>
+      </p:sp>
+      <p:sp>
+        <p:nvSpPr>
+          <p:cNvPr id="24" name="Shape 22"/>
+          <p:cNvSpPr/>
+          <p:nvPr/>
+        </p:nvSpPr>
+        <p:spPr>
+          <a:xfrm>
+            <a:off x="502920" y="3474720"/>
+            <a:ext cx="5364328" cy="1755648"/>
+          </a:xfrm>
+          <a:prstGeom prst="roundRect">
+            <a:avLst>
+              <a:gd name="adj" fmla="val 2604"/>
+            </a:avLst>
+          </a:prstGeom>
+          <a:solidFill>
+            <a:srgbClr val="FFFFFF"/>
+          </a:solidFill>
+          <a:ln w="12700">
+            <a:solidFill>
+              <a:srgbClr val="DDE3E6"/>
+            </a:solidFill>
+            <a:prstDash val="solid"/>
+          </a:ln>
+        </p:spPr>
+      </p:sp>
+      <p:sp>
+        <p:nvSpPr>
+          <p:cNvPr id="25" name="Shape 23"/>
+          <p:cNvSpPr/>
+          <p:nvPr/>
+        </p:nvSpPr>
+        <p:spPr>
+          <a:xfrm>
+            <a:off x="758952" y="3712464"/>
+            <a:ext cx="347472" cy="347472"/>
+          </a:xfrm>
+          <a:prstGeom prst="ellipse">
+            <a:avLst/>
+          </a:prstGeom>
+          <a:solidFill>
+            <a:srgbClr val="C8861E"/>
+          </a:solidFill>
+          <a:ln/>
+        </p:spPr>
+      </p:sp>
+      <p:sp>
+        <p:nvSpPr>
+          <p:cNvPr id="26" name="Text 24"/>
+          <p:cNvSpPr txBox="1"/>
+          <p:nvPr/>
+        </p:nvSpPr>
+        <p:spPr>
+          <a:xfrm>
+            <a:off x="758952" y="3712464"/>
+            <a:ext cx="347472" cy="347472"/>
+          </a:xfrm>
+          <a:prstGeom prst="rect">
+            <a:avLst/>
+          </a:prstGeom>
+          <a:noFill/>
+          <a:ln/>
+        </p:spPr>
+        <p:txBody>
+          <a:bodyPr wrap="square" lIns="0" tIns="0" rIns="0" bIns="0" rtlCol="0" anchor="ctr"/>
+          <a:lstStyle/>
+          <a:p>
+            <a:pPr algn="ctr" indent="0" marL="0">
+              <a:buNone/>
+            </a:pPr>
+            <a:r>
+              <a:rPr lang="en-US" sz="1300" b="1" dirty="0">
+                <a:solidFill>
+                  <a:srgbClr val="10394A"/>
+                </a:solidFill>
+                <a:latin typeface="Calibri" pitchFamily="34" charset="0"/>
+                <a:ea typeface="Calibri" pitchFamily="34" charset="-122"/>
+                <a:cs typeface="Calibri" pitchFamily="34" charset="-120"/>
+              </a:rPr>
+              <a:t>1</a:t>
+            </a:r>
+            <a:endParaRPr lang="en-US" sz="1300" dirty="0"/>
+          </a:p>
+        </p:txBody>
+      </p:sp>
+      <p:sp>
+        <p:nvSpPr>
+          <p:cNvPr id="27" name="Text 25"/>
+          <p:cNvSpPr txBox="1"/>
+          <p:nvPr/>
+        </p:nvSpPr>
+        <p:spPr>
+          <a:xfrm>
+            <a:off x="1216152" y="3675888"/>
+            <a:ext cx="4395064" cy="292608"/>
+          </a:xfrm>
+          <a:prstGeom prst="rect">
+            <a:avLst/>
+          </a:prstGeom>
+          <a:noFill/>
+          <a:ln/>
+        </p:spPr>
+        <p:txBody>
+          <a:bodyPr wrap="square" lIns="0" tIns="0" rIns="0" bIns="0" rtlCol="0" anchor="ctr"/>
+          <a:lstStyle/>
+          <a:p>
+            <a:pPr indent="0" marL="0">
+              <a:buNone/>
+            </a:pPr>
+            <a:r>
+              <a:rPr lang="en-US" sz="1550" b="1" dirty="0">
+                <a:solidFill>
+                  <a:srgbClr val="10394A"/>
                 </a:solidFill>
                 <a:latin typeface="Cambria" pitchFamily="34" charset="0"/>
                 <a:ea typeface="Cambria" pitchFamily="34" charset="-122"/>
                 <a:cs typeface="Cambria" pitchFamily="34" charset="-120"/>
               </a:rPr>
-              <a:t>1</a:t>
-            </a:r>
-            <a:endParaRPr lang="en-US" sz="1700" dirty="0"/>
-          </a:p>
-        </p:txBody>
-      </p:sp>
-      <p:sp>
-        <p:nvSpPr>
-          <p:cNvPr id="7" name="Text 4"/>
-          <p:cNvSpPr txBox="1"/>
-          <p:nvPr/>
-        </p:nvSpPr>
-        <p:spPr>
-          <a:xfrm>
-            <a:off x="7863840" y="1993392"/>
-            <a:ext cx="3840480" cy="320040"/>
-          </a:xfrm>
-          <a:prstGeom prst="rect">
-            <a:avLst/>
-          </a:prstGeom>
-          <a:noFill/>
-          <a:ln/>
-        </p:spPr>
-        <p:txBody>
-          <a:bodyPr wrap="square" lIns="0" tIns="0" rIns="0" bIns="0" rtlCol="0" anchor="ctr"/>
-          <a:lstStyle/>
-          <a:p>
-            <a:pPr indent="0" marL="0">
-              <a:buNone/>
-            </a:pPr>
-            <a:r>
-              <a:rPr lang="en-US" sz="1400" b="1" dirty="0">
+              <a:t>La batería alimenta al electrolizador</a:t>
+            </a:r>
+            <a:endParaRPr lang="en-US" sz="1550" dirty="0"/>
+          </a:p>
+        </p:txBody>
+      </p:sp>
+      <p:sp>
+        <p:nvSpPr>
+          <p:cNvPr id="28" name="Text 26"/>
+          <p:cNvSpPr txBox="1"/>
+          <p:nvPr/>
+        </p:nvSpPr>
+        <p:spPr>
+          <a:xfrm>
+            <a:off x="1216152" y="3986784"/>
+            <a:ext cx="4395064" cy="237744"/>
+          </a:xfrm>
+          <a:prstGeom prst="rect">
+            <a:avLst/>
+          </a:prstGeom>
+          <a:noFill/>
+          <a:ln/>
+        </p:spPr>
+        <p:txBody>
+          <a:bodyPr wrap="square" lIns="0" tIns="0" rIns="0" bIns="0" rtlCol="0" anchor="ctr"/>
+          <a:lstStyle/>
+          <a:p>
+            <a:pPr indent="0" marL="0">
+              <a:buNone/>
+            </a:pPr>
+            <a:r>
+              <a:rPr lang="en-US" sz="1000" b="1" spc="80" kern="0" dirty="0">
+                <a:solidFill>
+                  <a:srgbClr val="C8861E"/>
+                </a:solidFill>
+                <a:latin typeface="Calibri" pitchFamily="34" charset="0"/>
+                <a:ea typeface="Calibri" pitchFamily="34" charset="-122"/>
+                <a:cs typeface="Calibri" pitchFamily="34" charset="-120"/>
+              </a:rPr>
+              <a:t>sustituye al paso 3</a:t>
+            </a:r>
+            <a:endParaRPr lang="en-US" sz="1000" dirty="0"/>
+          </a:p>
+        </p:txBody>
+      </p:sp>
+      <p:sp>
+        <p:nvSpPr>
+          <p:cNvPr id="29" name="Text 27"/>
+          <p:cNvSpPr txBox="1"/>
+          <p:nvPr/>
+        </p:nvSpPr>
+        <p:spPr>
+          <a:xfrm>
+            <a:off x="795528" y="4315968"/>
+            <a:ext cx="4779112" cy="841248"/>
+          </a:xfrm>
+          <a:prstGeom prst="rect">
+            <a:avLst/>
+          </a:prstGeom>
+          <a:noFill/>
+          <a:ln/>
+        </p:spPr>
+        <p:txBody>
+          <a:bodyPr wrap="square" lIns="0" tIns="0" rIns="0" bIns="0" rtlCol="0" anchor="t"/>
+          <a:lstStyle/>
+          <a:p>
+            <a:pPr indent="0" marL="0">
+              <a:lnSpc>
+                <a:spcPct val="114000"/>
+              </a:lnSpc>
+              <a:buNone/>
+            </a:pPr>
+            <a:r>
+              <a:rPr lang="en-US" sz="1200" dirty="0">
+                <a:solidFill>
+                  <a:srgbClr val="1C1C1C"/>
+                </a:solidFill>
+                <a:latin typeface="Calibri" pitchFamily="34" charset="0"/>
+                <a:ea typeface="Calibri" pitchFamily="34" charset="-122"/>
+                <a:cs typeface="Calibri" pitchFamily="34" charset="-120"/>
+              </a:rPr>
+              <a:t>La carga que crea la decisión de producir hidrógeno se ofrece a la batería antes que a la red, mientras el estado de carga esté por encima del 60 %. Diez líneas, y sin usar ninguna previsión.</a:t>
+            </a:r>
+            <a:endParaRPr lang="en-US" sz="1200" dirty="0"/>
+          </a:p>
+        </p:txBody>
+      </p:sp>
+      <p:sp>
+        <p:nvSpPr>
+          <p:cNvPr id="30" name="Shape 28"/>
+          <p:cNvSpPr/>
+          <p:nvPr/>
+        </p:nvSpPr>
+        <p:spPr>
+          <a:xfrm>
+            <a:off x="6324448" y="3474720"/>
+            <a:ext cx="5364328" cy="1755648"/>
+          </a:xfrm>
+          <a:prstGeom prst="roundRect">
+            <a:avLst>
+              <a:gd name="adj" fmla="val 2604"/>
+            </a:avLst>
+          </a:prstGeom>
+          <a:solidFill>
+            <a:srgbClr val="FFFFFF"/>
+          </a:solidFill>
+          <a:ln w="12700">
+            <a:solidFill>
+              <a:srgbClr val="DDE3E6"/>
+            </a:solidFill>
+            <a:prstDash val="solid"/>
+          </a:ln>
+        </p:spPr>
+      </p:sp>
+      <p:sp>
+        <p:nvSpPr>
+          <p:cNvPr id="31" name="Shape 29"/>
+          <p:cNvSpPr/>
+          <p:nvPr/>
+        </p:nvSpPr>
+        <p:spPr>
+          <a:xfrm>
+            <a:off x="6580480" y="3712464"/>
+            <a:ext cx="347472" cy="347472"/>
+          </a:xfrm>
+          <a:prstGeom prst="ellipse">
+            <a:avLst/>
+          </a:prstGeom>
+          <a:solidFill>
+            <a:srgbClr val="C8861E"/>
+          </a:solidFill>
+          <a:ln/>
+        </p:spPr>
+      </p:sp>
+      <p:sp>
+        <p:nvSpPr>
+          <p:cNvPr id="32" name="Text 30"/>
+          <p:cNvSpPr txBox="1"/>
+          <p:nvPr/>
+        </p:nvSpPr>
+        <p:spPr>
+          <a:xfrm>
+            <a:off x="6580480" y="3712464"/>
+            <a:ext cx="347472" cy="347472"/>
+          </a:xfrm>
+          <a:prstGeom prst="rect">
+            <a:avLst/>
+          </a:prstGeom>
+          <a:noFill/>
+          <a:ln/>
+        </p:spPr>
+        <p:txBody>
+          <a:bodyPr wrap="square" lIns="0" tIns="0" rIns="0" bIns="0" rtlCol="0" anchor="ctr"/>
+          <a:lstStyle/>
+          <a:p>
+            <a:pPr algn="ctr" indent="0" marL="0">
+              <a:buNone/>
+            </a:pPr>
+            <a:r>
+              <a:rPr lang="en-US" sz="1300" b="1" dirty="0">
                 <a:solidFill>
                   <a:srgbClr val="10394A"/>
                 </a:solidFill>
@@ -6813,142 +7702,100 @@
                 <a:ea typeface="Calibri" pitchFamily="34" charset="-122"/>
                 <a:cs typeface="Calibri" pitchFamily="34" charset="-120"/>
               </a:rPr>
-              <a:t>La batería alimenta al electrolizador</a:t>
-            </a:r>
-            <a:endParaRPr lang="en-US" sz="1400" dirty="0"/>
-          </a:p>
-        </p:txBody>
-      </p:sp>
-      <p:sp>
-        <p:nvSpPr>
-          <p:cNvPr id="8" name="Text 5"/>
-          <p:cNvSpPr txBox="1"/>
-          <p:nvPr/>
-        </p:nvSpPr>
-        <p:spPr>
-          <a:xfrm>
-            <a:off x="7863840" y="2340864"/>
-            <a:ext cx="3840480" cy="1161288"/>
-          </a:xfrm>
-          <a:prstGeom prst="rect">
-            <a:avLst/>
-          </a:prstGeom>
-          <a:noFill/>
-          <a:ln/>
-        </p:spPr>
-        <p:txBody>
-          <a:bodyPr wrap="square" lIns="0" tIns="0" rIns="0" bIns="0" rtlCol="0" anchor="t"/>
-          <a:lstStyle/>
-          <a:p>
-            <a:pPr indent="0" marL="0">
-              <a:lnSpc>
-                <a:spcPct val="112000"/>
-              </a:lnSpc>
-              <a:buNone/>
-            </a:pPr>
-            <a:r>
-              <a:rPr lang="en-US" sz="1150" dirty="0">
-                <a:solidFill>
-                  <a:srgbClr val="5F6B72"/>
-                </a:solidFill>
-                <a:latin typeface="Calibri" pitchFamily="34" charset="0"/>
-                <a:ea typeface="Calibri" pitchFamily="34" charset="-122"/>
-                <a:cs typeface="Calibri" pitchFamily="34" charset="-120"/>
-              </a:rPr>
-              <a:t>Diez líneas: la carga que crea la decisión de producir H₂ se ofrece a la batería antes que a la red, con el SOC por encima del 60 %</a:t>
-            </a:r>
-            <a:endParaRPr lang="en-US" sz="1150" dirty="0"/>
-          </a:p>
-        </p:txBody>
-      </p:sp>
-      <p:sp>
-        <p:nvSpPr>
-          <p:cNvPr id="9" name="Text 6"/>
-          <p:cNvSpPr txBox="1"/>
-          <p:nvPr/>
-        </p:nvSpPr>
-        <p:spPr>
-          <a:xfrm>
-            <a:off x="7498080" y="3593592"/>
-            <a:ext cx="320040" cy="320040"/>
-          </a:xfrm>
-          <a:prstGeom prst="rect">
-            <a:avLst/>
-          </a:prstGeom>
-          <a:noFill/>
-          <a:ln/>
-        </p:spPr>
-        <p:txBody>
-          <a:bodyPr wrap="square" lIns="0" tIns="0" rIns="0" bIns="0" rtlCol="0" anchor="ctr"/>
-          <a:lstStyle/>
-          <a:p>
-            <a:pPr indent="0" marL="0">
-              <a:buNone/>
-            </a:pPr>
-            <a:r>
-              <a:rPr lang="en-US" sz="1700" b="1" dirty="0">
-                <a:solidFill>
-                  <a:srgbClr val="C8861E"/>
+              <a:t>2</a:t>
+            </a:r>
+            <a:endParaRPr lang="en-US" sz="1300" dirty="0"/>
+          </a:p>
+        </p:txBody>
+      </p:sp>
+      <p:sp>
+        <p:nvSpPr>
+          <p:cNvPr id="33" name="Text 31"/>
+          <p:cNvSpPr txBox="1"/>
+          <p:nvPr/>
+        </p:nvSpPr>
+        <p:spPr>
+          <a:xfrm>
+            <a:off x="7037680" y="3675888"/>
+            <a:ext cx="4395064" cy="292608"/>
+          </a:xfrm>
+          <a:prstGeom prst="rect">
+            <a:avLst/>
+          </a:prstGeom>
+          <a:noFill/>
+          <a:ln/>
+        </p:spPr>
+        <p:txBody>
+          <a:bodyPr wrap="square" lIns="0" tIns="0" rIns="0" bIns="0" rtlCol="0" anchor="ctr"/>
+          <a:lstStyle/>
+          <a:p>
+            <a:pPr indent="0" marL="0">
+              <a:buNone/>
+            </a:pPr>
+            <a:r>
+              <a:rPr lang="en-US" sz="1550" b="1" dirty="0">
+                <a:solidFill>
+                  <a:srgbClr val="10394A"/>
                 </a:solidFill>
                 <a:latin typeface="Cambria" pitchFamily="34" charset="0"/>
                 <a:ea typeface="Cambria" pitchFamily="34" charset="-122"/>
                 <a:cs typeface="Cambria" pitchFamily="34" charset="-120"/>
               </a:rPr>
-              <a:t>2</a:t>
-            </a:r>
-            <a:endParaRPr lang="en-US" sz="1700" dirty="0"/>
-          </a:p>
-        </p:txBody>
-      </p:sp>
-      <p:sp>
-        <p:nvSpPr>
-          <p:cNvPr id="10" name="Text 7"/>
-          <p:cNvSpPr txBox="1"/>
-          <p:nvPr/>
-        </p:nvSpPr>
-        <p:spPr>
-          <a:xfrm>
-            <a:off x="7863840" y="3593592"/>
-            <a:ext cx="3840480" cy="320040"/>
-          </a:xfrm>
-          <a:prstGeom prst="rect">
-            <a:avLst/>
-          </a:prstGeom>
-          <a:noFill/>
-          <a:ln/>
-        </p:spPr>
-        <p:txBody>
-          <a:bodyPr wrap="square" lIns="0" tIns="0" rIns="0" bIns="0" rtlCol="0" anchor="ctr"/>
-          <a:lstStyle/>
-          <a:p>
-            <a:pPr indent="0" marL="0">
-              <a:buNone/>
-            </a:pPr>
-            <a:r>
-              <a:rPr lang="en-US" sz="1400" b="1" dirty="0">
-                <a:solidFill>
-                  <a:srgbClr val="10394A"/>
-                </a:solidFill>
-                <a:latin typeface="Calibri" pitchFamily="34" charset="0"/>
-                <a:ea typeface="Calibri" pitchFamily="34" charset="-122"/>
-                <a:cs typeface="Calibri" pitchFamily="34" charset="-120"/>
-              </a:rPr>
               <a:t>Planificador de orden de mérito a 24 h</a:t>
             </a:r>
-            <a:endParaRPr lang="en-US" sz="1400" dirty="0"/>
-          </a:p>
-        </p:txBody>
-      </p:sp>
-      <p:sp>
-        <p:nvSpPr>
-          <p:cNvPr id="11" name="Text 8"/>
-          <p:cNvSpPr txBox="1"/>
-          <p:nvPr/>
-        </p:nvSpPr>
-        <p:spPr>
-          <a:xfrm>
-            <a:off x="7863840" y="3941064"/>
-            <a:ext cx="3840480" cy="1161288"/>
+            <a:endParaRPr lang="en-US" sz="1550" dirty="0"/>
+          </a:p>
+        </p:txBody>
+      </p:sp>
+      <p:sp>
+        <p:nvSpPr>
+          <p:cNvPr id="34" name="Text 32"/>
+          <p:cNvSpPr txBox="1"/>
+          <p:nvPr/>
+        </p:nvSpPr>
+        <p:spPr>
+          <a:xfrm>
+            <a:off x="7037680" y="3986784"/>
+            <a:ext cx="4395064" cy="237744"/>
+          </a:xfrm>
+          <a:prstGeom prst="rect">
+            <a:avLst/>
+          </a:prstGeom>
+          <a:noFill/>
+          <a:ln/>
+        </p:spPr>
+        <p:txBody>
+          <a:bodyPr wrap="square" lIns="0" tIns="0" rIns="0" bIns="0" rtlCol="0" anchor="ctr"/>
+          <a:lstStyle/>
+          <a:p>
+            <a:pPr indent="0" marL="0">
+              <a:buNone/>
+            </a:pPr>
+            <a:r>
+              <a:rPr lang="en-US" sz="1000" b="1" spc="80" kern="0" dirty="0">
+                <a:solidFill>
+                  <a:srgbClr val="C8861E"/>
+                </a:solidFill>
+                <a:latin typeface="Calibri" pitchFamily="34" charset="0"/>
+                <a:ea typeface="Calibri" pitchFamily="34" charset="-122"/>
+                <a:cs typeface="Calibri" pitchFamily="34" charset="-120"/>
+              </a:rPr>
+              <a:t>sustituye al paso 4</a:t>
+            </a:r>
+            <a:endParaRPr lang="en-US" sz="1000" dirty="0"/>
+          </a:p>
+        </p:txBody>
+      </p:sp>
+      <p:sp>
+        <p:nvSpPr>
+          <p:cNvPr id="35" name="Text 33"/>
+          <p:cNvSpPr txBox="1"/>
+          <p:nvPr/>
+        </p:nvSpPr>
+        <p:spPr>
+          <a:xfrm>
+            <a:off x="6617056" y="4315968"/>
+            <a:ext cx="4779112" cy="841248"/>
           </a:xfrm>
           <a:prstGeom prst="rect">
             <a:avLst/>
@@ -6962,34 +7809,34 @@
           <a:p>
             <a:pPr indent="0" marL="0">
               <a:lnSpc>
-                <a:spcPct val="112000"/>
+                <a:spcPct val="114000"/>
               </a:lnSpc>
               <a:buNone/>
             </a:pPr>
             <a:r>
-              <a:rPr lang="en-US" sz="1150" dirty="0">
-                <a:solidFill>
-                  <a:srgbClr val="5F6B72"/>
-                </a:solidFill>
-                <a:latin typeface="Calibri" pitchFamily="34" charset="0"/>
-                <a:ea typeface="Calibri" pitchFamily="34" charset="-122"/>
-                <a:cs typeface="Calibri" pitchFamily="34" charset="-120"/>
-              </a:rPr>
-              <a:t>Se estima el H₂ que falta y el excedente previsto; se produce si la hora actual está entre las n más baratas del horizonte</a:t>
-            </a:r>
-            <a:endParaRPr lang="en-US" sz="1150" dirty="0"/>
-          </a:p>
-        </p:txBody>
-      </p:sp>
-      <p:sp>
-        <p:nvSpPr>
-          <p:cNvPr id="12" name="Shape 9"/>
+              <a:rPr lang="en-US" sz="1200" dirty="0">
+                <a:solidFill>
+                  <a:srgbClr val="1C1C1C"/>
+                </a:solidFill>
+                <a:latin typeface="Calibri" pitchFamily="34" charset="0"/>
+                <a:ea typeface="Calibri" pitchFamily="34" charset="-122"/>
+                <a:cs typeface="Calibri" pitchFamily="34" charset="-120"/>
+              </a:rPr>
+              <a:t>Estima cuánto hidrógeno falta y cuánto excedente gratis viene; de ahí salen las horas de electrolizador que hay que comprar, y se producen en las más baratas del horizonte.</a:t>
+            </a:r>
+            <a:endParaRPr lang="en-US" sz="1200" dirty="0"/>
+          </a:p>
+        </p:txBody>
+      </p:sp>
+      <p:sp>
+        <p:nvSpPr>
+          <p:cNvPr id="36" name="Shape 34"/>
           <p:cNvSpPr/>
           <p:nvPr/>
         </p:nvSpPr>
         <p:spPr>
           <a:xfrm>
-            <a:off x="502920" y="5623560"/>
+            <a:off x="502920" y="5468112"/>
             <a:ext cx="11185855" cy="566928"/>
           </a:xfrm>
           <a:prstGeom prst="roundRect">
@@ -7005,13 +7852,13 @@
       </p:sp>
       <p:sp>
         <p:nvSpPr>
-          <p:cNvPr id="13" name="Text 10"/>
-          <p:cNvSpPr txBox="1"/>
-          <p:nvPr/>
-        </p:nvSpPr>
-        <p:spPr>
-          <a:xfrm>
-            <a:off x="777240" y="5641848"/>
+          <p:cNvPr id="37" name="Text 35"/>
+          <p:cNvSpPr txBox="1"/>
+          <p:nvPr/>
+        </p:nvSpPr>
+        <p:spPr>
+          <a:xfrm>
+            <a:off x="777240" y="5486400"/>
             <a:ext cx="10637215" cy="530352"/>
           </a:xfrm>
           <a:prstGeom prst="rect">
@@ -7039,7 +7886,7 @@
                 <a:ea typeface="Calibri" pitchFamily="34" charset="-122"/>
                 <a:cs typeface="Calibri" pitchFamily="34" charset="-120"/>
               </a:rPr>
-              <a:t>El planificador solo usa el ORDEN de los precios: es invariante a cualquier transformación monótona de la previsión.</a:t>
+              <a:t>El planificador solo usa el ORDEN de los precios: cualquier previsión que conserve ese orden toma exactamente las mismas decisiones.</a:t>
             </a:r>
             <a:endParaRPr lang="en-US" sz="1350" dirty="0"/>
           </a:p>
@@ -7047,7 +7894,7 @@
       </p:sp>
       <p:sp>
         <p:nvSpPr>
-          <p:cNvPr id="14" name="Text 11"/>
+          <p:cNvPr id="38" name="Text 36"/>
           <p:cNvSpPr txBox="1"/>
           <p:nvPr/>
         </p:nvSpPr>
@@ -16076,7 +16923,7 @@
                 <a:ea typeface="Calibri" pitchFamily="34" charset="-122"/>
                 <a:cs typeface="Calibri" pitchFamily="34" charset="-120"/>
               </a:rPr>
-              <a:t>Adam con descenso de tasa · parada temprana por pérdida de validación</a:t>
+              <a:t>Adam con descenso de tasa de aprendizaje · parada temprana por pérdida de validación</a:t>
             </a:r>
             <a:endParaRPr lang="en-US" sz="1250" dirty="0"/>
           </a:p>
@@ -16297,48 +17144,9 @@
           </a:prstGeom>
         </p:spPr>
       </p:pic>
-      <p:sp>
-        <p:nvSpPr>
-          <p:cNvPr id="5" name="Text 2"/>
-          <p:cNvSpPr txBox="1"/>
-          <p:nvPr/>
-        </p:nvSpPr>
-        <p:spPr>
-          <a:xfrm>
-            <a:off x="502920" y="4050792"/>
-            <a:ext cx="5364328" cy="274320"/>
-          </a:xfrm>
-          <a:prstGeom prst="rect">
-            <a:avLst/>
-          </a:prstGeom>
-          <a:noFill/>
-          <a:ln/>
-        </p:spPr>
-        <p:txBody>
-          <a:bodyPr wrap="square" lIns="0" tIns="0" rIns="0" bIns="0" rtlCol="0" anchor="ctr"/>
-          <a:lstStyle/>
-          <a:p>
-            <a:pPr algn="ctr" indent="0" marL="0">
-              <a:buNone/>
-            </a:pPr>
-            <a:r>
-              <a:rPr lang="en-US" sz="1050" i="1" dirty="0">
-                <a:solidFill>
-                  <a:srgbClr val="5F6B72"/>
-                </a:solidFill>
-                <a:latin typeface="Calibri" pitchFamily="34" charset="0"/>
-                <a:ea typeface="Calibri" pitchFamily="34" charset="-122"/>
-                <a:cs typeface="Calibri" pitchFamily="34" charset="-120"/>
-              </a:rPr>
-              <a:t>Red solar frente al valor real en los cuatro días de campaña</a:t>
-            </a:r>
-            <a:endParaRPr lang="en-US" sz="1050" dirty="0"/>
-          </a:p>
-        </p:txBody>
-      </p:sp>
       <p:pic>
         <p:nvPicPr>
-          <p:cNvPr id="6" name="Image 1" descr="img/lstm_precio_MAEPorHorizon.png">    </p:cNvPr>
+          <p:cNvPr id="5" name="Image 1" descr="img/lstm_precio_MAEPorHorizon.png">    </p:cNvPr>
           <p:cNvPicPr>
             <a:picLocks noChangeAspect="1"/>
           </p:cNvPicPr>
@@ -16362,13 +17170,52 @@
       </p:pic>
       <p:sp>
         <p:nvSpPr>
+          <p:cNvPr id="6" name="Text 2"/>
+          <p:cNvSpPr txBox="1"/>
+          <p:nvPr/>
+        </p:nvSpPr>
+        <p:spPr>
+          <a:xfrm>
+            <a:off x="502920" y="4096512"/>
+            <a:ext cx="5364328" cy="274320"/>
+          </a:xfrm>
+          <a:prstGeom prst="rect">
+            <a:avLst/>
+          </a:prstGeom>
+          <a:noFill/>
+          <a:ln/>
+        </p:spPr>
+        <p:txBody>
+          <a:bodyPr wrap="square" lIns="0" tIns="0" rIns="0" bIns="0" rtlCol="0" anchor="ctr"/>
+          <a:lstStyle/>
+          <a:p>
+            <a:pPr algn="ctr" indent="0" marL="0">
+              <a:buNone/>
+            </a:pPr>
+            <a:r>
+              <a:rPr lang="en-US" sz="1050" i="1" dirty="0">
+                <a:solidFill>
+                  <a:srgbClr val="5F6B72"/>
+                </a:solidFill>
+                <a:latin typeface="Calibri" pitchFamily="34" charset="0"/>
+                <a:ea typeface="Calibri" pitchFamily="34" charset="-122"/>
+                <a:cs typeface="Calibri" pitchFamily="34" charset="-120"/>
+              </a:rPr>
+              <a:t>Red solar frente al valor real en los cuatro días de campaña</a:t>
+            </a:r>
+            <a:endParaRPr lang="en-US" sz="1050" dirty="0"/>
+          </a:p>
+        </p:txBody>
+      </p:sp>
+      <p:sp>
+        <p:nvSpPr>
           <p:cNvPr id="7" name="Text 3"/>
           <p:cNvSpPr txBox="1"/>
           <p:nvPr/>
         </p:nvSpPr>
         <p:spPr>
           <a:xfrm>
-            <a:off x="6324448" y="4050792"/>
+            <a:off x="6324448" y="4096512"/>
             <a:ext cx="5364328" cy="274320"/>
           </a:xfrm>
           <a:prstGeom prst="rect">
@@ -16407,8 +17254,8 @@
         </p:nvSpPr>
         <p:spPr>
           <a:xfrm>
-            <a:off x="502920" y="4526280"/>
-            <a:ext cx="3515258" cy="566928"/>
+            <a:off x="502920" y="4553712"/>
+            <a:ext cx="5364328" cy="566928"/>
           </a:xfrm>
           <a:prstGeom prst="rect">
             <a:avLst/>
@@ -16446,8 +17293,8 @@
         </p:nvSpPr>
         <p:spPr>
           <a:xfrm>
-            <a:off x="502920" y="5074920"/>
-            <a:ext cx="3515258" cy="713232"/>
+            <a:off x="502920" y="5102352"/>
+            <a:ext cx="5364328" cy="713232"/>
           </a:xfrm>
           <a:prstGeom prst="rect">
             <a:avLst/>
@@ -16488,8 +17335,8 @@
         </p:nvSpPr>
         <p:spPr>
           <a:xfrm>
-            <a:off x="4338218" y="4526280"/>
-            <a:ext cx="3515258" cy="566928"/>
+            <a:off x="6324448" y="4553712"/>
+            <a:ext cx="5364328" cy="566928"/>
           </a:xfrm>
           <a:prstGeom prst="rect">
             <a:avLst/>
@@ -16527,8 +17374,8 @@
         </p:nvSpPr>
         <p:spPr>
           <a:xfrm>
-            <a:off x="4338218" y="5074920"/>
-            <a:ext cx="3515258" cy="713232"/>
+            <a:off x="6324448" y="5102352"/>
+            <a:ext cx="5364328" cy="713232"/>
           </a:xfrm>
           <a:prstGeom prst="rect">
             <a:avLst/>
@@ -16563,42 +17410,25 @@
       </p:sp>
       <p:sp>
         <p:nvSpPr>
-          <p:cNvPr id="12" name="Text 8"/>
-          <p:cNvSpPr txBox="1"/>
-          <p:nvPr/>
-        </p:nvSpPr>
-        <p:spPr>
-          <a:xfrm>
-            <a:off x="8173517" y="4526280"/>
-            <a:ext cx="3515258" cy="566928"/>
-          </a:xfrm>
-          <a:prstGeom prst="rect">
-            <a:avLst/>
-          </a:prstGeom>
-          <a:noFill/>
-          <a:ln/>
-        </p:spPr>
-        <p:txBody>
-          <a:bodyPr wrap="square" lIns="0" tIns="0" rIns="0" bIns="0" rtlCol="0" anchor="ctr"/>
-          <a:lstStyle/>
-          <a:p>
-            <a:pPr indent="0" marL="0">
-              <a:buNone/>
-            </a:pPr>
-            <a:r>
-              <a:rPr lang="en-US" sz="3000" b="1" dirty="0">
-                <a:solidFill>
-                  <a:srgbClr val="C8861E"/>
-                </a:solidFill>
-                <a:latin typeface="Cambria" pitchFamily="34" charset="0"/>
-                <a:ea typeface="Cambria" pitchFamily="34" charset="-122"/>
-                <a:cs typeface="Cambria" pitchFamily="34" charset="-120"/>
-              </a:rPr>
-              <a:t>+ 27,7 %</a:t>
-            </a:r>
-            <a:endParaRPr lang="en-US" sz="3000" dirty="0"/>
-          </a:p>
-        </p:txBody>
+          <p:cNvPr id="12" name="Shape 8"/>
+          <p:cNvSpPr/>
+          <p:nvPr/>
+        </p:nvSpPr>
+        <p:spPr>
+          <a:xfrm>
+            <a:off x="502920" y="5623560"/>
+            <a:ext cx="11185855" cy="566928"/>
+          </a:xfrm>
+          <a:prstGeom prst="roundRect">
+            <a:avLst>
+              <a:gd name="adj" fmla="val 9677"/>
+            </a:avLst>
+          </a:prstGeom>
+          <a:solidFill>
+            <a:srgbClr val="10394A"/>
+          </a:solidFill>
+          <a:ln/>
+        </p:spPr>
       </p:sp>
       <p:sp>
         <p:nvSpPr>
@@ -16608,37 +17438,37 @@
         </p:nvSpPr>
         <p:spPr>
           <a:xfrm>
-            <a:off x="8173517" y="5074920"/>
-            <a:ext cx="3515258" cy="713232"/>
-          </a:xfrm>
-          <a:prstGeom prst="rect">
-            <a:avLst/>
-          </a:prstGeom>
-          <a:noFill/>
-          <a:ln/>
-        </p:spPr>
-        <p:txBody>
-          <a:bodyPr wrap="square" lIns="0" tIns="0" rIns="0" bIns="0" rtlCol="0" anchor="t"/>
+            <a:off x="777240" y="5641848"/>
+            <a:ext cx="10637215" cy="530352"/>
+          </a:xfrm>
+          <a:prstGeom prst="rect">
+            <a:avLst/>
+          </a:prstGeom>
+          <a:noFill/>
+          <a:ln/>
+        </p:spPr>
+        <p:txBody>
+          <a:bodyPr wrap="square" lIns="0" tIns="0" rIns="0" bIns="0" rtlCol="0" anchor="ctr"/>
           <a:lstStyle/>
           <a:p>
             <a:pPr indent="0" marL="0">
               <a:lnSpc>
-                <a:spcPct val="110000"/>
+                <a:spcPct val="112000"/>
               </a:lnSpc>
               <a:buNone/>
             </a:pPr>
             <a:r>
-              <a:rPr lang="en-US" sz="1200" dirty="0">
-                <a:solidFill>
-                  <a:srgbClr val="5F6B72"/>
-                </a:solidFill>
-                <a:latin typeface="Calibri" pitchFamily="34" charset="0"/>
-                <a:ea typeface="Calibri" pitchFamily="34" charset="-122"/>
-                <a:cs typeface="Calibri" pitchFamily="34" charset="-120"/>
-              </a:rPr>
-              <a:t>de MAE adicional que costaba una realimentación del buffer en lazo cerrado, detectada y corregida: todas las cifras que siguen son posteriores</a:t>
-            </a:r>
-            <a:endParaRPr lang="en-US" sz="1200" dirty="0"/>
+              <a:rPr lang="en-US" sz="1350" dirty="0">
+                <a:solidFill>
+                  <a:srgbClr val="FFFFFF"/>
+                </a:solidFill>
+                <a:latin typeface="Calibri" pitchFamily="34" charset="0"/>
+                <a:ea typeface="Calibri" pitchFamily="34" charset="-122"/>
+                <a:cs typeface="Calibri" pitchFamily="34" charset="-120"/>
+              </a:rPr>
+              <a:t>Las líneas base no son rivales fáciles: en estas dos series el día de hoy se parece muchísimo al de ayer. La red solo puede ganarles donde algo cambia.</a:t>
+            </a:r>
+            <a:endParaRPr lang="en-US" sz="1350" dirty="0"/>
           </a:p>
         </p:txBody>
       </p:sp>
@@ -16928,7 +17758,7 @@
                 <a:ea typeface="Calibri" pitchFamily="34" charset="-122"/>
                 <a:cs typeface="Calibri" pitchFamily="34" charset="-120"/>
               </a:rPr>
-              <a:t>La predicción se acota a la curva de cielo claro (k_max = 1,00): el MAE diurno baja de 59,4 a 56,0 Wh/m²</a:t>
+              <a:t>La predicción se acota a la curva de cielo claro: el error medio diurno baja de 59,4 a 56,0 Wh/m²</a:t>
             </a:r>
             <a:endParaRPr lang="en-US" sz="1300" dirty="0"/>
           </a:p>
@@ -17309,7 +18139,7 @@
                 <a:ea typeface="Calibri" pitchFamily="34" charset="-122"/>
                 <a:cs typeface="Calibri" pitchFamily="34" charset="-120"/>
               </a:rPr>
-              <a:t>skill solar</a:t>
+              <a:t>mejor que la persistencia de cielo claro</a:t>
             </a:r>
             <a:endParaRPr lang="en-US" sz="1250" dirty="0"/>
           </a:p>
@@ -17387,7 +18217,7 @@
                 <a:ea typeface="Calibri" pitchFamily="34" charset="-122"/>
                 <a:cs typeface="Calibri" pitchFamily="34" charset="-120"/>
               </a:rPr>
-              <a:t>skill precio</a:t>
+              <a:t>mejor que la persistencia de 24 h</a:t>
             </a:r>
             <a:endParaRPr lang="en-US" sz="1250" dirty="0"/>
           </a:p>

--- a/defensa/OASIS_defensa_TFG.pptx
+++ b/defensa/OASIS_defensa_TFG.pptx
@@ -28,10 +28,9 @@
     <p:sldId id="276" r:id="rId22"/>
     <p:sldId id="277" r:id="rId23"/>
     <p:sldId id="278" r:id="rId24"/>
-    <p:sldId id="279" r:id="rId25"/>
   </p:sldIdLst>
   <p:notesMasterIdLst>
-    <p:notesMasterId r:id="rId26"/>
+    <p:notesMasterId r:id="rId25"/>
   </p:notesMasterIdLst>
   <p:sldSz cx="12192000" cy="6858000"/>
   <p:notesSz cx="6858000" cy="12192000"/>
@@ -897,10 +896,10 @@
               <a:rPr lang="en-US" dirty="0"/>
               <a:t>La Versión B es la misma heurística con las dos previsiones metidas dentro. No cambia la arquitectura: cambia lo que mira la regla en el momento de decidir.
 La previsión solar entra en el reparto del excedente: antes dependía solo del estado de carga de ese instante; ahora, si la previsión anticipa que el excedente va a caer, el reparto se desplaza hacia la batería antes de que caiga. Y la de precio gobierna un arbitraje de batería.
-B tiene una victoria y un empate. La victoria es el servicio de hidrógeno, en treinta y nueve de cuarenta pares, y lo importante no es el tamaño sino que escala con la calidad de la previsión: con el oráculo se multiplica por diez. El mecanismo está bien planteado; lo que limita es la predicción.
+B tiene una victoria y un empate. La victoria es el servicio de hidrógeno, en treinta y nueve de cuarenta pares, y lo importante no es el tamaño sino que escala con la calidad de la previsión: con el oráculo se multiplica por diez. Lo que limita es la predicción, no el diseño.
 El empate es el coste, y de ahí sale la regla de diseño que aplico después: la primera versión del arbitraje traducía «el precio va a subir» en una acción de tamaño fijo, y empeoraba el coste, más cuanto mejor era la previsión. Una acción disparada por una previsión tiene que estar condicionada, y su tamaño salir del margen económico disponible.
 — — — — —
-NO SE DICE · objetivo 1:26 · Tono de quien informa. B tiene su victoria y la cuentas primero; el empate en coste viene después y sin disculpas.</a:t>
+NO SE DICE · objetivo 1:25 · Tono de quien informa. B tiene su victoria y la cuentas primero; el empate en coste viene después y sin disculpas.</a:t>
             </a:r>
             <a:endParaRPr lang="en-US" dirty="0"/>
           </a:p>
@@ -1081,13 +1080,13 @@
           <a:p>
             <a:r>
               <a:rPr lang="en-US" dirty="0"/>
-              <a:t>La Versión C separa dos decisiones que la heurística tomaba juntas: de dónde sale la energía del electrolizador y cuándo conviene producir. En pantalla, los cuatro pasos de la lógica común, con los dos que sustituyo en ámbar. Cada uno tiene su interruptor.
-El primero son diez líneas: la carga que crea la decisión de producir hidrógeno se le ofrece a la batería antes que a la red, mientras el estado de carga esté por encima del sesenta por ciento. Ese sesenta no es arbitrario, sale del contrafactual del diagnóstico anterior.
+              <a:t>La Versión C separa dos decisiones que la heurística tomaba juntas: de dónde sale la energía del electrolizador y cuándo conviene producir. En pantalla, los cuatro pasos de la lógica común, con los dos que sustituyo en ámbar.
+El primero son diez líneas: la carga que crea la decisión de producir hidrógeno se le ofrece a la batería antes que a la red, mientras el estado de carga esté por encima del sesenta por ciento. Ese sesenta sale del contrafactual del diagnóstico anterior.
 El segundo es un planificador: estima cuánto hidrógeno falta y cuánto excedente gratis viene, y de ahí salen las horas de electrolizador que hay que comprar a la red, que se colocan en las más baratas del horizonte.
-Conviene precisar de dónde sale ese precio. El mercado diario publica sobre la una de la tarde las veinticuatro horas del día siguiente: la parte del horizonte que ya está publicada se usa tal cual, y solo se predice el tramo que aún no ha salido a mercado.
-Y lo que hace defendible la regla es que solo usa el orden: la decisión es «estoy entre las ene más baratas, sí o no». Eso no cambia si la previsión falla en el nivel mientras acierte en el orden. Sumarle diez euros a todas las horas da el mismo plan.
+Conviene precisar de dónde sale ese precio. El mercado diario publica sobre la una de la tarde las veinticuatro horas del día siguiente: la parte del horizonte ya publicada se usa tal cual, y solo se predice el tramo que aún no ha salido a mercado.
+Y lo que hace defendible la regla es que solo usa el orden: la decisión es «estoy entre las ene más baratas, sí o no», y eso no cambia si la previsión falla en el nivel mientras acierte en el orden.
 — — — — —
-NO SE DICE · objetivo 1:42 · La invariancia monótona es el argumento más elegante del trabajo. Dilo despacio.</a:t>
+NO SE DICE · objetivo 1:33 · La invariancia monótona es el argumento más elegante del trabajo. Dilo despacio.</a:t>
             </a:r>
             <a:endParaRPr lang="en-US" dirty="0"/>
           </a:p>
@@ -1176,11 +1175,12 @@
             <a:r>
               <a:rPr lang="en-US" dirty="0"/>
               <a:t>Los resultados de la Versión C, sobre siete días y veinte pares escenario-semilla.
-Coste total con hidrógeno: menos cincuenta y dos euros con tres por semana, un trece coma nueve por ciento, y gana en los veinte pares, con una p por debajo de una diezmilésima. Cinco veces el umbral de relevancia. Importa un cincuenta y cuatro por ciento menos y la autosuficiencia sube del ochenta y siete coma siete al noventa y cuatro coma tres.
-En la figura, cada línea une los dos miembros de un par. Mejora en los cuatro escenarios, y se ahorra más donde más caro compraba el electrolizador.
-Y la mejora tiene un precio, que declaro aquí mismo: la batería cicla dos coma dos veces más, con la degradación sin modelar, y el hidrógeno no servido pasa de cero coma ocho a tres coma uno kilogramos por semana en el nublado. Está dentro de la métrica de coste, pero es un dato de operación.
+La figura es la diferencia de coste de cada versión frente a la A, escenario por escenario, y la banda gris es el umbral de relevancia. La Versión B cae dentro de la banda en los cuatro: en coste empata. La C se sale por la izquierda en los cuatro, y por bastante.
+En la tabla, las tres métricas: cincuenta y dos euros con tres menos por semana, un trece coma nueve por ciento, ganando en los veinte pares; un cincuenta y cuatro por ciento menos de importación; y la autosuficiencia del ochenta y siete coma siete al noventa y cuatro coma tres.
+El orden entre escenarios no lo fija el excedente disponible, sino el precio al que compraba el electrolizador: se ahorra más donde más caro compraba.
+Y la mejora tiene un precio, que declaro yo: la batería cicla dos coma dos veces más, con la degradación sin modelar, y en el nublado hay que reponer desde fuera tres kilos de hidrógeno a la semana en vez de uno. Valorado dentro del coste, pero es un dato de operación.
 — — — — —
-NO SE DICE · objetivo 1:11 · El contrapeso va en la misma diapositiva y lo dices tú. No lo dejes para que lo pregunten.</a:t>
+NO SE DICE · objetivo 1:26 · El contrapeso va en la misma diapositiva y lo dices tú. No lo dejes para que lo pregunten.</a:t>
             </a:r>
             <a:endParaRPr lang="en-US" dirty="0"/>
           </a:p>
@@ -1362,11 +1362,11 @@
             <a:r>
               <a:rPr lang="en-US" dirty="0"/>
               <a:t>Las limitaciones, agrupadas por a qué afectan.
-Del modelo físico: los tanques usan gas ideal, que a seiscientos bar sobrestima un cuarenta y cinco por ciento la masa, así que la autonomía simulada es optimista; y la pila de combustible no arranca en ninguna simulación, de modo que el modo isla queda sin ejercitar.
-De los datos: la irradiancia viene de un reanálisis que no está disponible en tiempo real, y la demanda de hidrógeno se aproxima por analogía con la de vehículos eléctricos.
-Y de alcance: el coste no incluye peajes ni cargos, así que las cifras son comparativas; y la referencia es una implementación concreta, no un algoritmo establecido.
+Del modelo físico: algunos bloques asumen simplificaciones, la más relevante la ecuación de gas ideal en los tanques, que hace caber más hidrógeno del que cabría de verdad. Y la pila no llega a arrancar, que no es un fallo del gestor sino la decisión correcta: recuperar electricidad a partir del hidrógeno es el camino más caro y con más pérdidas de la estación, y mientras haya batería o red nunca compensa. La pila tiene sentido en modo isla, y ese modo no lo ejercito.
+De los datos: la irradiancia sale de un reanálisis, que es lo que hace falta para entrenar, pero no es la señal que tendría la estación en tiempo real; cambiarla por una previsión operativa no toca el modelo, solo la entrada. Y la demanda de hidrógeno se construye por analogía con la eléctrica porque aún no hay flota de la que medirla; lo importante es que es la misma para las tres versiones, así que no favorece a ninguna.
+Y de alcance: el coste no incluye peajes ni cargos, así que las cifras son comparativas. Y los umbrales están ajustados a esta instalación: llevar el algoritmo a otra exige recalibrarlos, no solo copiarlo.
 — — — — —
-NO SE DICE · objetivo 0:49 · Rápido y sin dramatizar. Cada una de estas seis es una pregunta que el tribunal ya no necesita hacerte. SI PREGUNTAN POR EL GAS IDEAL: la cifra exacta con tablas NIST es 40 %, no 45 (Z = 1,40 a 600 bar y 15 °C); el 45 sale de interpolar entre dos densidades publicadas. Dala tú. SI PREGUNTAN POR LA PILA: el bloque tiene 120 celdas de 600 cm² y 600 A; su curva de polarización da el máximo en ~156 A y son unos 11 kW, no los 130 del criterio de diseño. No contamina ningún resultado porque la pila no arranca nunca, pero el modo isla no está cubierto ni sobre el papel del modelo.</a:t>
+NO SE DICE · objetivo 1:31 · Rápido y sin dramatizar. Cada una de estas seis es una pregunta que el tribunal ya no necesita hacerte. SI PREGUNTAN POR EL GAS IDEAL: la cifra exacta con tablas NIST es 40 %, no 45 (Z = 1,40 a 600 bar y 15 °C); el 45 sale de interpolar entre dos densidades publicadas. Dala tú. SI PREGUNTAN POR LA PILA: el bloque tiene 120 celdas de 600 cm² y 600 A; su curva de polarización da el máximo en ~156 A y son unos 11 kW, no los 130 del criterio de diseño. No contamina ningún resultado porque la pila no arranca nunca, pero el modo isla no está cubierto ni sobre el papel del modelo.</a:t>
             </a:r>
             <a:endParaRPr lang="en-US" dirty="0"/>
           </a:p>
@@ -1455,12 +1455,13 @@
             <a:r>
               <a:rPr lang="en-US" dirty="0"/>
               <a:t>La pregunta del trabajo era si una previsión con redes LSTM mejora a un EMS heurístico ya maduro. La respuesta, medida, son estas tres conclusiones.
-La primera, sobre las redes: entrené y validé dos modelos contra líneas base no triviales, ninguno las bate por sí solo, y la ponderación con el predictor ingenuo es lo que recupera el resultado. Eso, más la corrección del lazo cerrado, es lo que se despliega.
-La segunda, sobre los gestores: tres versiones comparadas sobre la misma instalación. La predictiva mejora la seguridad de suministro de hidrógeno; la final reduce el coste semanal un trece coma nueve por ciento en los veinte casos.
-Y la tercera, que da sentido a las otras dos: la cadena de medida permite atribuir esa mejora pieza a pieza. El valor de una previsión depende de en qué decisión se inserte y de qué información no esté ya disponible.
-Muchas gracias por su atención. Quedo a su disposición.
+Dos modelos entrenados, validados y corregidos, cuya señal combinada supera a la línea base en solar y en precio, y es la que consume el simulador.
+Tres gestores comparados sobre la misma instalación: la predictiva mejora la seguridad de suministro de hidrógeno, y la final reduce el coste semanal casi un catorce por ciento en los veinte casos.
+Y la tercera, que da sentido a las otras dos: la cadena de medida permite atribuir la mejora pieza a pieza. El valor de una previsión depende de en qué decisión se inserte y de qué información no esté ya disponible.
+Cuatro líneas futuras. Aislar la previsión solar, dándole al planificador el excedente real en vez del previsto, para medir por separado lo que hoy va sumado. Dar al tanque un nivel objetivo antes de un día nublado previsto, que corregiría el único indicador que C empeora. Modelar la degradación de la batería. Y ampliar el horizonte a cuarenta y ocho horas con control predictivo: es el único tramo donde el mercado ya no está publicado y una red de precio volvería a aportar.
+Muchas gracias por su atención.
 — — — — —
-NO SE DICE · objetivo 1:10 · Levanta la vista en la tercera conclusión. Cierra con firmeza, sin arrastrar el «muchas gracias».</a:t>
+NO SE DICE · objetivo 1:34 · Levanta la vista en la tercera conclusión. Cierra con firmeza, sin arrastrar el «muchas gracias».</a:t>
             </a:r>
             <a:endParaRPr lang="en-US" dirty="0"/>
           </a:p>
@@ -1551,10 +1552,10 @@
               <a:t>El transporte es una cuarta parte de las emisiones de la Unión, y casi tres cuartas partes de esa fracción son carretera. Es uno de los focos que el Pacto Verde Europeo tiene que cerrar.
 El marco ya pone fechas. La Hoja de Ruta del Hidrógeno española fija entre cien y ciento cincuenta hidrogeneras públicas para dos mil treinta y sitúa los corredores de repostaje verde como prioridad; el PNIEC fija cinco millones y medio de vehículos eléctricos para esa fecha; y el reglamento europeo AFIR convierte el despliegue de recarga en objetivos vinculantes.
 El problema es esa fragmentación: cada vector arrastra hoy su propia infraestructura y su propia inversión.
-Y ya hay precedentes de integrarlas. Repsol inauguró en dos mil veinticinco la estación de Morro Jable, en Fuerteventura: fotovoltaica, baterías, pila de hidrógeno y recarga eléctrica. Es casi la combinación de OASIS, a menor escala y sin electrolizador propio.
+Y ya hay precedentes. Repsol inauguró en dos mil veinticinco la estación de Morro Jable, en Fuerteventura: fotovoltaica, baterías, pila de hidrógeno y recarga eléctrica. Es casi la combinación de OASIS, a menor escala y sin electrolizador propio.
 Con esa integración el reto deja de ser de dimensionamiento y pasa a ser de operación: decidir, en cada instante, de dónde sale cada kilovatio.
 — — — — —
-NO SE DICE · objetivo 1:18 · Las dos referencias que demuestran que has investigado —H2ME y Morro Jable— van habladas, no en pantalla. Morro Jable es tu mejor baza: casi los mismos componentes que OASIS.</a:t>
+NO SE DICE · objetivo 1:17 · Las dos referencias que demuestran que has investigado —H2ME y Morro Jable— van habladas, no en pantalla. Morro Jable es tu mejor baza: casi los mismos componentes que OASIS.</a:t>
             </a:r>
             <a:endParaRPr lang="en-US" dirty="0"/>
           </a:p>
@@ -1906,7 +1907,7 @@
           <a:p>
             <a:r>
               <a:rPr lang="en-US" dirty="0"/>
-              <a:t>Para la pregunta sobre el servicio de hidrógeno que empeora. SI PREGUNTAN POR EL NIVEL NEGATIVO: es un artefacto declarado del modelo — los integradores de los tanques no saturan a cero, así que el inventario puede bajar de cero y el modelo sirve un hidrógeno que físicamente no tiene. Ese tramo es exactamente lo que mide el indicador de hidrógeno no servido, que se valora a 8 €/kg dentro de la métrica principal. Activar la saturación queda como corrección pendiente del modelo, y está declarado en la memoria.</a:t>
+              <a:t>Para la pregunta sobre el servicio de hidrógeno que empeora. C pasa más tiempo por debajo del nivel crítico que A: es la contrapartida del ahorro y está valorada dentro de la métrica de coste. SI PREGUNTAN POR EL TRAMO NEGATIVO: es un artefacto declarado del modelo — los integradores de los tanques no saturan a cero, así que el inventario puede bajar de cero. Ese tramo es exactamente el hidrógeno que hay que comprar fuera, y se valora a 8 €/kg dentro de la métrica principal. Activar la saturación queda como corrección pendiente, y está declarado en la memoria.</a:t>
             </a:r>
             <a:endParaRPr lang="en-US" dirty="0"/>
           </a:p>
@@ -1930,94 +1931,6 @@
             <a:fld id="{F7021451-1387-4CA6-816F-3879F97B5CBC}" type="slidenum">
               <a:rPr lang="en-US"/>
               <a:t>23</a:t>
-            </a:fld>
-            <a:endParaRPr lang="en-US"/>
-          </a:p>
-        </p:txBody>
-      </p:sp>
-    </p:spTree>
-    <p:extLst>
-      <p:ext uri="{BB962C8B-B14F-4D97-AF65-F5344CB8AC3E}">
-        <p14:creationId xmlns:p14="http://schemas.microsoft.com/office/powerpoint/2010/main" val="1024086991"/>
-      </p:ext>
-    </p:extLst>
-  </p:cSld>
-  <p:clrMapOvr>
-    <a:masterClrMapping/>
-  </p:clrMapOvr>
-</p:notes>
-</file>
-
-<file path=ppt/notesSlides/notesSlide24.xml><?xml version="1.0" encoding="utf-8"?>
-<p:notes xmlns:a="http://schemas.openxmlformats.org/drawingml/2006/main" xmlns:r="http://schemas.openxmlformats.org/officeDocument/2006/relationships" xmlns:p="http://schemas.openxmlformats.org/presentationml/2006/main">
-  <p:cSld>
-    <p:spTree>
-      <p:nvGrpSpPr>
-        <p:cNvPr id="1" name=""/>
-        <p:cNvGrpSpPr/>
-        <p:nvPr/>
-      </p:nvGrpSpPr>
-      <p:grpSpPr>
-        <a:xfrm>
-          <a:off x="0" y="0"/>
-          <a:ext cx="0" cy="0"/>
-          <a:chOff x="0" y="0"/>
-          <a:chExt cx="0" cy="0"/>
-        </a:xfrm>
-      </p:grpSpPr>
-      <p:sp>
-        <p:nvSpPr>
-          <p:cNvPr id="2" name="Slide Image Placeholder 1"/>
-          <p:cNvSpPr>
-            <a:spLocks noGrp="1" noRot="1" noChangeAspect="1"/>
-          </p:cNvSpPr>
-          <p:nvPr>
-            <p:ph type="sldImg"/>
-          </p:nvPr>
-        </p:nvSpPr>
-        <p:spPr/>
-      </p:sp>
-      <p:sp>
-        <p:nvSpPr>
-          <p:cNvPr id="3" name="Notes Placeholder 2"/>
-          <p:cNvSpPr>
-            <a:spLocks noGrp="1"/>
-          </p:cNvSpPr>
-          <p:nvPr>
-            <p:ph type="body" idx="1"/>
-          </p:nvPr>
-        </p:nvSpPr>
-        <p:spPr/>
-        <p:txBody>
-          <a:bodyPr/>
-          <a:lstStyle/>
-          <a:p>
-            <a:r>
-              <a:rPr lang="en-US" dirty="0"/>
-              <a:t>Para preguntas sobre la calidad de la red de precio y sobre la sub-dispersión.</a:t>
-            </a:r>
-            <a:endParaRPr lang="en-US" dirty="0"/>
-          </a:p>
-        </p:txBody>
-      </p:sp>
-      <p:sp>
-        <p:nvSpPr>
-          <p:cNvPr id="4" name="Slide Number Placeholder 3"/>
-          <p:cNvSpPr>
-            <a:spLocks noGrp="1"/>
-          </p:cNvSpPr>
-          <p:nvPr>
-            <p:ph type="sldNum" sz="quarter" idx="10"/>
-          </p:nvPr>
-        </p:nvSpPr>
-        <p:spPr/>
-        <p:txBody>
-          <a:bodyPr/>
-          <a:lstStyle/>
-          <a:p>
-            <a:fld id="{F7021451-1387-4CA6-816F-3879F97B5CBC}" type="slidenum">
-              <a:rPr lang="en-US"/>
-              <a:t>24</a:t>
             </a:fld>
             <a:endParaRPr lang="en-US"/>
           </a:p>
@@ -8044,30 +7957,967 @@
           </a:p>
         </p:txBody>
       </p:sp>
-      <p:pic>
-        <p:nvPicPr>
-          <p:cNvPr id="4" name="Image 0" descr="img/fig_res_coste_escenario.png">    </p:cNvPr>
-          <p:cNvPicPr>
-            <a:picLocks noChangeAspect="1"/>
-          </p:cNvPicPr>
-          <p:nvPr/>
-        </p:nvPicPr>
-        <p:blipFill>
-          <a:blip r:embed="rId1"/>
-          <a:stretch>
-            <a:fillRect/>
-          </a:stretch>
-        </p:blipFill>
-        <p:spPr>
-          <a:xfrm>
-            <a:off x="502920" y="2115312"/>
-            <a:ext cx="5943600" cy="2773680"/>
-          </a:xfrm>
-          <a:prstGeom prst="rect">
-            <a:avLst/>
-          </a:prstGeom>
-        </p:spPr>
-      </p:pic>
+      <p:sp>
+        <p:nvSpPr>
+          <p:cNvPr id="4" name="Text 2"/>
+          <p:cNvSpPr txBox="1"/>
+          <p:nvPr/>
+        </p:nvSpPr>
+        <p:spPr>
+          <a:xfrm>
+            <a:off x="502920" y="1499616"/>
+            <a:ext cx="5852160" cy="274320"/>
+          </a:xfrm>
+          <a:prstGeom prst="rect">
+            <a:avLst/>
+          </a:prstGeom>
+          <a:noFill/>
+          <a:ln/>
+        </p:spPr>
+        <p:txBody>
+          <a:bodyPr wrap="square" lIns="0" tIns="0" rIns="0" bIns="0" rtlCol="0" anchor="ctr"/>
+          <a:lstStyle/>
+          <a:p>
+            <a:pPr indent="0" marL="0">
+              <a:buNone/>
+            </a:pPr>
+            <a:r>
+              <a:rPr lang="en-US" sz="1150" b="1" spc="60" kern="0" dirty="0">
+                <a:solidFill>
+                  <a:srgbClr val="10394A"/>
+                </a:solidFill>
+                <a:latin typeface="Calibri" pitchFamily="34" charset="0"/>
+                <a:ea typeface="Calibri" pitchFamily="34" charset="-122"/>
+                <a:cs typeface="Calibri" pitchFamily="34" charset="-120"/>
+              </a:rPr>
+              <a:t>Diferencia de coste frente a la Versión A</a:t>
+            </a:r>
+            <a:endParaRPr lang="en-US" sz="1150" dirty="0"/>
+          </a:p>
+        </p:txBody>
+      </p:sp>
+      <p:sp>
+        <p:nvSpPr>
+          <p:cNvPr id="5" name="Shape 3"/>
+          <p:cNvSpPr/>
+          <p:nvPr/>
+        </p:nvSpPr>
+        <p:spPr>
+          <a:xfrm>
+            <a:off x="5126250" y="2011680"/>
+            <a:ext cx="764339" cy="2816352"/>
+          </a:xfrm>
+          <a:prstGeom prst="rect">
+            <a:avLst/>
+          </a:prstGeom>
+          <a:solidFill>
+            <a:srgbClr val="F1F5F7"/>
+          </a:solidFill>
+          <a:ln w="12700">
+            <a:solidFill>
+              <a:srgbClr val="F1F5F7"/>
+            </a:solidFill>
+            <a:prstDash val="solid"/>
+          </a:ln>
+        </p:spPr>
+      </p:sp>
+      <p:sp>
+        <p:nvSpPr>
+          <p:cNvPr id="6" name="Shape 4"/>
+          <p:cNvSpPr/>
+          <p:nvPr/>
+        </p:nvSpPr>
+        <p:spPr>
+          <a:xfrm>
+            <a:off x="5508420" y="2011680"/>
+            <a:ext cx="0" cy="2816352"/>
+          </a:xfrm>
+          <a:prstGeom prst="line">
+            <a:avLst/>
+          </a:prstGeom>
+          <a:noFill/>
+          <a:ln w="12700">
+            <a:solidFill>
+              <a:srgbClr val="B9C3C9"/>
+            </a:solidFill>
+            <a:prstDash val="solid"/>
+          </a:ln>
+        </p:spPr>
+      </p:sp>
+      <p:sp>
+        <p:nvSpPr>
+          <p:cNvPr id="7" name="Text 5"/>
+          <p:cNvSpPr txBox="1"/>
+          <p:nvPr/>
+        </p:nvSpPr>
+        <p:spPr>
+          <a:xfrm>
+            <a:off x="502920" y="2103120"/>
+            <a:ext cx="1755648" cy="603504"/>
+          </a:xfrm>
+          <a:prstGeom prst="rect">
+            <a:avLst/>
+          </a:prstGeom>
+          <a:noFill/>
+          <a:ln/>
+        </p:spPr>
+        <p:txBody>
+          <a:bodyPr wrap="square" lIns="0" tIns="0" rIns="0" bIns="0" rtlCol="0" anchor="ctr"/>
+          <a:lstStyle/>
+          <a:p>
+            <a:pPr indent="0" marL="0">
+              <a:buNone/>
+            </a:pPr>
+            <a:r>
+              <a:rPr lang="en-US" sz="1150" dirty="0">
+                <a:solidFill>
+                  <a:srgbClr val="1C1C1C"/>
+                </a:solidFill>
+                <a:latin typeface="Calibri" pitchFamily="34" charset="0"/>
+                <a:ea typeface="Calibri" pitchFamily="34" charset="-122"/>
+                <a:cs typeface="Calibri" pitchFamily="34" charset="-120"/>
+              </a:rPr>
+              <a:t>E1 · laborable soleado</a:t>
+            </a:r>
+            <a:endParaRPr lang="en-US" sz="1150" dirty="0"/>
+          </a:p>
+        </p:txBody>
+      </p:sp>
+      <p:sp>
+        <p:nvSpPr>
+          <p:cNvPr id="8" name="Shape 6"/>
+          <p:cNvSpPr/>
+          <p:nvPr/>
+        </p:nvSpPr>
+        <p:spPr>
+          <a:xfrm>
+            <a:off x="5508420" y="2185416"/>
+            <a:ext cx="53250" cy="201168"/>
+          </a:xfrm>
+          <a:prstGeom prst="rect">
+            <a:avLst/>
+          </a:prstGeom>
+          <a:solidFill>
+            <a:srgbClr val="C9D6DD"/>
+          </a:solidFill>
+          <a:ln w="12700">
+            <a:solidFill>
+              <a:srgbClr val="C9D6DD"/>
+            </a:solidFill>
+            <a:prstDash val="solid"/>
+          </a:ln>
+        </p:spPr>
+      </p:sp>
+      <p:sp>
+        <p:nvSpPr>
+          <p:cNvPr id="9" name="Text 7"/>
+          <p:cNvSpPr txBox="1"/>
+          <p:nvPr/>
+        </p:nvSpPr>
+        <p:spPr>
+          <a:xfrm>
+            <a:off x="5616534" y="2148840"/>
+            <a:ext cx="877824" cy="274320"/>
+          </a:xfrm>
+          <a:prstGeom prst="rect">
+            <a:avLst/>
+          </a:prstGeom>
+          <a:noFill/>
+          <a:ln/>
+        </p:spPr>
+        <p:txBody>
+          <a:bodyPr wrap="square" lIns="0" tIns="0" rIns="0" bIns="0" rtlCol="0" anchor="ctr"/>
+          <a:lstStyle/>
+          <a:p>
+            <a:pPr indent="0" marL="0">
+              <a:buNone/>
+            </a:pPr>
+            <a:r>
+              <a:rPr lang="en-US" sz="1000" dirty="0">
+                <a:solidFill>
+                  <a:srgbClr val="5F6B72"/>
+                </a:solidFill>
+                <a:latin typeface="Calibri" pitchFamily="34" charset="0"/>
+                <a:ea typeface="Calibri" pitchFamily="34" charset="-122"/>
+                <a:cs typeface="Calibri" pitchFamily="34" charset="-120"/>
+              </a:rPr>
+              <a:t>+ 1,3 €</a:t>
+            </a:r>
+            <a:endParaRPr lang="en-US" sz="1000" dirty="0"/>
+          </a:p>
+        </p:txBody>
+      </p:sp>
+      <p:sp>
+        <p:nvSpPr>
+          <p:cNvPr id="10" name="Shape 8"/>
+          <p:cNvSpPr/>
+          <p:nvPr/>
+        </p:nvSpPr>
+        <p:spPr>
+          <a:xfrm>
+            <a:off x="3501312" y="2459736"/>
+            <a:ext cx="2007108" cy="201168"/>
+          </a:xfrm>
+          <a:prstGeom prst="rect">
+            <a:avLst/>
+          </a:prstGeom>
+          <a:solidFill>
+            <a:srgbClr val="10394A"/>
+          </a:solidFill>
+          <a:ln w="12700">
+            <a:solidFill>
+              <a:srgbClr val="10394A"/>
+            </a:solidFill>
+            <a:prstDash val="solid"/>
+          </a:ln>
+        </p:spPr>
+      </p:sp>
+      <p:sp>
+        <p:nvSpPr>
+          <p:cNvPr id="11" name="Text 9"/>
+          <p:cNvSpPr txBox="1"/>
+          <p:nvPr/>
+        </p:nvSpPr>
+        <p:spPr>
+          <a:xfrm>
+            <a:off x="2568624" y="2423160"/>
+            <a:ext cx="877824" cy="274320"/>
+          </a:xfrm>
+          <a:prstGeom prst="rect">
+            <a:avLst/>
+          </a:prstGeom>
+          <a:noFill/>
+          <a:ln/>
+        </p:spPr>
+        <p:txBody>
+          <a:bodyPr wrap="square" lIns="0" tIns="0" rIns="0" bIns="0" rtlCol="0" anchor="ctr"/>
+          <a:lstStyle/>
+          <a:p>
+            <a:pPr algn="r" indent="0" marL="0">
+              <a:buNone/>
+            </a:pPr>
+            <a:r>
+              <a:rPr lang="en-US" sz="1000" b="1" dirty="0">
+                <a:solidFill>
+                  <a:srgbClr val="10394A"/>
+                </a:solidFill>
+                <a:latin typeface="Calibri" pitchFamily="34" charset="0"/>
+                <a:ea typeface="Calibri" pitchFamily="34" charset="-122"/>
+                <a:cs typeface="Calibri" pitchFamily="34" charset="-120"/>
+              </a:rPr>
+              <a:t>− 49,0 €</a:t>
+            </a:r>
+            <a:endParaRPr lang="en-US" sz="1000" dirty="0"/>
+          </a:p>
+        </p:txBody>
+      </p:sp>
+      <p:sp>
+        <p:nvSpPr>
+          <p:cNvPr id="12" name="Text 10"/>
+          <p:cNvSpPr txBox="1"/>
+          <p:nvPr/>
+        </p:nvSpPr>
+        <p:spPr>
+          <a:xfrm>
+            <a:off x="502920" y="2779776"/>
+            <a:ext cx="1755648" cy="603504"/>
+          </a:xfrm>
+          <a:prstGeom prst="rect">
+            <a:avLst/>
+          </a:prstGeom>
+          <a:noFill/>
+          <a:ln/>
+        </p:spPr>
+        <p:txBody>
+          <a:bodyPr wrap="square" lIns="0" tIns="0" rIns="0" bIns="0" rtlCol="0" anchor="ctr"/>
+          <a:lstStyle/>
+          <a:p>
+            <a:pPr indent="0" marL="0">
+              <a:buNone/>
+            </a:pPr>
+            <a:r>
+              <a:rPr lang="en-US" sz="1150" dirty="0">
+                <a:solidFill>
+                  <a:srgbClr val="1C1C1C"/>
+                </a:solidFill>
+                <a:latin typeface="Calibri" pitchFamily="34" charset="0"/>
+                <a:ea typeface="Calibri" pitchFamily="34" charset="-122"/>
+                <a:cs typeface="Calibri" pitchFamily="34" charset="-120"/>
+              </a:rPr>
+              <a:t>E2 · laborable nublado</a:t>
+            </a:r>
+            <a:endParaRPr lang="en-US" sz="1150" dirty="0"/>
+          </a:p>
+        </p:txBody>
+      </p:sp>
+      <p:sp>
+        <p:nvSpPr>
+          <p:cNvPr id="13" name="Shape 11"/>
+          <p:cNvSpPr/>
+          <p:nvPr/>
+        </p:nvSpPr>
+        <p:spPr>
+          <a:xfrm>
+            <a:off x="5508420" y="2862072"/>
+            <a:ext cx="32769" cy="201168"/>
+          </a:xfrm>
+          <a:prstGeom prst="rect">
+            <a:avLst/>
+          </a:prstGeom>
+          <a:solidFill>
+            <a:srgbClr val="C9D6DD"/>
+          </a:solidFill>
+          <a:ln w="12700">
+            <a:solidFill>
+              <a:srgbClr val="C9D6DD"/>
+            </a:solidFill>
+            <a:prstDash val="solid"/>
+          </a:ln>
+        </p:spPr>
+      </p:sp>
+      <p:sp>
+        <p:nvSpPr>
+          <p:cNvPr id="14" name="Text 12"/>
+          <p:cNvSpPr txBox="1"/>
+          <p:nvPr/>
+        </p:nvSpPr>
+        <p:spPr>
+          <a:xfrm>
+            <a:off x="5596053" y="2825496"/>
+            <a:ext cx="877824" cy="274320"/>
+          </a:xfrm>
+          <a:prstGeom prst="rect">
+            <a:avLst/>
+          </a:prstGeom>
+          <a:noFill/>
+          <a:ln/>
+        </p:spPr>
+        <p:txBody>
+          <a:bodyPr wrap="square" lIns="0" tIns="0" rIns="0" bIns="0" rtlCol="0" anchor="ctr"/>
+          <a:lstStyle/>
+          <a:p>
+            <a:pPr indent="0" marL="0">
+              <a:buNone/>
+            </a:pPr>
+            <a:r>
+              <a:rPr lang="en-US" sz="1000" dirty="0">
+                <a:solidFill>
+                  <a:srgbClr val="5F6B72"/>
+                </a:solidFill>
+                <a:latin typeface="Calibri" pitchFamily="34" charset="0"/>
+                <a:ea typeface="Calibri" pitchFamily="34" charset="-122"/>
+                <a:cs typeface="Calibri" pitchFamily="34" charset="-120"/>
+              </a:rPr>
+              <a:t>+ 0,8 €</a:t>
+            </a:r>
+            <a:endParaRPr lang="en-US" sz="1000" dirty="0"/>
+          </a:p>
+        </p:txBody>
+      </p:sp>
+      <p:sp>
+        <p:nvSpPr>
+          <p:cNvPr id="15" name="Shape 13"/>
+          <p:cNvSpPr/>
+          <p:nvPr/>
+        </p:nvSpPr>
+        <p:spPr>
+          <a:xfrm>
+            <a:off x="3149044" y="3136392"/>
+            <a:ext cx="2359376" cy="201168"/>
+          </a:xfrm>
+          <a:prstGeom prst="rect">
+            <a:avLst/>
+          </a:prstGeom>
+          <a:solidFill>
+            <a:srgbClr val="10394A"/>
+          </a:solidFill>
+          <a:ln w="12700">
+            <a:solidFill>
+              <a:srgbClr val="10394A"/>
+            </a:solidFill>
+            <a:prstDash val="solid"/>
+          </a:ln>
+        </p:spPr>
+      </p:sp>
+      <p:sp>
+        <p:nvSpPr>
+          <p:cNvPr id="16" name="Text 14"/>
+          <p:cNvSpPr txBox="1"/>
+          <p:nvPr/>
+        </p:nvSpPr>
+        <p:spPr>
+          <a:xfrm>
+            <a:off x="2216356" y="3099816"/>
+            <a:ext cx="877824" cy="274320"/>
+          </a:xfrm>
+          <a:prstGeom prst="rect">
+            <a:avLst/>
+          </a:prstGeom>
+          <a:noFill/>
+          <a:ln/>
+        </p:spPr>
+        <p:txBody>
+          <a:bodyPr wrap="square" lIns="0" tIns="0" rIns="0" bIns="0" rtlCol="0" anchor="ctr"/>
+          <a:lstStyle/>
+          <a:p>
+            <a:pPr algn="r" indent="0" marL="0">
+              <a:buNone/>
+            </a:pPr>
+            <a:r>
+              <a:rPr lang="en-US" sz="1000" b="1" dirty="0">
+                <a:solidFill>
+                  <a:srgbClr val="10394A"/>
+                </a:solidFill>
+                <a:latin typeface="Calibri" pitchFamily="34" charset="0"/>
+                <a:ea typeface="Calibri" pitchFamily="34" charset="-122"/>
+                <a:cs typeface="Calibri" pitchFamily="34" charset="-120"/>
+              </a:rPr>
+              <a:t>− 57,6 €</a:t>
+            </a:r>
+            <a:endParaRPr lang="en-US" sz="1000" dirty="0"/>
+          </a:p>
+        </p:txBody>
+      </p:sp>
+      <p:sp>
+        <p:nvSpPr>
+          <p:cNvPr id="17" name="Text 15"/>
+          <p:cNvSpPr txBox="1"/>
+          <p:nvPr/>
+        </p:nvSpPr>
+        <p:spPr>
+          <a:xfrm>
+            <a:off x="502920" y="3456432"/>
+            <a:ext cx="1755648" cy="603504"/>
+          </a:xfrm>
+          <a:prstGeom prst="rect">
+            <a:avLst/>
+          </a:prstGeom>
+          <a:noFill/>
+          <a:ln/>
+        </p:spPr>
+        <p:txBody>
+          <a:bodyPr wrap="square" lIns="0" tIns="0" rIns="0" bIns="0" rtlCol="0" anchor="ctr"/>
+          <a:lstStyle/>
+          <a:p>
+            <a:pPr indent="0" marL="0">
+              <a:buNone/>
+            </a:pPr>
+            <a:r>
+              <a:rPr lang="en-US" sz="1150" dirty="0">
+                <a:solidFill>
+                  <a:srgbClr val="1C1C1C"/>
+                </a:solidFill>
+                <a:latin typeface="Calibri" pitchFamily="34" charset="0"/>
+                <a:ea typeface="Calibri" pitchFamily="34" charset="-122"/>
+                <a:cs typeface="Calibri" pitchFamily="34" charset="-120"/>
+              </a:rPr>
+              <a:t>E3 · finde soleado</a:t>
+            </a:r>
+            <a:endParaRPr lang="en-US" sz="1150" dirty="0"/>
+          </a:p>
+        </p:txBody>
+      </p:sp>
+      <p:sp>
+        <p:nvSpPr>
+          <p:cNvPr id="18" name="Shape 16"/>
+          <p:cNvSpPr/>
+          <p:nvPr/>
+        </p:nvSpPr>
+        <p:spPr>
+          <a:xfrm>
+            <a:off x="5508420" y="3538728"/>
+            <a:ext cx="24577" cy="201168"/>
+          </a:xfrm>
+          <a:prstGeom prst="rect">
+            <a:avLst/>
+          </a:prstGeom>
+          <a:solidFill>
+            <a:srgbClr val="C9D6DD"/>
+          </a:solidFill>
+          <a:ln w="12700">
+            <a:solidFill>
+              <a:srgbClr val="C9D6DD"/>
+            </a:solidFill>
+            <a:prstDash val="solid"/>
+          </a:ln>
+        </p:spPr>
+      </p:sp>
+      <p:sp>
+        <p:nvSpPr>
+          <p:cNvPr id="19" name="Text 17"/>
+          <p:cNvSpPr txBox="1"/>
+          <p:nvPr/>
+        </p:nvSpPr>
+        <p:spPr>
+          <a:xfrm>
+            <a:off x="5587861" y="3502152"/>
+            <a:ext cx="877824" cy="274320"/>
+          </a:xfrm>
+          <a:prstGeom prst="rect">
+            <a:avLst/>
+          </a:prstGeom>
+          <a:noFill/>
+          <a:ln/>
+        </p:spPr>
+        <p:txBody>
+          <a:bodyPr wrap="square" lIns="0" tIns="0" rIns="0" bIns="0" rtlCol="0" anchor="ctr"/>
+          <a:lstStyle/>
+          <a:p>
+            <a:pPr indent="0" marL="0">
+              <a:buNone/>
+            </a:pPr>
+            <a:r>
+              <a:rPr lang="en-US" sz="1000" dirty="0">
+                <a:solidFill>
+                  <a:srgbClr val="5F6B72"/>
+                </a:solidFill>
+                <a:latin typeface="Calibri" pitchFamily="34" charset="0"/>
+                <a:ea typeface="Calibri" pitchFamily="34" charset="-122"/>
+                <a:cs typeface="Calibri" pitchFamily="34" charset="-120"/>
+              </a:rPr>
+              <a:t>+ 0,6 €</a:t>
+            </a:r>
+            <a:endParaRPr lang="en-US" sz="1000" dirty="0"/>
+          </a:p>
+        </p:txBody>
+      </p:sp>
+      <p:sp>
+        <p:nvSpPr>
+          <p:cNvPr id="20" name="Shape 18"/>
+          <p:cNvSpPr/>
+          <p:nvPr/>
+        </p:nvSpPr>
+        <p:spPr>
+          <a:xfrm>
+            <a:off x="4001041" y="3813048"/>
+            <a:ext cx="1507379" cy="201168"/>
+          </a:xfrm>
+          <a:prstGeom prst="rect">
+            <a:avLst/>
+          </a:prstGeom>
+          <a:solidFill>
+            <a:srgbClr val="10394A"/>
+          </a:solidFill>
+          <a:ln w="12700">
+            <a:solidFill>
+              <a:srgbClr val="10394A"/>
+            </a:solidFill>
+            <a:prstDash val="solid"/>
+          </a:ln>
+        </p:spPr>
+      </p:sp>
+      <p:sp>
+        <p:nvSpPr>
+          <p:cNvPr id="21" name="Text 19"/>
+          <p:cNvSpPr txBox="1"/>
+          <p:nvPr/>
+        </p:nvSpPr>
+        <p:spPr>
+          <a:xfrm>
+            <a:off x="3068353" y="3776472"/>
+            <a:ext cx="877824" cy="274320"/>
+          </a:xfrm>
+          <a:prstGeom prst="rect">
+            <a:avLst/>
+          </a:prstGeom>
+          <a:noFill/>
+          <a:ln/>
+        </p:spPr>
+        <p:txBody>
+          <a:bodyPr wrap="square" lIns="0" tIns="0" rIns="0" bIns="0" rtlCol="0" anchor="ctr"/>
+          <a:lstStyle/>
+          <a:p>
+            <a:pPr algn="r" indent="0" marL="0">
+              <a:buNone/>
+            </a:pPr>
+            <a:r>
+              <a:rPr lang="en-US" sz="1000" b="1" dirty="0">
+                <a:solidFill>
+                  <a:srgbClr val="10394A"/>
+                </a:solidFill>
+                <a:latin typeface="Calibri" pitchFamily="34" charset="0"/>
+                <a:ea typeface="Calibri" pitchFamily="34" charset="-122"/>
+                <a:cs typeface="Calibri" pitchFamily="34" charset="-120"/>
+              </a:rPr>
+              <a:t>− 36,8 €</a:t>
+            </a:r>
+            <a:endParaRPr lang="en-US" sz="1000" dirty="0"/>
+          </a:p>
+        </p:txBody>
+      </p:sp>
+      <p:sp>
+        <p:nvSpPr>
+          <p:cNvPr id="22" name="Text 20"/>
+          <p:cNvSpPr txBox="1"/>
+          <p:nvPr/>
+        </p:nvSpPr>
+        <p:spPr>
+          <a:xfrm>
+            <a:off x="502920" y="4133088"/>
+            <a:ext cx="1755648" cy="603504"/>
+          </a:xfrm>
+          <a:prstGeom prst="rect">
+            <a:avLst/>
+          </a:prstGeom>
+          <a:noFill/>
+          <a:ln/>
+        </p:spPr>
+        <p:txBody>
+          <a:bodyPr wrap="square" lIns="0" tIns="0" rIns="0" bIns="0" rtlCol="0" anchor="ctr"/>
+          <a:lstStyle/>
+          <a:p>
+            <a:pPr indent="0" marL="0">
+              <a:buNone/>
+            </a:pPr>
+            <a:r>
+              <a:rPr lang="en-US" sz="1150" dirty="0">
+                <a:solidFill>
+                  <a:srgbClr val="1C1C1C"/>
+                </a:solidFill>
+                <a:latin typeface="Calibri" pitchFamily="34" charset="0"/>
+                <a:ea typeface="Calibri" pitchFamily="34" charset="-122"/>
+                <a:cs typeface="Calibri" pitchFamily="34" charset="-120"/>
+              </a:rPr>
+              <a:t>E4 · volatilidad</a:t>
+            </a:r>
+            <a:endParaRPr lang="en-US" sz="1150" dirty="0"/>
+          </a:p>
+        </p:txBody>
+      </p:sp>
+      <p:sp>
+        <p:nvSpPr>
+          <p:cNvPr id="23" name="Shape 21"/>
+          <p:cNvSpPr/>
+          <p:nvPr/>
+        </p:nvSpPr>
+        <p:spPr>
+          <a:xfrm>
+            <a:off x="5508420" y="4215384"/>
+            <a:ext cx="57346" cy="201168"/>
+          </a:xfrm>
+          <a:prstGeom prst="rect">
+            <a:avLst/>
+          </a:prstGeom>
+          <a:solidFill>
+            <a:srgbClr val="C9D6DD"/>
+          </a:solidFill>
+          <a:ln w="12700">
+            <a:solidFill>
+              <a:srgbClr val="C9D6DD"/>
+            </a:solidFill>
+            <a:prstDash val="solid"/>
+          </a:ln>
+        </p:spPr>
+      </p:sp>
+      <p:sp>
+        <p:nvSpPr>
+          <p:cNvPr id="24" name="Text 22"/>
+          <p:cNvSpPr txBox="1"/>
+          <p:nvPr/>
+        </p:nvSpPr>
+        <p:spPr>
+          <a:xfrm>
+            <a:off x="5620630" y="4178808"/>
+            <a:ext cx="877824" cy="274320"/>
+          </a:xfrm>
+          <a:prstGeom prst="rect">
+            <a:avLst/>
+          </a:prstGeom>
+          <a:noFill/>
+          <a:ln/>
+        </p:spPr>
+        <p:txBody>
+          <a:bodyPr wrap="square" lIns="0" tIns="0" rIns="0" bIns="0" rtlCol="0" anchor="ctr"/>
+          <a:lstStyle/>
+          <a:p>
+            <a:pPr indent="0" marL="0">
+              <a:buNone/>
+            </a:pPr>
+            <a:r>
+              <a:rPr lang="en-US" sz="1000" dirty="0">
+                <a:solidFill>
+                  <a:srgbClr val="5F6B72"/>
+                </a:solidFill>
+                <a:latin typeface="Calibri" pitchFamily="34" charset="0"/>
+                <a:ea typeface="Calibri" pitchFamily="34" charset="-122"/>
+                <a:cs typeface="Calibri" pitchFamily="34" charset="-120"/>
+              </a:rPr>
+              <a:t>+ 1,4 €</a:t>
+            </a:r>
+            <a:endParaRPr lang="en-US" sz="1000" dirty="0"/>
+          </a:p>
+        </p:txBody>
+      </p:sp>
+      <p:sp>
+        <p:nvSpPr>
+          <p:cNvPr id="25" name="Shape 23"/>
+          <p:cNvSpPr/>
+          <p:nvPr/>
+        </p:nvSpPr>
+        <p:spPr>
+          <a:xfrm>
+            <a:off x="2796776" y="4489704"/>
+            <a:ext cx="2711644" cy="201168"/>
+          </a:xfrm>
+          <a:prstGeom prst="rect">
+            <a:avLst/>
+          </a:prstGeom>
+          <a:solidFill>
+            <a:srgbClr val="10394A"/>
+          </a:solidFill>
+          <a:ln w="12700">
+            <a:solidFill>
+              <a:srgbClr val="10394A"/>
+            </a:solidFill>
+            <a:prstDash val="solid"/>
+          </a:ln>
+        </p:spPr>
+      </p:sp>
+      <p:sp>
+        <p:nvSpPr>
+          <p:cNvPr id="26" name="Text 24"/>
+          <p:cNvSpPr txBox="1"/>
+          <p:nvPr/>
+        </p:nvSpPr>
+        <p:spPr>
+          <a:xfrm>
+            <a:off x="1864088" y="4453128"/>
+            <a:ext cx="877824" cy="274320"/>
+          </a:xfrm>
+          <a:prstGeom prst="rect">
+            <a:avLst/>
+          </a:prstGeom>
+          <a:noFill/>
+          <a:ln/>
+        </p:spPr>
+        <p:txBody>
+          <a:bodyPr wrap="square" lIns="0" tIns="0" rIns="0" bIns="0" rtlCol="0" anchor="ctr"/>
+          <a:lstStyle/>
+          <a:p>
+            <a:pPr algn="r" indent="0" marL="0">
+              <a:buNone/>
+            </a:pPr>
+            <a:r>
+              <a:rPr lang="en-US" sz="1000" b="1" dirty="0">
+                <a:solidFill>
+                  <a:srgbClr val="10394A"/>
+                </a:solidFill>
+                <a:latin typeface="Calibri" pitchFamily="34" charset="0"/>
+                <a:ea typeface="Calibri" pitchFamily="34" charset="-122"/>
+                <a:cs typeface="Calibri" pitchFamily="34" charset="-120"/>
+              </a:rPr>
+              <a:t>− 66,2 €</a:t>
+            </a:r>
+            <a:endParaRPr lang="en-US" sz="1000" dirty="0"/>
+          </a:p>
+        </p:txBody>
+      </p:sp>
+      <p:sp>
+        <p:nvSpPr>
+          <p:cNvPr id="27" name="Text 25"/>
+          <p:cNvSpPr txBox="1"/>
+          <p:nvPr/>
+        </p:nvSpPr>
+        <p:spPr>
+          <a:xfrm>
+            <a:off x="4303290" y="4864608"/>
+            <a:ext cx="2468880" cy="237744"/>
+          </a:xfrm>
+          <a:prstGeom prst="rect">
+            <a:avLst/>
+          </a:prstGeom>
+          <a:noFill/>
+          <a:ln/>
+        </p:spPr>
+        <p:txBody>
+          <a:bodyPr wrap="square" lIns="0" tIns="0" rIns="0" bIns="0" rtlCol="0" anchor="ctr"/>
+          <a:lstStyle/>
+          <a:p>
+            <a:pPr algn="ctr" indent="0" marL="0">
+              <a:buNone/>
+            </a:pPr>
+            <a:r>
+              <a:rPr lang="en-US" sz="950" i="1" dirty="0">
+                <a:solidFill>
+                  <a:srgbClr val="5F6B72"/>
+                </a:solidFill>
+                <a:latin typeface="Calibri" pitchFamily="34" charset="0"/>
+                <a:ea typeface="Calibri" pitchFamily="34" charset="-122"/>
+                <a:cs typeface="Calibri" pitchFamily="34" charset="-120"/>
+              </a:rPr>
+              <a:t>± 9,33 € · umbral de relevancia</a:t>
+            </a:r>
+            <a:endParaRPr lang="en-US" sz="950" dirty="0"/>
+          </a:p>
+        </p:txBody>
+      </p:sp>
+      <p:sp>
+        <p:nvSpPr>
+          <p:cNvPr id="28" name="Text 26"/>
+          <p:cNvSpPr txBox="1"/>
+          <p:nvPr/>
+        </p:nvSpPr>
+        <p:spPr>
+          <a:xfrm>
+            <a:off x="502920" y="5138928"/>
+            <a:ext cx="5852160" cy="237744"/>
+          </a:xfrm>
+          <a:prstGeom prst="rect">
+            <a:avLst/>
+          </a:prstGeom>
+          <a:noFill/>
+          <a:ln/>
+        </p:spPr>
+        <p:txBody>
+          <a:bodyPr wrap="square" lIns="0" tIns="0" rIns="0" bIns="0" rtlCol="0" anchor="ctr"/>
+          <a:lstStyle/>
+          <a:p>
+            <a:pPr indent="0" marL="0">
+              <a:buNone/>
+            </a:pPr>
+            <a:r>
+              <a:rPr lang="en-US" sz="1000" i="1" dirty="0">
+                <a:solidFill>
+                  <a:srgbClr val="5F6B72"/>
+                </a:solidFill>
+                <a:latin typeface="Calibri" pitchFamily="34" charset="0"/>
+                <a:ea typeface="Calibri" pitchFamily="34" charset="-122"/>
+                <a:cs typeface="Calibri" pitchFamily="34" charset="-120"/>
+              </a:rPr>
+              <a:t>€ por semana · a la izquierda del cero, más barato que A</a:t>
+            </a:r>
+            <a:endParaRPr lang="en-US" sz="1000" dirty="0"/>
+          </a:p>
+        </p:txBody>
+      </p:sp>
+      <p:sp>
+        <p:nvSpPr>
+          <p:cNvPr id="29" name="Shape 27"/>
+          <p:cNvSpPr/>
+          <p:nvPr/>
+        </p:nvSpPr>
+        <p:spPr>
+          <a:xfrm>
+            <a:off x="3749040" y="1527048"/>
+            <a:ext cx="219456" cy="146304"/>
+          </a:xfrm>
+          <a:prstGeom prst="rect">
+            <a:avLst/>
+          </a:prstGeom>
+          <a:solidFill>
+            <a:srgbClr val="C9D6DD"/>
+          </a:solidFill>
+          <a:ln w="12700">
+            <a:solidFill>
+              <a:srgbClr val="333333"/>
+            </a:solidFill>
+            <a:prstDash val="solid"/>
+          </a:ln>
+        </p:spPr>
+      </p:sp>
+      <p:sp>
+        <p:nvSpPr>
+          <p:cNvPr id="30" name="Text 28"/>
+          <p:cNvSpPr txBox="1"/>
+          <p:nvPr/>
+        </p:nvSpPr>
+        <p:spPr>
+          <a:xfrm>
+            <a:off x="4023360" y="1453896"/>
+            <a:ext cx="1188720" cy="274320"/>
+          </a:xfrm>
+          <a:prstGeom prst="rect">
+            <a:avLst/>
+          </a:prstGeom>
+          <a:noFill/>
+          <a:ln/>
+        </p:spPr>
+        <p:txBody>
+          <a:bodyPr wrap="square" lIns="0" tIns="0" rIns="0" bIns="0" rtlCol="0" anchor="ctr"/>
+          <a:lstStyle/>
+          <a:p>
+            <a:pPr indent="0" marL="0">
+              <a:buNone/>
+            </a:pPr>
+            <a:r>
+              <a:rPr lang="en-US" sz="1050" dirty="0">
+                <a:solidFill>
+                  <a:srgbClr val="5F6B72"/>
+                </a:solidFill>
+                <a:latin typeface="Calibri" pitchFamily="34" charset="0"/>
+                <a:ea typeface="Calibri" pitchFamily="34" charset="-122"/>
+                <a:cs typeface="Calibri" pitchFamily="34" charset="-120"/>
+              </a:rPr>
+              <a:t>Versión B</a:t>
+            </a:r>
+            <a:endParaRPr lang="en-US" sz="1050" dirty="0"/>
+          </a:p>
+        </p:txBody>
+      </p:sp>
+      <p:sp>
+        <p:nvSpPr>
+          <p:cNvPr id="31" name="Shape 29"/>
+          <p:cNvSpPr/>
+          <p:nvPr/>
+        </p:nvSpPr>
+        <p:spPr>
+          <a:xfrm>
+            <a:off x="5257800" y="1527048"/>
+            <a:ext cx="219456" cy="146304"/>
+          </a:xfrm>
+          <a:prstGeom prst="rect">
+            <a:avLst/>
+          </a:prstGeom>
+          <a:solidFill>
+            <a:srgbClr val="10394A"/>
+          </a:solidFill>
+          <a:ln w="12700">
+            <a:solidFill>
+              <a:srgbClr val="333333"/>
+            </a:solidFill>
+            <a:prstDash val="solid"/>
+          </a:ln>
+        </p:spPr>
+      </p:sp>
+      <p:sp>
+        <p:nvSpPr>
+          <p:cNvPr id="32" name="Text 30"/>
+          <p:cNvSpPr txBox="1"/>
+          <p:nvPr/>
+        </p:nvSpPr>
+        <p:spPr>
+          <a:xfrm>
+            <a:off x="5532120" y="1453896"/>
+            <a:ext cx="1188720" cy="274320"/>
+          </a:xfrm>
+          <a:prstGeom prst="rect">
+            <a:avLst/>
+          </a:prstGeom>
+          <a:noFill/>
+          <a:ln/>
+        </p:spPr>
+        <p:txBody>
+          <a:bodyPr wrap="square" lIns="0" tIns="0" rIns="0" bIns="0" rtlCol="0" anchor="ctr"/>
+          <a:lstStyle/>
+          <a:p>
+            <a:pPr indent="0" marL="0">
+              <a:buNone/>
+            </a:pPr>
+            <a:r>
+              <a:rPr lang="en-US" sz="1050" dirty="0">
+                <a:solidFill>
+                  <a:srgbClr val="5F6B72"/>
+                </a:solidFill>
+                <a:latin typeface="Calibri" pitchFamily="34" charset="0"/>
+                <a:ea typeface="Calibri" pitchFamily="34" charset="-122"/>
+                <a:cs typeface="Calibri" pitchFamily="34" charset="-120"/>
+              </a:rPr>
+              <a:t>Versión C</a:t>
+            </a:r>
+            <a:endParaRPr lang="en-US" sz="1050" dirty="0"/>
+          </a:p>
+        </p:txBody>
+      </p:sp>
       <p:graphicFrame>
         <p:nvGraphicFramePr>
           <p:cNvPr id="17" name="Table 0"/>
@@ -8083,7 +8933,7 @@
           </p:nvPr>
         </p:nvGraphicFramePr>
         <p:xfrm>
-          <a:off x="6629400" y="1536192"/>
+          <a:off x="6629400" y="1810512"/>
           <a:ext cx="5056632" cy="914400"/>
         </p:xfrm>
         <a:graphic>
@@ -8925,14 +9775,14 @@
       </p:graphicFrame>
       <p:sp>
         <p:nvSpPr>
-          <p:cNvPr id="6" name="Text 2"/>
-          <p:cNvSpPr txBox="1"/>
-          <p:nvPr/>
-        </p:nvSpPr>
-        <p:spPr>
-          <a:xfrm>
-            <a:off x="6629400" y="3822192"/>
-            <a:ext cx="5056632" cy="457200"/>
+          <p:cNvPr id="34" name="Text 31"/>
+          <p:cNvSpPr txBox="1"/>
+          <p:nvPr/>
+        </p:nvSpPr>
+        <p:spPr>
+          <a:xfrm>
+            <a:off x="6629400" y="4096512"/>
+            <a:ext cx="5056632" cy="548640"/>
           </a:xfrm>
           <a:prstGeom prst="rect">
             <a:avLst/>
@@ -8967,7 +9817,7 @@
       </p:sp>
       <p:sp>
         <p:nvSpPr>
-          <p:cNvPr id="7" name="Shape 3"/>
+          <p:cNvPr id="35" name="Shape 32"/>
           <p:cNvSpPr/>
           <p:nvPr/>
         </p:nvSpPr>
@@ -8989,7 +9839,7 @@
       </p:sp>
       <p:sp>
         <p:nvSpPr>
-          <p:cNvPr id="8" name="Text 4"/>
+          <p:cNvPr id="36" name="Text 33"/>
           <p:cNvSpPr txBox="1"/>
           <p:nvPr/>
         </p:nvSpPr>
@@ -9023,7 +9873,7 @@
                 <a:ea typeface="Calibri" pitchFamily="34" charset="-122"/>
                 <a:cs typeface="Calibri" pitchFamily="34" charset="-120"/>
               </a:rPr>
-              <a:t>El precio de la mejora: la batería cicla ×2,2 y el hidrógeno no servido pasa de 0,82 a 3,07 kg/semana en el escenario nublado.</a:t>
+              <a:t>El precio de la mejora: la batería cicla ×2,2, y en el nublado hay que reponer 3,07 kg de H₂ desde fuera en vez de 0,82. Valorado dentro del coste.</a:t>
             </a:r>
             <a:endParaRPr lang="en-US" sz="1350" dirty="0"/>
           </a:p>
@@ -9031,7 +9881,7 @@
       </p:sp>
       <p:sp>
         <p:nvSpPr>
-          <p:cNvPr id="9" name="Text 5"/>
+          <p:cNvPr id="37" name="Text 34"/>
           <p:cNvSpPr txBox="1"/>
           <p:nvPr/>
         </p:nvSpPr>
@@ -9189,7 +10039,7 @@
         </p:nvSpPr>
         <p:spPr>
           <a:xfrm>
-            <a:off x="502920" y="1581912"/>
+            <a:off x="502920" y="1554480"/>
             <a:ext cx="1554480" cy="777240"/>
           </a:xfrm>
           <a:prstGeom prst="rect">
@@ -9228,7 +10078,7 @@
         </p:nvSpPr>
         <p:spPr>
           <a:xfrm>
-            <a:off x="2148840" y="1581912"/>
+            <a:off x="2148840" y="1554480"/>
             <a:ext cx="5486400" cy="402336"/>
           </a:xfrm>
           <a:prstGeom prst="rect">
@@ -9267,7 +10117,7 @@
         </p:nvSpPr>
         <p:spPr>
           <a:xfrm>
-            <a:off x="2148840" y="1965960"/>
+            <a:off x="2148840" y="1938528"/>
             <a:ext cx="5486400" cy="384048"/>
           </a:xfrm>
           <a:prstGeom prst="rect">
@@ -9306,7 +10156,7 @@
         </p:nvSpPr>
         <p:spPr>
           <a:xfrm>
-            <a:off x="7498080" y="1581912"/>
+            <a:off x="7498080" y="1554480"/>
             <a:ext cx="4206240" cy="777240"/>
           </a:xfrm>
           <a:prstGeom prst="rect">
@@ -9345,7 +10195,7 @@
         </p:nvSpPr>
         <p:spPr>
           <a:xfrm>
-            <a:off x="502920" y="2496312"/>
+            <a:off x="502920" y="2468880"/>
             <a:ext cx="11185855" cy="0"/>
           </a:xfrm>
           <a:prstGeom prst="line">
@@ -9368,7 +10218,7 @@
         </p:nvSpPr>
         <p:spPr>
           <a:xfrm>
-            <a:off x="502920" y="2697480"/>
+            <a:off x="502920" y="2615184"/>
             <a:ext cx="1554480" cy="777240"/>
           </a:xfrm>
           <a:prstGeom prst="rect">
@@ -9407,7 +10257,7 @@
         </p:nvSpPr>
         <p:spPr>
           <a:xfrm>
-            <a:off x="2148840" y="2697480"/>
+            <a:off x="2148840" y="2615184"/>
             <a:ext cx="5486400" cy="402336"/>
           </a:xfrm>
           <a:prstGeom prst="rect">
@@ -9446,7 +10296,7 @@
         </p:nvSpPr>
         <p:spPr>
           <a:xfrm>
-            <a:off x="2148840" y="3081528"/>
+            <a:off x="2148840" y="2999232"/>
             <a:ext cx="5486400" cy="384048"/>
           </a:xfrm>
           <a:prstGeom prst="rect">
@@ -9485,7 +10335,7 @@
         </p:nvSpPr>
         <p:spPr>
           <a:xfrm>
-            <a:off x="7498080" y="2697480"/>
+            <a:off x="7498080" y="2615184"/>
             <a:ext cx="4206240" cy="777240"/>
           </a:xfrm>
           <a:prstGeom prst="rect">
@@ -9524,7 +10374,7 @@
         </p:nvSpPr>
         <p:spPr>
           <a:xfrm>
-            <a:off x="502920" y="3611880"/>
+            <a:off x="502920" y="3529584"/>
             <a:ext cx="11185855" cy="0"/>
           </a:xfrm>
           <a:prstGeom prst="line">
@@ -9547,7 +10397,7 @@
         </p:nvSpPr>
         <p:spPr>
           <a:xfrm>
-            <a:off x="502920" y="3813048"/>
+            <a:off x="502920" y="3675888"/>
             <a:ext cx="1554480" cy="777240"/>
           </a:xfrm>
           <a:prstGeom prst="rect">
@@ -9586,7 +10436,7 @@
         </p:nvSpPr>
         <p:spPr>
           <a:xfrm>
-            <a:off x="2148840" y="3813048"/>
+            <a:off x="2148840" y="3675888"/>
             <a:ext cx="5486400" cy="402336"/>
           </a:xfrm>
           <a:prstGeom prst="rect">
@@ -9625,7 +10475,7 @@
         </p:nvSpPr>
         <p:spPr>
           <a:xfrm>
-            <a:off x="2148840" y="4197096"/>
+            <a:off x="2148840" y="4059936"/>
             <a:ext cx="5486400" cy="384048"/>
           </a:xfrm>
           <a:prstGeom prst="rect">
@@ -9664,7 +10514,7 @@
         </p:nvSpPr>
         <p:spPr>
           <a:xfrm>
-            <a:off x="7498080" y="3813048"/>
+            <a:off x="7498080" y="3675888"/>
             <a:ext cx="4206240" cy="777240"/>
           </a:xfrm>
           <a:prstGeom prst="rect">
@@ -9703,8 +10553,8 @@
         </p:nvSpPr>
         <p:spPr>
           <a:xfrm>
-            <a:off x="502920" y="4956048"/>
-            <a:ext cx="11185855" cy="365760"/>
+            <a:off x="502920" y="4718304"/>
+            <a:ext cx="11185855" cy="292608"/>
           </a:xfrm>
           <a:prstGeom prst="rect">
             <a:avLst/>
@@ -9728,7 +10578,7 @@
                 <a:ea typeface="Calibri" pitchFamily="34" charset="-122"/>
                 <a:cs typeface="Calibri" pitchFamily="34" charset="-120"/>
               </a:rPr>
-              <a:t>C₀ = solo el cambio 1 (batería → electrolizador)   ·   C_p = C₀ + planificador con el precio ya publicado   ·   C = versión completa, con la LSTM en el tramo no publicado</a:t>
+              <a:t>C₀ = solo el cambio 1 (batería → electrolizador)   ·   C_p = C₀ + planificador con el precio ya publicado   ·   C = versión completa, con la LSTM de precio en el tramo no publicado</a:t>
             </a:r>
             <a:endParaRPr lang="en-US" sz="1150" dirty="0"/>
           </a:p>
@@ -9736,13 +10586,55 @@
       </p:sp>
       <p:sp>
         <p:nvSpPr>
-          <p:cNvPr id="19" name="Shape 17"/>
+          <p:cNvPr id="19" name="Text 17"/>
+          <p:cNvSpPr txBox="1"/>
+          <p:nvPr/>
+        </p:nvSpPr>
+        <p:spPr>
+          <a:xfrm>
+            <a:off x="502920" y="5029200"/>
+            <a:ext cx="11185855" cy="475488"/>
+          </a:xfrm>
+          <a:prstGeom prst="rect">
+            <a:avLst/>
+          </a:prstGeom>
+          <a:noFill/>
+          <a:ln/>
+        </p:spPr>
+        <p:txBody>
+          <a:bodyPr wrap="square" lIns="0" tIns="0" rIns="0" bIns="0" rtlCol="0" anchor="t"/>
+          <a:lstStyle/>
+          <a:p>
+            <a:pPr indent="0" marL="0">
+              <a:lnSpc>
+                <a:spcPct val="110000"/>
+              </a:lnSpc>
+              <a:buNone/>
+            </a:pPr>
+            <a:r>
+              <a:rPr lang="en-US" sz="1150" dirty="0">
+                <a:solidFill>
+                  <a:srgbClr val="C8861E"/>
+                </a:solidFill>
+                <a:latin typeface="Calibri" pitchFamily="34" charset="0"/>
+                <a:ea typeface="Calibri" pitchFamily="34" charset="-122"/>
+                <a:cs typeface="Calibri" pitchFamily="34" charset="-120"/>
+              </a:rPr>
+              <a:t>La previsión solar sí interviene, y no aparece como escalón propio: el planificador la usa para estimar el excedente gratis del horizonte, así que su aportación va dentro de los 5,1 €.</a:t>
+            </a:r>
+            <a:endParaRPr lang="en-US" sz="1150" dirty="0"/>
+          </a:p>
+        </p:txBody>
+      </p:sp>
+      <p:sp>
+        <p:nvSpPr>
+          <p:cNvPr id="20" name="Shape 18"/>
           <p:cNvSpPr/>
           <p:nvPr/>
         </p:nvSpPr>
         <p:spPr>
           <a:xfrm>
-            <a:off x="502920" y="5440680"/>
+            <a:off x="502920" y="5596128"/>
             <a:ext cx="11185855" cy="566928"/>
           </a:xfrm>
           <a:prstGeom prst="roundRect">
@@ -9758,13 +10650,13 @@
       </p:sp>
       <p:sp>
         <p:nvSpPr>
-          <p:cNvPr id="20" name="Text 18"/>
-          <p:cNvSpPr txBox="1"/>
-          <p:nvPr/>
-        </p:nvSpPr>
-        <p:spPr>
-          <a:xfrm>
-            <a:off x="777240" y="5458968"/>
+          <p:cNvPr id="21" name="Text 19"/>
+          <p:cNvSpPr txBox="1"/>
+          <p:nvPr/>
+        </p:nvSpPr>
+        <p:spPr>
+          <a:xfrm>
+            <a:off x="777240" y="5614416"/>
             <a:ext cx="10637215" cy="530352"/>
           </a:xfrm>
           <a:prstGeom prst="rect">
@@ -9800,7 +10692,7 @@
       </p:sp>
       <p:sp>
         <p:nvSpPr>
-          <p:cNvPr id="21" name="Text 19"/>
+          <p:cNvPr id="22" name="Text 20"/>
           <p:cNvSpPr txBox="1"/>
           <p:nvPr/>
         </p:nvSpPr>
@@ -10022,7 +10914,7 @@
                 <a:ea typeface="Calibri" pitchFamily="34" charset="-122"/>
                 <a:cs typeface="Calibri" pitchFamily="34" charset="-120"/>
               </a:rPr>
-              <a:t>— Los tanques usan gas ideal: a 600 bar sobrestima ≈45 % la masa, la autonomía simulada es optimista</a:t>
+              <a:t>— Algunos bloques asumen simplificaciones, como la ecuación de gas ideal en los tanques: la autonomía simulada es optimista</a:t>
             </a:r>
             <a:endParaRPr lang="en-US" sz="1300" dirty="0"/>
           </a:p>
@@ -10061,7 +10953,7 @@
                 <a:ea typeface="Calibri" pitchFamily="34" charset="-122"/>
                 <a:cs typeface="Calibri" pitchFamily="34" charset="-120"/>
               </a:rPr>
-              <a:t>— La pila de combustible no arranca en ninguna simulación: el modo isla queda sin ejercitar</a:t>
+              <a:t>— La pila de combustible no llega a arrancar, porque la batería siempre cubre el déficit antes: el modo isla queda sin ejercitar</a:t>
             </a:r>
             <a:endParaRPr lang="en-US" sz="1300" dirty="0"/>
           </a:p>
@@ -10162,7 +11054,7 @@
                 <a:ea typeface="Calibri" pitchFamily="34" charset="-122"/>
                 <a:cs typeface="Calibri" pitchFamily="34" charset="-120"/>
               </a:rPr>
-              <a:t>— La irradiancia procede de un reanálisis, no de piranómetro ni de previsión meteorológica operativa</a:t>
+              <a:t>— La irradiancia sale de un reanálisis: sirve para entrenar, no es la señal que tendría la estación en tiempo real</a:t>
             </a:r>
             <a:endParaRPr lang="en-US" sz="1300" dirty="0"/>
           </a:p>
@@ -10201,7 +11093,7 @@
                 <a:ea typeface="Calibri" pitchFamily="34" charset="-122"/>
                 <a:cs typeface="Calibri" pitchFamily="34" charset="-120"/>
               </a:rPr>
-              <a:t>— La demanda de hidrógeno se aproxima por analogía con la de vehículos eléctricos</a:t>
+              <a:t>— La demanda de hidrógeno se construye por analogía con la eléctrica, porque todavía no hay flota de la que medirla</a:t>
             </a:r>
             <a:endParaRPr lang="en-US" sz="1300" dirty="0"/>
           </a:p>
@@ -10341,7 +11233,7 @@
                 <a:ea typeface="Calibri" pitchFamily="34" charset="-122"/>
                 <a:cs typeface="Calibri" pitchFamily="34" charset="-120"/>
               </a:rPr>
-              <a:t>— La referencia es una implementación concreta, no un algoritmo de referencia establecido</a:t>
+              <a:t>— Los umbrales y la reserva del 60 % están ajustados a esta instalación: otra exigiría recalibrarlos</a:t>
             </a:r>
             <a:endParaRPr lang="en-US" sz="1300" dirty="0"/>
           </a:p>
@@ -10571,7 +11463,7 @@
                 <a:ea typeface="Cambria" pitchFamily="34" charset="-122"/>
                 <a:cs typeface="Cambria" pitchFamily="34" charset="-120"/>
               </a:rPr>
-              <a:t>Dos modelos de previsión validados y corregidos</a:t>
+              <a:t>Dos modelos de previsión validados, corregidos y desplegados</a:t>
             </a:r>
             <a:endParaRPr lang="en-US" sz="1900" dirty="0"/>
           </a:p>
@@ -10610,7 +11502,7 @@
                 <a:ea typeface="Calibri" pitchFamily="34" charset="-122"/>
                 <a:cs typeface="Calibri" pitchFamily="34" charset="-120"/>
               </a:rPr>
-              <a:t>Ninguno bate solo a su línea base; la ponderación con el naive sí, y es lo que se despliega</a:t>
+              <a:t>La señal combinada supera a la línea base en solar y en precio, y es la que consume el EMS</a:t>
             </a:r>
             <a:endParaRPr lang="en-US" sz="1300" dirty="0"/>
           </a:p>
@@ -11782,7 +12674,7 @@
                 <a:ea typeface="Calibri" pitchFamily="34" charset="-122"/>
                 <a:cs typeface="Calibri" pitchFamily="34" charset="-120"/>
               </a:rPr>
-              <a:t>R1 semana completa con la Versión C   ·   R2 día nublado hora a hora   ·   R3 nivel del tanque en la semana nublada   ·   R4 predicción de precio en los cuatro días</a:t>
+              <a:t>R1 semana completa con la Versión C   ·   R2 día nublado hora a hora   ·   R3 nivel del tanque en la semana nublada</a:t>
             </a:r>
             <a:endParaRPr lang="en-US" sz="1300" dirty="0"/>
           </a:p>
@@ -11999,7 +12891,7 @@
                 <a:ea typeface="Calibri" pitchFamily="34" charset="-122"/>
                 <a:cs typeface="Calibri" pitchFamily="34" charset="-120"/>
               </a:rPr>
-              <a:t>Potencias en el bus de alterna · precio horario · SOC con la reserva del 60 % · nivel de los dos tanques con la zona crítica sombreada.</a:t>
+              <a:t>Potencias en el bus de alterna · precio horario · SOC con la reserva del 60 % · nivel de los dos tanques.</a:t>
             </a:r>
             <a:endParaRPr lang="en-US" sz="1200" dirty="0"/>
           </a:p>
@@ -12413,7 +13305,7 @@
                 <a:ea typeface="Calibri" pitchFamily="34" charset="-122"/>
                 <a:cs typeface="Calibri" pitchFamily="34" charset="-120"/>
               </a:rPr>
-              <a:t>Misma semilla, con la zona crítica sombreada</a:t>
+              <a:t>Misma semilla, Versión A frente a Versión C</a:t>
             </a:r>
             <a:endParaRPr lang="en-US" sz="1250" dirty="0"/>
           </a:p>
@@ -12470,262 +13362,10 @@
               </a:lnSpc>
               <a:buNone/>
             </a:pPr>
-            <a:r>
-              <a:rPr lang="en-US" sz="1150" dirty="0">
-                <a:solidFill>
-                  <a:srgbClr val="5F6B72"/>
-                </a:solidFill>
-                <a:latin typeface="Calibri" pitchFamily="34" charset="0"/>
-                <a:ea typeface="Calibri" pitchFamily="34" charset="-122"/>
-                <a:cs typeface="Calibri" pitchFamily="34" charset="-120"/>
-              </a:rPr>
-              <a:t>C pasa más tiempo en la zona crítica que A: es la contrapartida del ahorro, y está valorada dentro de la métrica de coste. El nivel baja de cero porque los integradores de los tanques tienen desactivada la saturación de salida: ese tramo negativo ES el indicador de hidrógeno no servido, y se valora a 8 €/kg dentro del coste total.</a:t>
-            </a:r>
             <a:endParaRPr lang="en-US" sz="1150" dirty="0"/>
           </a:p>
         </p:txBody>
       </p:sp>
-    </p:spTree>
-  </p:cSld>
-  <p:clrMapOvr>
-    <a:masterClrMapping/>
-  </p:clrMapOvr>
-</p:sld>
-</file>
-
-<file path=ppt/slides/slide24.xml><?xml version="1.0" encoding="utf-8"?>
-<p:sld xmlns:a="http://schemas.openxmlformats.org/drawingml/2006/main" xmlns:r="http://schemas.openxmlformats.org/officeDocument/2006/relationships" xmlns:p="http://schemas.openxmlformats.org/presentationml/2006/main">
-  <p:cSld name="Slide 24">
-    <p:bg>
-      <p:bgPr>
-        <a:solidFill>
-          <a:srgbClr val="FFFFFF"/>
-        </a:solidFill>
-      </p:bgPr>
-    </p:bg>
-    <p:spTree>
-      <p:nvGrpSpPr>
-        <p:cNvPr id="1" name=""/>
-        <p:cNvGrpSpPr/>
-        <p:nvPr/>
-      </p:nvGrpSpPr>
-      <p:grpSpPr>
-        <a:xfrm>
-          <a:off x="0" y="0"/>
-          <a:ext cx="0" cy="0"/>
-          <a:chOff x="0" y="0"/>
-          <a:chExt cx="0" cy="0"/>
-        </a:xfrm>
-      </p:grpSpPr>
-      <p:sp>
-        <p:nvSpPr>
-          <p:cNvPr id="2" name="Text 0"/>
-          <p:cNvSpPr txBox="1"/>
-          <p:nvPr/>
-        </p:nvSpPr>
-        <p:spPr>
-          <a:xfrm>
-            <a:off x="502920" y="310896"/>
-            <a:ext cx="3657600" cy="237744"/>
-          </a:xfrm>
-          <a:prstGeom prst="rect">
-            <a:avLst/>
-          </a:prstGeom>
-          <a:noFill/>
-          <a:ln/>
-        </p:spPr>
-        <p:txBody>
-          <a:bodyPr wrap="square" lIns="0" tIns="0" rIns="0" bIns="0" rtlCol="0" anchor="ctr"/>
-          <a:lstStyle/>
-          <a:p>
-            <a:pPr indent="0" marL="0">
-              <a:buNone/>
-            </a:pPr>
-            <a:r>
-              <a:rPr lang="en-US" sz="1000" b="1" spc="220" kern="0" dirty="0">
-                <a:solidFill>
-                  <a:srgbClr val="C8861E"/>
-                </a:solidFill>
-                <a:latin typeface="Calibri" pitchFamily="34" charset="0"/>
-                <a:ea typeface="Calibri" pitchFamily="34" charset="-122"/>
-                <a:cs typeface="Calibri" pitchFamily="34" charset="-120"/>
-              </a:rPr>
-              <a:t>RESERVA R4</a:t>
-            </a:r>
-            <a:endParaRPr lang="en-US" sz="1000" dirty="0"/>
-          </a:p>
-        </p:txBody>
-      </p:sp>
-      <p:sp>
-        <p:nvSpPr>
-          <p:cNvPr id="3" name="Text 1"/>
-          <p:cNvSpPr txBox="1"/>
-          <p:nvPr/>
-        </p:nvSpPr>
-        <p:spPr>
-          <a:xfrm>
-            <a:off x="502920" y="640080"/>
-            <a:ext cx="3794760" cy="1371600"/>
-          </a:xfrm>
-          <a:prstGeom prst="rect">
-            <a:avLst/>
-          </a:prstGeom>
-          <a:noFill/>
-          <a:ln/>
-        </p:spPr>
-        <p:txBody>
-          <a:bodyPr wrap="square" lIns="0" tIns="0" rIns="0" bIns="0" rtlCol="0" anchor="t"/>
-          <a:lstStyle/>
-          <a:p>
-            <a:pPr indent="0" marL="0">
-              <a:lnSpc>
-                <a:spcPct val="105000"/>
-              </a:lnSpc>
-              <a:buNone/>
-            </a:pPr>
-            <a:r>
-              <a:rPr lang="en-US" sz="2300" b="1" dirty="0">
-                <a:solidFill>
-                  <a:srgbClr val="10394A"/>
-                </a:solidFill>
-                <a:latin typeface="Cambria" pitchFamily="34" charset="0"/>
-                <a:ea typeface="Cambria" pitchFamily="34" charset="-122"/>
-                <a:cs typeface="Cambria" pitchFamily="34" charset="-120"/>
-              </a:rPr>
-              <a:t>Predicción de precio en los cuatro días de campaña</a:t>
-            </a:r>
-            <a:endParaRPr lang="en-US" sz="2300" dirty="0"/>
-          </a:p>
-        </p:txBody>
-      </p:sp>
-      <p:sp>
-        <p:nvSpPr>
-          <p:cNvPr id="4" name="Text 2"/>
-          <p:cNvSpPr txBox="1"/>
-          <p:nvPr/>
-        </p:nvSpPr>
-        <p:spPr>
-          <a:xfrm>
-            <a:off x="502920" y="2103120"/>
-            <a:ext cx="3794760" cy="548640"/>
-          </a:xfrm>
-          <a:prstGeom prst="rect">
-            <a:avLst/>
-          </a:prstGeom>
-          <a:noFill/>
-          <a:ln/>
-        </p:spPr>
-        <p:txBody>
-          <a:bodyPr wrap="square" lIns="0" tIns="0" rIns="0" bIns="0" rtlCol="0" anchor="t"/>
-          <a:lstStyle/>
-          <a:p>
-            <a:pPr indent="0" marL="0">
-              <a:buNone/>
-            </a:pPr>
-            <a:r>
-              <a:rPr lang="en-US" sz="1250" i="1" dirty="0">
-                <a:solidFill>
-                  <a:srgbClr val="5F6B72"/>
-                </a:solidFill>
-                <a:latin typeface="Calibri" pitchFamily="34" charset="0"/>
-                <a:ea typeface="Calibri" pitchFamily="34" charset="-122"/>
-                <a:cs typeface="Calibri" pitchFamily="34" charset="-120"/>
-              </a:rPr>
-              <a:t>LSTM frente a precio real y a la persistencia lag-24</a:t>
-            </a:r>
-            <a:endParaRPr lang="en-US" sz="1250" dirty="0"/>
-          </a:p>
-        </p:txBody>
-      </p:sp>
-      <p:sp>
-        <p:nvSpPr>
-          <p:cNvPr id="5" name="Shape 3"/>
-          <p:cNvSpPr/>
-          <p:nvPr/>
-        </p:nvSpPr>
-        <p:spPr>
-          <a:xfrm>
-            <a:off x="502920" y="2743200"/>
-            <a:ext cx="3794760" cy="0"/>
-          </a:xfrm>
-          <a:prstGeom prst="line">
-            <a:avLst/>
-          </a:prstGeom>
-          <a:noFill/>
-          <a:ln w="9525">
-            <a:solidFill>
-              <a:srgbClr val="DDE3E6"/>
-            </a:solidFill>
-            <a:prstDash val="solid"/>
-          </a:ln>
-        </p:spPr>
-      </p:sp>
-      <p:sp>
-        <p:nvSpPr>
-          <p:cNvPr id="6" name="Text 4"/>
-          <p:cNvSpPr txBox="1"/>
-          <p:nvPr/>
-        </p:nvSpPr>
-        <p:spPr>
-          <a:xfrm>
-            <a:off x="502920" y="2926080"/>
-            <a:ext cx="3794760" cy="3017520"/>
-          </a:xfrm>
-          <a:prstGeom prst="rect">
-            <a:avLst/>
-          </a:prstGeom>
-          <a:noFill/>
-          <a:ln/>
-        </p:spPr>
-        <p:txBody>
-          <a:bodyPr wrap="square" lIns="0" tIns="0" rIns="0" bIns="0" rtlCol="0" anchor="t"/>
-          <a:lstStyle/>
-          <a:p>
-            <a:pPr indent="0" marL="0">
-              <a:lnSpc>
-                <a:spcPct val="118000"/>
-              </a:lnSpc>
-              <a:buNone/>
-            </a:pPr>
-            <a:r>
-              <a:rPr lang="en-US" sz="1200" dirty="0">
-                <a:solidFill>
-                  <a:srgbClr val="1C1C1C"/>
-                </a:solidFill>
-                <a:latin typeface="Calibri" pitchFamily="34" charset="0"/>
-                <a:ea typeface="Calibri" pitchFamily="34" charset="-122"/>
-                <a:cs typeface="Calibri" pitchFamily="34" charset="-120"/>
-              </a:rPr>
-              <a:t>La red sigue el perfil pero comprime la amplitud: el recorrido previsto es el 36 % del real en el escenario nublado y el 55 % de media.</a:t>
-            </a:r>
-            <a:endParaRPr lang="en-US" sz="1200" dirty="0"/>
-          </a:p>
-        </p:txBody>
-      </p:sp>
-      <p:pic>
-        <p:nvPicPr>
-          <p:cNvPr id="7" name="Image 0" descr="img/lstm_precio_PrediccionEnLosDiasDeLaCampana.png">    </p:cNvPr>
-          <p:cNvPicPr>
-            <a:picLocks noChangeAspect="1"/>
-          </p:cNvPicPr>
-          <p:nvPr/>
-        </p:nvPicPr>
-        <p:blipFill>
-          <a:blip r:embed="rId1"/>
-          <a:stretch>
-            <a:fillRect/>
-          </a:stretch>
-        </p:blipFill>
-        <p:spPr>
-          <a:xfrm>
-            <a:off x="4709160" y="640080"/>
-            <a:ext cx="6979615" cy="5525823"/>
-          </a:xfrm>
-          <a:prstGeom prst="rect">
-            <a:avLst/>
-          </a:prstGeom>
-        </p:spPr>
-      </p:pic>
     </p:spTree>
   </p:cSld>
   <p:clrMapOvr>

--- a/defensa/OASIS_defensa_TFG.pptx
+++ b/defensa/OASIS_defensa_TFG.pptx
@@ -617,10 +617,10 @@
             <a:r>
               <a:rPr lang="en-US" dirty="0"/>
               <a:t>Para comparar los gestores hacen falta escenarios, y no los elegí al azar: cruzan las dos variables que gobiernan la decisión del EMS, recurso solar y régimen de precio.
-Un laborable soleado con precio plano. Un laborable nublado, con índice de claridad de cero coma treinta y seis y punta de ciento noventa y cuatro euros el megavatio-hora, que es el caso sin excedente. Un fin de semana soleado con precio casi nulo a mediodía. Y el día de mayor diferencial de dos mil veinticinco, de veinticuatro a doscientos cincuenta y dos euros.
-Y cada uno se repite con varias semillas del generador de demanda, porque la demanda es estocástica.
+Un laborable soleado con precio plano. Un laborable nublado, que es el caso sin excedente, con punta de precio por la tarde. Un fin de semana soleado, con precio casi nulo a mediodía. Y el de mayor diferencial de precio de todo dos mil veinticinco.
+Cada escenario no se simula como un día suelto, sino como la semana real de siete días que arranca en esa fecha, con su precio y su irradiancia de calendario. Y cada uno se repite con cinco semillas del generador de demanda.
 — — — — —
-NO SE DICE · objetivo 0:49 · Enlaza directa con la siguiente: «y esas semillas son la clave de cómo comparo».</a:t>
+NO SE DICE · objetivo 0:52 · Enlaza directa con la siguiente: «y esas semillas son la clave de cómo comparo».</a:t>
             </a:r>
             <a:endParaRPr lang="en-US" dirty="0"/>
           </a:p>
@@ -803,10 +803,10 @@
             <a:r>
               <a:rPr lang="en-US" dirty="0"/>
               <a:t>El primer gestor, la Versión A, es la referencia: viene del TFM previo del grupo y lo he portado a esta arquitectura.
-Quiero insistir en lo que ya trae, porque condiciona cómo se lee todo lo demás. Reparto dinámico de potencia entre batería y electrolizador por tramos de estado de carga. Tiempo mínimo de funcionamiento de dos horas con histéresis y anti-rebote, para que los equipos electroquímicos no conmuten cada pocos minutos. La gestión de los dos niveles de presión con su compresor. Y una decisión económica de producir hidrógeno frente a reponerlo fuera.
+Quiero insistir en lo que ya trae, porque condiciona cómo se lee todo lo demás. Tienen las cuatro en pantalla; me detengo en dos. El tiempo mínimo de funcionamiento de dos horas con histéresis, para que los equipos electroquímicos no conmuten cada pocos minutos. Y una decisión económica de producir, que compara el coste del kilogramo producido aquí con lo que costaría reponerlo fuera.
 Es decir, ya tiene los mecanismos que distinguen a un gestor de reglas maduro de un reparto por prioridades. Lo que no tiene es ninguna predicción.
 — — — — —
-NO SE DICE · objetivo 0:54 · Si el tribunal no retiene esto, el 14 % del final parecerá fácil. Insiste.</a:t>
+NO SE DICE · objetivo 0:50 · Si el tribunal no retiene esto, el 14 % del final parecerá fácil. Insiste.</a:t>
             </a:r>
             <a:endParaRPr lang="en-US" dirty="0"/>
           </a:p>
@@ -895,11 +895,11 @@
             <a:r>
               <a:rPr lang="en-US" dirty="0"/>
               <a:t>La Versión B es la misma heurística con las dos previsiones metidas dentro. No cambia la arquitectura: cambia lo que mira la regla en el momento de decidir.
-La previsión solar entra en el reparto del excedente: antes dependía solo del estado de carga de ese instante; ahora, si la previsión anticipa que el excedente va a caer, el reparto se desplaza hacia la batería antes de que caiga. Y la de precio gobierna un arbitraje de batería.
-B tiene una victoria y un empate. La victoria es el servicio de hidrógeno, en treinta y nueve de cuarenta pares, y lo importante no es el tamaño sino que escala con la calidad de la previsión: con el oráculo se multiplica por diez. Lo que limita es la predicción, no el diseño.
-El empate es el coste, y de ahí sale la regla de diseño que aplico después: la primera versión del arbitraje traducía «el precio va a subir» en una acción de tamaño fijo, y empeoraba el coste, más cuanto mejor era la previsión. Una acción disparada por una previsión tiene que estar condicionada, y su tamaño salir del margen económico disponible.
+La previsión solar entra en el reparto del excedente: antes dependía solo del estado de carga del instante; ahora, si se anticipa que el excedente va a caer, el reparto se desplaza hacia la batería antes de que caiga. Y la de precio gobierna un arbitraje de batería.
+B se comparó sobre veinticuatro horas con diez semillas, cuarenta pares, porque ahí lo que importa es la dinámica eléctrica. Y tiene una victoria y un empate. La victoria es el servicio de hidrógeno —el nivel medio del tanque de alta y el tiempo que pasa por debajo del nivel crítico—: mejora en treinta y nueve de los cuarenta pares. La mejora es pequeña, pero escala con la calidad de la previsión: con el oráculo se multiplica por diez. Lo que limita es la predicción, no el diseño.
+El empate es el coste, y de ahí sale la regla de diseño que aplico después: la primera versión del arbitraje traducía «el precio va a subir» en una acción de tamaño fijo, y empeoraba el coste, más cuanto mejor era la previsión. Una acción disparada por una previsión tiene que salir del margen económico disponible, no de una constante.
 — — — — —
-NO SE DICE · objetivo 1:25 · Tono de quien informa. B tiene su victoria y la cuentas primero; el empate en coste viene después y sin disculpas.</a:t>
+NO SE DICE · objetivo 1:40 · Tono de quien informa. B tiene su victoria y la cuentas primero; el empate en coste viene después y sin disculpas.</a:t>
             </a:r>
             <a:endParaRPr lang="en-US" dirty="0"/>
           </a:p>
@@ -987,12 +987,12 @@
           <a:p>
             <a:r>
               <a:rPr lang="en-US" dirty="0"/>
-              <a:t>Al descomponer la importación de la Versión A por destinos aparece esto, y es lo que motiva el tercer gestor.
+              <a:t>B no movió el coste, así que la pregunta pasó a ser dónde se va ese dinero. Volví a la Versión A y descompuse su importación de red por destinos, y apareció esto.
 De los mil trescientos veintiún kilovatios-hora que compra a la red en una semana, el setenta y seis por ciento van al electrolizador, a ciento veintiuno con cinco euros el megavatio-hora. Y en los instantes exactos en que los compra, la batería está al ochenta y cinco por ciento de media.
 Pongan eso junto al otro lado del balance: en esa misma semana la estación exporta catorce mil kilovatios-hora a treinta y nueve euros. Vende diez veces más energía de la que compra, y la compra tres veces más cara de lo que la vende. Está pasando la misma energía dos veces por el contador, y perdiendo en los dos sentidos.
 El motivo está en el orden del código: la batería cubre primero los vehículos y, en un paso posterior, la decisión económica enciende el electrolizador; esa carga nueva no se le vuelve a ofrecer, así que la absorbe la red.
 — — — — —
-NO SE DICE · objetivo 1:17 · Sobrio. Es un diagnóstico de ingeniería, no una revelación. Deja aire entre las tres cifras y sigue.</a:t>
+NO SE DICE · objetivo 1:23 · Sobrio. Es un diagnóstico de ingeniería, no una revelación. Deja aire entre las tres cifras y sigue.</a:t>
             </a:r>
             <a:endParaRPr lang="en-US" dirty="0"/>
           </a:p>
@@ -1081,12 +1081,12 @@
             <a:r>
               <a:rPr lang="en-US" dirty="0"/>
               <a:t>La Versión C separa dos decisiones que la heurística tomaba juntas: de dónde sale la energía del electrolizador y cuándo conviene producir. En pantalla, los cuatro pasos de la lógica común, con los dos que sustituyo en ámbar.
-El primero son diez líneas: la carga que crea la decisión de producir hidrógeno se le ofrece a la batería antes que a la red, mientras el estado de carga esté por encima del sesenta por ciento. Ese sesenta sale del contrafactual del diagnóstico anterior.
+El primero son diez líneas: la carga que crea la decisión de producir hidrógeno se le ofrece a la batería antes que a la red, mientras el estado de carga esté por encima del sesenta por ciento, que sale del contrafactual del diagnóstico anterior.
 El segundo es un planificador: estima cuánto hidrógeno falta y cuánto excedente gratis viene, y de ahí salen las horas de electrolizador que hay que comprar a la red, que se colocan en las más baratas del horizonte.
-Conviene precisar de dónde sale ese precio. El mercado diario publica sobre la una de la tarde las veinticuatro horas del día siguiente: la parte del horizonte ya publicada se usa tal cual, y solo se predice el tramo que aún no ha salido a mercado.
+Y conviene precisar de dónde sale ese precio: el mercado diario publica sobre la una de la tarde las veinticuatro horas del día siguiente, así que la parte ya publicada se usa tal cual y solo se predice el tramo que falta.
 Y lo que hace defendible la regla es que solo usa el orden: la decisión es «estoy entre las ene más baratas, sí o no», y eso no cambia si la previsión falla en el nivel mientras acierte en el orden.
 — — — — —
-NO SE DICE · objetivo 1:33 · La invariancia monótona es el argumento más elegante del trabajo. Dilo despacio.</a:t>
+NO SE DICE · objetivo 1:31 · La invariancia monótona es el argumento más elegante del trabajo. Dilo despacio.</a:t>
             </a:r>
             <a:endParaRPr lang="en-US" dirty="0"/>
           </a:p>
@@ -1175,12 +1175,12 @@
             <a:r>
               <a:rPr lang="en-US" dirty="0"/>
               <a:t>Los resultados de la Versión C, sobre siete días y veinte pares escenario-semilla.
-La figura es la diferencia de coste de cada versión frente a la A, escenario por escenario, y la banda gris es el umbral de relevancia. La Versión B cae dentro de la banda en los cuatro: en coste empata. La C se sale por la izquierda en los cuatro, y por bastante.
-En la tabla, las tres métricas: cincuenta y dos euros con tres menos por semana, un trece coma nueve por ciento, ganando en los veinte pares; un cincuenta y cuatro por ciento menos de importación; y la autosuficiencia del ochenta y siete coma siete al noventa y cuatro coma tres.
-El orden entre escenarios no lo fija el excedente disponible, sino el precio al que compraba el electrolizador: se ahorra más donde más caro compraba.
-Y la mejora tiene un precio, que declaro yo: la batería cicla dos coma dos veces más, con la degradación sin modelar, y en el nublado hay que reponer desde fuera tres kilos de hidrógeno a la semana en vez de uno. Valorado dentro del coste, pero es un dato de operación.
+La figura es la diferencia de coste frente a la A, escenario por escenario; la banda gris es el umbral de relevancia. B cae dentro de la banda en los cuatro: en coste empata. C se sale por la izquierda en los cuatro, y por bastante.
+En la tabla, tres métricas. El coste baja unos cincuenta y dos euros por semana: casi un catorce por ciento, y gana en los veinte pares. La importación de red cae a la mitad, un cincuenta y cuatro por ciento. Y la autosuficiencia sube del ochenta y ocho al noventa y cuatro por ciento.
+El orden entre escenarios no lo fija el excedente, sino el precio al que compraba el electrolizador: se ahorra más donde más caro compraba.
+Y la mejora tiene un precio, que declaro yo. Los tres kilos de hidrógeno que hay que reponer desde fuera en el nublado sí están valorados dentro de esos cincuenta y dos euros. El ciclado no: la batería mueve dos coma dos veces más energía y la degradación no está modelada. Es la principal reserva que le pongo yo mismo al resultado.
 — — — — —
-NO SE DICE · objetivo 1:26 · El contrapeso va en la misma diapositiva y lo dices tú. No lo dejes para que lo pregunten.</a:t>
+NO SE DICE · objetivo 1:29 · El contrapeso va en la misma diapositiva y lo dices tú. No lo dejes para que lo pregunten.</a:t>
             </a:r>
             <a:endParaRPr lang="en-US" dirty="0"/>
           </a:p>
@@ -1268,12 +1268,12 @@
           <a:p>
             <a:r>
               <a:rPr lang="en-US" dirty="0"/>
-              <a:t>Y como cada mecanismo tiene su interruptor, la mejora se puede atribuir pieza a pieza. Tres tandas, el mismo fichero, los mismos veinte pares. C-cero es solo el primer cambio; C-pe le añade el planificador con el precio ya publicado; y C es la versión completa.
+              <a:t>Como cada mecanismo tiene su interruptor, la mejora se atribuye pieza a pieza. Tres tandas, el mismo fichero, los mismos veinte pares: la versión con solo el primer cambio, la que le añade el planificador con el precio ya publicado, y la completa.
 Alimentar el electrolizador desde la batería, solo eso: menos cuarenta y siete euros con uno. El noventa por ciento del ahorro, en veinte de veinte pares.
-Añadir la programación de las horas: cinco euros con uno más. Significativa, pero por debajo de mi umbral de relevancia, así que la declaro como tal. El mecanismo no es comprar más barato, sino comprar menos.
-Y añadir la red neuronal de precio: cero. Las dos tandas salen idénticas a precisión de máquina en los cuarenta indicadores. La razón es de disponibilidad de información: el mercado diario publica a las trece horas el precio del día siguiente, así que entre once y treinta y cinco horas del horizonte no hay nada que predecir.
+Añadir el planificador: cinco euros más. Y es aquí donde entra la previsión solar, porque el planificador la usa para estimar cuánto excedente gratis viene: su aportación está dentro de esta cifra y no se puede aislar de ella. Wilcoxon la da por significativa, pero cae por debajo de mi umbral de nueve, así que la declaro empate. El mecanismo no es comprar más barato, sino comprar menos.
+Y añadir la red neuronal de precio: cero. Las dos tandas salen idénticas a precisión de máquina en los cuarenta indicadores. La razón es de disponibilidad de información: el mercado publica a las trece horas el día siguiente, así que el planificador ve entre once y treinta y cinco horas ya publicadas. Solo hay que predecir lo que quede del horizonte, y en la campaña ese tramo no cambió ni una de las decisiones.
 — — — — —
-NO SE DICE · objetivo 1:14 · Sin dramatizar el cero. Es un dato de la atribución, y la atribución es la aportación metodológica del trabajo. SI TE ATACAN EL TÍTULO («habla de LSTM y el 90 % no la usa»): el título dice CUANTIFICAR la mejora de la predicción, y cuantificar incluye que salga pequeña. B sí usa previsión y sí mejora, pero en servicio de hidrógeno, no en coste. Ver pregunta 26.</a:t>
+NO SE DICE · objetivo 1:34 · Sin dramatizar el cero. Es un dato de la atribución, y la atribución es la aportación metodológica del trabajo. SI TE ATACAN EL TÍTULO («habla de LSTM y el 90 % no la usa»): el título dice CUANTIFICAR la mejora de la predicción, y cuantificar incluye que salga pequeña. B sí usa previsión y sí mejora, pero en servicio de hidrógeno, no en coste. Ver pregunta 26.</a:t>
             </a:r>
             <a:endParaRPr lang="en-US" dirty="0"/>
           </a:p>
@@ -1361,12 +1361,12 @@
           <a:p>
             <a:r>
               <a:rPr lang="en-US" dirty="0"/>
-              <a:t>Las limitaciones, agrupadas por a qué afectan.
-Del modelo físico: algunos bloques asumen simplificaciones, la más relevante la ecuación de gas ideal en los tanques, que hace caber más hidrógeno del que cabría de verdad. Y la pila no llega a arrancar, que no es un fallo del gestor sino la decisión correcta: recuperar electricidad a partir del hidrógeno es el camino más caro y con más pérdidas de la estación, y mientras haya batería o red nunca compensa. La pila tiene sentido en modo isla, y ese modo no lo ejercito.
-De los datos: la irradiancia sale de un reanálisis, que es lo que hace falta para entrenar, pero no es la señal que tendría la estación en tiempo real; cambiarla por una previsión operativa no toca el modelo, solo la entrada. Y la demanda de hidrógeno se construye por analogía con la eléctrica porque aún no hay flota de la que medirla; lo importante es que es la misma para las tres versiones, así que no favorece a ninguna.
+              <a:t>Las limitaciones, agrupadas según a qué afectan.
+Del modelo físico: algunos bloques asumen simplificaciones, la más relevante la ecuación de gas ideal en los tanques, que hace caber más hidrógeno del que cabría de verdad. Y la pila no llega a arrancar, que no es un fallo del gestor sino la decisión correcta: recuperar electricidad del hidrógeno es el camino más caro y con más pérdidas de la estación. Tiene sentido en modo isla, y ese modo no lo ejercito.
+De los datos: la irradiancia sale de un reanálisis, que es lo que hace falta para entrenar pero no es la señal que tendría la estación en tiempo real; cambiarla por una previsión operativa no toca el modelo, solo la entrada. Y la demanda de hidrógeno se construye por analogía con la eléctrica porque aún no hay flota de la que medirla; es la misma para las tres versiones, así que no favorece a ninguna.
 Y de alcance: el coste no incluye peajes ni cargos, así que las cifras son comparativas. Y los umbrales están ajustados a esta instalación: llevar el algoritmo a otra exige recalibrarlos, no solo copiarlo.
 — — — — —
-NO SE DICE · objetivo 1:31 · Rápido y sin dramatizar. Cada una de estas seis es una pregunta que el tribunal ya no necesita hacerte. SI PREGUNTAN POR EL GAS IDEAL: la cifra exacta con tablas NIST es 40 %, no 45 (Z = 1,40 a 600 bar y 15 °C); el 45 sale de interpolar entre dos densidades publicadas. Dala tú. SI PREGUNTAN POR LA PILA: el bloque tiene 120 celdas de 600 cm² y 600 A; su curva de polarización da el máximo en ~156 A y son unos 11 kW, no los 130 del criterio de diseño. No contamina ningún resultado porque la pila no arranca nunca, pero el modo isla no está cubierto ni sobre el papel del modelo.</a:t>
+NO SE DICE · objetivo 1:24 · Rápido y sin dramatizar. Cada una de estas seis es una pregunta que el tribunal ya no necesita hacerte. SI PREGUNTAN POR EL GAS IDEAL: la cifra exacta con tablas NIST es 40 %, no 45 (Z = 1,40 a 600 bar y 15 °C); el 45 sale de interpolar entre dos densidades publicadas. Dala tú. SI PREGUNTAN POR LA PILA: el bloque tiene 120 celdas de 600 cm² y 600 A; su curva de polarización da el máximo en ~156 A y son unos 11 kW, no los 130 del criterio de diseño. No contamina ningún resultado porque la pila no arranca nunca, pero el modo isla no está cubierto ni sobre el papel del modelo.</a:t>
             </a:r>
             <a:endParaRPr lang="en-US" dirty="0"/>
           </a:p>
@@ -1456,12 +1456,12 @@
               <a:rPr lang="en-US" dirty="0"/>
               <a:t>La pregunta del trabajo era si una previsión con redes LSTM mejora a un EMS heurístico ya maduro. La respuesta, medida, son estas tres conclusiones.
 Dos modelos entrenados, validados y corregidos, cuya señal combinada supera a la línea base en solar y en precio, y es la que consume el simulador.
-Tres gestores comparados sobre la misma instalación: la predictiva mejora la seguridad de suministro de hidrógeno, y la final reduce el coste semanal casi un catorce por ciento en los veinte casos.
+Tres gestores sobre la misma instalación: la predictiva mejora el servicio de hidrógeno, y la final reduce el coste semanal casi un catorce por ciento en los veinte casos.
 Y la tercera, que da sentido a las otras dos: la cadena de medida permite atribuir la mejora pieza a pieza. El valor de una previsión depende de en qué decisión se inserte y de qué información no esté ya disponible.
-Cuatro líneas futuras. Aislar la previsión solar, dándole al planificador el excedente real en vez del previsto, para medir por separado lo que hoy va sumado. Dar al tanque un nivel objetivo antes de un día nublado previsto, que corregiría el único indicador que C empeora. Modelar la degradación de la batería. Y ampliar el horizonte a cuarenta y ocho horas con control predictivo: es el único tramo donde el mercado ya no está publicado y una red de precio volvería a aportar.
+Cuatro líneas futuras. Aislar la previsión solar, para medir por separado lo que hoy va sumado dentro de la programación. Dar al tanque un nivel objetivo antes de un día nublado previsto, que corregiría el único indicador que C empeora. Modelar la degradación de la batería. Y ampliar el horizonte a cuarenta y ocho horas con control predictivo: es el único tramo donde el mercado ya no está publicado.
 Muchas gracias por su atención.
 — — — — —
-NO SE DICE · objetivo 1:34 · Levanta la vista en la tercera conclusión. Cierra con firmeza, sin arrastrar el «muchas gracias».</a:t>
+NO SE DICE · objetivo 1:27 · Levanta la vista en la tercera conclusión. Cierra con firmeza, sin arrastrar el «muchas gracias».</a:t>
             </a:r>
             <a:endParaRPr lang="en-US" dirty="0"/>
           </a:p>
@@ -1550,12 +1550,12 @@
             <a:r>
               <a:rPr lang="en-US" dirty="0"/>
               <a:t>El transporte es una cuarta parte de las emisiones de la Unión, y casi tres cuartas partes de esa fracción son carretera. Es uno de los focos que el Pacto Verde Europeo tiene que cerrar.
-El marco ya pone fechas. La Hoja de Ruta del Hidrógeno española fija entre cien y ciento cincuenta hidrogeneras públicas para dos mil treinta y sitúa los corredores de repostaje verde como prioridad; el PNIEC fija cinco millones y medio de vehículos eléctricos para esa fecha; y el reglamento europeo AFIR convierte el despliegue de recarga en objetivos vinculantes.
+El marco ya pone fechas. La Hoja de Ruta del Hidrógeno fija entre cien y ciento cincuenta hidrogeneras públicas para dos mil treinta, y sitúa los corredores de repostaje verde como prioridad. El PNIEC fija cinco millones y medio de vehículos eléctricos en España para esa misma fecha. Y el reglamento europeo AFIR convierte el despliegue de recarga en objetivos vinculantes.
 El problema es esa fragmentación: cada vector arrastra hoy su propia infraestructura y su propia inversión.
-Y ya hay precedentes. Repsol inauguró en dos mil veinticinco la estación de Morro Jable, en Fuerteventura: fotovoltaica, baterías, pila de hidrógeno y recarga eléctrica. Es casi la combinación de OASIS, a menor escala y sin electrolizador propio.
+Y ya hay precedentes: Repsol inauguró en dos mil veinticinco la estación de Morro Jable, en Fuerteventura, que es casi la combinación de componentes de OASIS a menor escala y sin electrolizador propio.
 Con esa integración el reto deja de ser de dimensionamiento y pasa a ser de operación: decidir, en cada instante, de dónde sale cada kilovatio.
 — — — — —
-NO SE DICE · objetivo 1:17 · Las dos referencias que demuestran que has investigado —H2ME y Morro Jable— van habladas, no en pantalla. Morro Jable es tu mejor baza: casi los mismos componentes que OASIS.</a:t>
+NO SE DICE · objetivo 1:16 · Las dos referencias que demuestran que has investigado —H2ME y Morro Jable— van habladas, no en pantalla. Morro Jable es tu mejor baza: casi los mismos componentes que OASIS.</a:t>
             </a:r>
             <a:endParaRPr lang="en-US" dirty="0"/>
           </a:p>
@@ -1995,11 +1995,10 @@
           <a:p>
             <a:r>
               <a:rPr lang="en-US" dirty="0"/>
-              <a:t>Esta es la instalación: la microrred OASIS del departamento, modelada en Simulink sobre la librería Simugrid. Quinientos kilovatios pico de fotovoltaica en marquesina, una batería de un megavatio-hora, un electrolizador PEM de doscientos kilovatios, dos tanques de hidrógeno a distinta presión con su compresor, una pila de combustible y dos cargadores rápidos.
-El caso base con el que se ha dimensionado es el panorama actual proyectado a dos mil treinta, el de las cifras de la diapositiva anterior, y no un escenario de penetración masiva.
-De todas estas cifras, dos están dimensionadas en este trabajo y no heredadas: la potencia del cargador y su número. Las justifico enseguida con los datos de demanda.
+              <a:t>Esta es la instalación: la microrred OASIS del departamento, modelada en Simulink sobre la librería Simugrid. Tienen en pantalla los seis componentes con sus tamaños; el orden de magnitud es medio megavatio de fotovoltaica, un megavatio-hora de batería y doscientos kilovatios de electrolizador.
+El modelo de Simulink viene del trabajo previo del grupo, y lo primero que hice fue ajustar su parametrización a la escala de una electrolinera, para que la estación no quedara sobredimensionada. Y hay dos tamaños que sí salen de la demanda medida: los cargadores, cincuenta kilovatios y dos unidades, y la pila de combustible, ciento treinta kilovatios, que es el pico de los dos cargadores más el compresor y un margen del diez por ciento. En dos diapositivas están los datos de demanda que lo sostienen.
 — — — — —
-NO SE DICE · objetivo 0:51 · No recites la tabla: está en pantalla. Lo que aportas hablando es la distinción entre heredado y dimensionado.</a:t>
+NO SE DICE · objetivo 0:58 · No recites la tabla: está en pantalla. Lo que aportas hablando es la distinción entre heredado y dimensionado.</a:t>
             </a:r>
             <a:endParaRPr lang="en-US" dirty="0"/>
           </a:p>
@@ -2087,12 +2086,12 @@
           <a:p>
             <a:r>
               <a:rPr lang="en-US" dirty="0"/>
-              <a:t>El gestor de energía es este único bloque de Simulink, y toma tres decisiones.
+              <a:t>El gestor de energía —el EMS, por sus siglas en inglés— es este único bloque de Simulink, y toma tres decisiones.
 Cuando sobra sol, cómo repartir el excedente entre cargar la batería y producir hidrógeno. Cuando falta, en qué orden cubrir el déficit: batería, pila, red. Y en todo momento, si conviene producir hidrógeno o reponerlo desde fuera, comparando el coste del kilogramo producido aquí con su precio de reposición.
 Todas las versiones que voy a comparar mantienen exactamente esta firma. Cambia el script del bloque de decisión y nada más: el mismo modelo físico, los mismos perfiles de entrada, la misma semilla de demanda.
 Y el objetivo del trabajo no es solo mejorar ese gestor, sino poder atribuir la mejora: cuánto viene de la predicción y cuánto de las reglas que la consumen.
 — — — — —
-NO SE DICE · objetivo 0:56 · «Solo cambia el bloque de decisión» es tu primer blindaje metodológico.</a:t>
+NO SE DICE · objetivo 1:00 · «Solo cambia el bloque de decisión» es tu primer blindaje metodológico.</a:t>
             </a:r>
             <a:endParaRPr lang="en-US" dirty="0"/>
           </a:p>
@@ -2181,12 +2180,12 @@
             <a:r>
               <a:rPr lang="en-US" dirty="0"/>
               <a:t>El primer bloque de datos sirve para dimensionar, y fija dos parámetros de la instalación.
-La fuente es DESL-EPFL, casi mil novecientas sesiones reales de carga rápida, con una energía media de treinta y dos kilovatios-hora. La contrasto con Caltech, que es carga lenta, para comprobar que son familias distintas.
-De ahí salen las dos decisiones. Los cincuenta kilovatios del cargador, que es el estándar europeo de carga rápida en continua y que con la energía media cubren una sesión en unos cuarenta minutos, sin exigir transformador de media tensión. Y que los cargadores sean dos, por teoría de colas sobre la hora punta: con dos, la espera se mantiene acotada.
-Dimensiono sobre el panorama actual a propósito: es el escenario del que hay datos reales, y escalar hacia arriba siempre es más fácil que hacia abajo, más aún con una arquitectura modular como esta.
+La fuente es DESL-EPFL, casi mil novecientas sesiones reales de carga rápida con una energía media de treinta y dos kilovatios-hora, contrastadas con las de Caltech para comprobar que carga rápida y carga lenta son familias distintas.
+De ahí salen las dos cifras del dimensionado. Cincuenta kilovatios cubren una sesión media en unos cuarenta minutos sin exigir transformador de media tensión. Y el número de cargadores sale de la cola en hora punta: con uno la espera media se va a media hora, con dos baja a dos minutos, y el tercero ya no compensa.
+Dimensiono sobre el panorama actual a propósito: es el escenario del que hay datos reales, y escalar hacia arriba es más fácil que hacia abajo, más con una arquitectura modular como esta.
 Con esas distribuciones se genera el perfil de demanda de cada simulación. Es estocástico, y eso importará en la comparación.
 — — — — —
-NO SE DICE · objetivo 1:14 · Este bloque es trabajo tuyo de principio a fin. Cuéntalo con calma: es lo que justifica que la instalación sea creíble.</a:t>
+NO SE DICE · objetivo 1:13 · Este bloque es trabajo tuyo de principio a fin. Cuéntalo con calma: es lo que justifica que la instalación sea creíble.</a:t>
             </a:r>
             <a:endParaRPr lang="en-US" dirty="0"/>
           </a:p>
@@ -2275,11 +2274,11 @@
             <a:r>
               <a:rPr lang="en-US" dirty="0"/>
               <a:t>El segundo bloque es el de entrenamiento, y son dos fuentes públicas alineadas hora a hora.
-Para la irradiancia, NASA POWER, que es un reanálisis meteorológico: de ahí saco, para el punto de Sevilla, casi veinte años de registro horario y las variables que explican la nubosidad. Un detalle que merece la pena: la hora y el día no entran como un número, sino codificados en seno y coseno, para que el modelo sepa que las once y las doce de la noche son contiguas y no los dos extremos de una escala.
+Para la irradiancia, NASA POWER, que es un reanálisis meteorológico: de ahí saco, para el punto de Sevilla, casi veinte años de registro horario y las variables que explican la nubosidad. Un detalle que merece la pena: la hora y el día no entran como un número, sino codificados en seno y coseno, para que el modelo sepa que las once de la noche y la medianoche —que en la escala numérica son el veintitrés y el cero— están pegadas, y no en los extremos opuestos.
 Para el precio, las casaciones del mercado diario español a través de ENTSO-E. Además del histórico, entra el contexto que explica su deriva: sobre todo la capacidad fotovoltaica instalada en España, que ha crecido lo suficiente como para cambiar la forma del precio a mediodía.
 Y un detalle que importa: el reparto entre entrenamiento y prueba es temporal, nunca aleatorio. Mezclar horas le regalaría al modelo información del futuro.
 — — — — —
-NO SE DICE · objetivo 1:12 · La frase del split es la que te compra credibilidad con un tribunal que sabe de aprendizaje automático.</a:t>
+NO SE DICE · objetivo 1:16 · La frase del split es la que te compra credibilidad con un tribunal que sabe de aprendizaje automático.</a:t>
             </a:r>
             <a:endParaRPr lang="en-US" dirty="0"/>
           </a:p>
@@ -2367,11 +2366,11 @@
           <a:p>
             <a:r>
               <a:rPr lang="en-US" dirty="0"/>
-              <a:t>Las dos redes comparten arquitectura: dos capas LSTM apiladas, de ciento veintiocho y sesenta y cuatro unidades, con dropout, capa densa y salida de veinticuatro valores, el horizonte de un día. Se entrenan con Adam y paran por criterio de validación. En pantalla, la curva de RMSE: azul entrenamiento, negro validación. No se separan: no hay sobreajuste.
+              <a:t>Las dos redes comparten arquitectura: dos capas LSTM apiladas —redes recurrentes con memoria larga— y una salida de veinticuatro valores, que es el horizonte de un día. Se entrenan con Adam y paran por criterio de validación. En pantalla, la curva de RMSE: azul entrenamiento, negro validación. No se separan: no hay sobreajuste.
 Entreno con RMSE, el error cuadrático medio, porque al elevar al cuadrado penaliza mucho más un fallo grande que varios pequeños, y aquí lo que rompe una decisión es el fallo grande: no ver una punta de precio o una caída de sol. Para comparar modelos uso después el error absoluto medio, que está en las unidades de la variable y no lo dominan cuatro horas atípicas.
 Una diferencia que importa: el modelo solar puede imponer que la irradiancia predicha no sea negativa. El de precio no, porque el precio admite negativos.
 — — — — —
-NO SE DICE · objetivo 1:06 · Rápida. Es la diapositiva de «así están hechas», no de resultados.</a:t>
+NO SE DICE · objetivo 1:04 · Rápida. Es la diapositiva de «así están hechas», no de resultados.</a:t>
             </a:r>
             <a:endParaRPr lang="en-US" dirty="0"/>
           </a:p>
@@ -2462,9 +2461,9 @@
               <a:t>Y aquí está el problema, el resultado que reorientó este capítulo.
 Cada red se evalúa contra su línea base: la solar contra la persistencia de cielo claro, la de precio contra la de veinticuatro horas. Y no es una vara de medir cualquiera: en estas dos series el día de hoy se parece muchísimo al de ayer, así que «lo mismo que ayer» acierta la mayor parte del tiempo. Es una referencia dura.
 Ninguna de las dos la bate: la solar queda un ocho coma ocho por ciento por detrás, la de precio un siete coma uno.
-Pero el motivo de esa derrota es lo que abre la solución. Una red recurrente está pensada para anticipar cambios, no para repetir lo de ayer. En las horas en que no cambia nada, que son la mayoría, la persistencia es imbatible; en las que sí cambia, que son las que deciden, aporta la red. Aciertan en sitios distintos: la salida no es elegir una, sino combinarlas.
+Pero el motivo de esa derrota es lo que abre la solución. Una red recurrente está pensada para anticipar cambios, no para repetir lo de ayer. En las horas en que no pasa nada, que son la mayoría, la persistencia es imbatible; en las que sí pasa algo, que son las que deciden, aporta la red. Lo ven en el panel de abajo a la izquierda: el día nublado la red da cuatrocientos veinte y lo real fueron doscientos sesenta. Aciertan en sitios distintos, así que la salida no es elegir una, sino combinarlas.
 — — — — —
-NO SE DICE · objetivo 1:13 · Presentar esto como resultado medido, no como fallo. Es lo que demuestra que validaste contra la referencia correcta.</a:t>
+NO SE DICE · objetivo 1:25 · Presentar esto como resultado medido, no como fallo. Es lo que demuestra que validaste contra la referencia correcta.</a:t>
             </a:r>
             <a:endParaRPr lang="en-US" dirty="0"/>
           </a:p>
@@ -2553,12 +2552,12 @@
             <a:r>
               <a:rPr lang="en-US" dirty="0"/>
               <a:t>La solución tiene tres partes, y ninguna exige reentrenar.
-La primera es física: acotar la predicción a la envolvente de cielo claro, no dejar que la irradiancia prevista supere la de un día despejado. Con eso el error absoluto medio diurno —cuánto me equivoco de media cada hora, en las unidades de la variable— baja de cincuenta y nueve a cincuenta y seis vatios-hora por metro cuadrado.
+La primera es física: acotar la predicción a la envolvente de cielo claro, no dejar que la irradiancia prevista supere la de un día despejado. Con eso el error medio diurno baja de cincuenta y nueve a cincuenta y seis vatios-hora por metro cuadrado.
 La segunda da nombre a la diapositiva: ponderar la red con su propia línea base, una combinación convexa con un peso distinto por cada hora del horizonte, ajustado en validación y nunca en test.
 La tercera es la corrección del lazo cerrado, realimentando con el precio real de la hora ya transcurrida, que sigue siendo causal.
-El resultado son esas dos cifras, y conviene decir sobre qué se miden: no sobre no predecir nada, sino sobre la persistencia, que ya acierta la mayor parte del tiempo.
+Y el resultado es que la señal combinada sí bate a su línea base: un cinco coma ocho por ciento mejor en solar y un seis coma seis en precio. Conviene decir sobre qué se mide esa mejora: no sobre no predecir nada, sino sobre una referencia que ya acierta la mayor parte del tiempo.
 — — — — —
-NO SE DICE · objetivo 1:08 · Esta es la diapositiva que cierra el bloque de redes. Deja claro que lo desplegado es la señal combinada.</a:t>
+NO SE DICE · objetivo 1:13 · Esta es la diapositiva que cierra el bloque de redes. Deja claro que lo desplegado es la señal combinada.</a:t>
             </a:r>
             <a:endParaRPr lang="en-US" dirty="0"/>
           </a:p>
@@ -10282,7 +10281,7 @@
                 <a:ea typeface="Calibri" pitchFamily="34" charset="-122"/>
                 <a:cs typeface="Calibri" pitchFamily="34" charset="-120"/>
               </a:rPr>
-              <a:t>Añadir la programación de las horas</a:t>
+              <a:t>Añadir el planificador, que consume la previsión solar</a:t>
             </a:r>
             <a:endParaRPr lang="en-US" sz="1500" dirty="0"/>
           </a:p>
@@ -10321,7 +10320,7 @@
                 <a:ea typeface="Calibri" pitchFamily="34" charset="-122"/>
                 <a:cs typeface="Calibri" pitchFamily="34" charset="-120"/>
               </a:rPr>
-              <a:t>19/20 · significativa, bajo el umbral de relevancia</a:t>
+              <a:t>19/20 pares · la aportación de la red solar va dentro de esta cifra</a:t>
             </a:r>
             <a:endParaRPr lang="en-US" sz="1200" dirty="0"/>
           </a:p>
@@ -10553,7 +10552,7 @@
         </p:nvSpPr>
         <p:spPr>
           <a:xfrm>
-            <a:off x="502920" y="4718304"/>
+            <a:off x="502920" y="4919472"/>
             <a:ext cx="11185855" cy="292608"/>
           </a:xfrm>
           <a:prstGeom prst="rect">
@@ -10586,55 +10585,13 @@
       </p:sp>
       <p:sp>
         <p:nvSpPr>
-          <p:cNvPr id="19" name="Text 17"/>
-          <p:cNvSpPr txBox="1"/>
-          <p:nvPr/>
-        </p:nvSpPr>
-        <p:spPr>
-          <a:xfrm>
-            <a:off x="502920" y="5029200"/>
-            <a:ext cx="11185855" cy="475488"/>
-          </a:xfrm>
-          <a:prstGeom prst="rect">
-            <a:avLst/>
-          </a:prstGeom>
-          <a:noFill/>
-          <a:ln/>
-        </p:spPr>
-        <p:txBody>
-          <a:bodyPr wrap="square" lIns="0" tIns="0" rIns="0" bIns="0" rtlCol="0" anchor="t"/>
-          <a:lstStyle/>
-          <a:p>
-            <a:pPr indent="0" marL="0">
-              <a:lnSpc>
-                <a:spcPct val="110000"/>
-              </a:lnSpc>
-              <a:buNone/>
-            </a:pPr>
-            <a:r>
-              <a:rPr lang="en-US" sz="1150" dirty="0">
-                <a:solidFill>
-                  <a:srgbClr val="C8861E"/>
-                </a:solidFill>
-                <a:latin typeface="Calibri" pitchFamily="34" charset="0"/>
-                <a:ea typeface="Calibri" pitchFamily="34" charset="-122"/>
-                <a:cs typeface="Calibri" pitchFamily="34" charset="-120"/>
-              </a:rPr>
-              <a:t>La previsión solar sí interviene, y no aparece como escalón propio: el planificador la usa para estimar el excedente gratis del horizonte, así que su aportación va dentro de los 5,1 €.</a:t>
-            </a:r>
-            <a:endParaRPr lang="en-US" sz="1150" dirty="0"/>
-          </a:p>
-        </p:txBody>
-      </p:sp>
-      <p:sp>
-        <p:nvSpPr>
-          <p:cNvPr id="20" name="Shape 18"/>
+          <p:cNvPr id="19" name="Shape 17"/>
           <p:cNvSpPr/>
           <p:nvPr/>
         </p:nvSpPr>
         <p:spPr>
           <a:xfrm>
-            <a:off x="502920" y="5596128"/>
+            <a:off x="502920" y="5440680"/>
             <a:ext cx="11185855" cy="566928"/>
           </a:xfrm>
           <a:prstGeom prst="roundRect">
@@ -10650,13 +10607,13 @@
       </p:sp>
       <p:sp>
         <p:nvSpPr>
-          <p:cNvPr id="21" name="Text 19"/>
-          <p:cNvSpPr txBox="1"/>
-          <p:nvPr/>
-        </p:nvSpPr>
-        <p:spPr>
-          <a:xfrm>
-            <a:off x="777240" y="5614416"/>
+          <p:cNvPr id="20" name="Text 18"/>
+          <p:cNvSpPr txBox="1"/>
+          <p:nvPr/>
+        </p:nvSpPr>
+        <p:spPr>
+          <a:xfrm>
+            <a:off x="777240" y="5458968"/>
             <a:ext cx="10637215" cy="530352"/>
           </a:xfrm>
           <a:prstGeom prst="rect">
@@ -10684,7 +10641,7 @@
                 <a:ea typeface="Calibri" pitchFamily="34" charset="-122"/>
                 <a:cs typeface="Calibri" pitchFamily="34" charset="-120"/>
               </a:rPr>
-              <a:t>El mercado diario publica a las 13:00 el precio del día siguiente: entre 11 y 35 horas del horizonte no hay nada que predecir.</a:t>
+              <a:t>El mercado diario publica a las 13:00 el precio del día siguiente: el planificador ve entre 11 y 35 horas ya publicadas, y el tramo que sí predice no cambió ninguna decisión.</a:t>
             </a:r>
             <a:endParaRPr lang="en-US" sz="1350" dirty="0"/>
           </a:p>
@@ -10692,7 +10649,7 @@
       </p:sp>
       <p:sp>
         <p:nvSpPr>
-          <p:cNvPr id="22" name="Text 20"/>
+          <p:cNvPr id="21" name="Text 19"/>
           <p:cNvSpPr txBox="1"/>
           <p:nvPr/>
         </p:nvSpPr>
@@ -12234,7 +12191,7 @@
                 <a:ea typeface="Calibri" pitchFamily="34" charset="-122"/>
                 <a:cs typeface="Calibri" pitchFamily="34" charset="-120"/>
               </a:rPr>
-              <a:t>vehículos eléctricos en circulación en 2030, con objetivos vinculantes de infraestructura de recarga</a:t>
+              <a:t>vehículos eléctricos en circulación en España en 2030, con objetivos vinculantes de infraestructura de recarga</a:t>
             </a:r>
             <a:endParaRPr lang="en-US" sz="1200" dirty="0"/>
           </a:p>
@@ -17762,7 +17719,7 @@
       </p:sp>
       <p:pic>
         <p:nvPicPr>
-          <p:cNvPr id="4" name="Image 0" descr="img/lstm_solar_PrediccionSolarEnLosDiasDeLaCampana.png">    </p:cNvPr>
+          <p:cNvPr id="4" name="Image 0" descr="img/lstm_solar_dos_dias.png">    </p:cNvPr>
           <p:cNvPicPr>
             <a:picLocks noChangeAspect="1"/>
           </p:cNvPicPr>
@@ -17776,8 +17733,8 @@
         </p:blipFill>
         <p:spPr>
           <a:xfrm>
-            <a:off x="1852363" y="1536192"/>
-            <a:ext cx="2665441" cy="2468880"/>
+            <a:off x="502920" y="1536192"/>
+            <a:ext cx="5364328" cy="2428100"/>
           </a:xfrm>
           <a:prstGeom prst="rect">
             <a:avLst/>
@@ -17816,7 +17773,7 @@
         </p:nvSpPr>
         <p:spPr>
           <a:xfrm>
-            <a:off x="502920" y="4096512"/>
+            <a:off x="502920" y="4055732"/>
             <a:ext cx="5364328" cy="274320"/>
           </a:xfrm>
           <a:prstGeom prst="rect">
@@ -17841,7 +17798,7 @@
                 <a:ea typeface="Calibri" pitchFamily="34" charset="-122"/>
                 <a:cs typeface="Calibri" pitchFamily="34" charset="-120"/>
               </a:rPr>
-              <a:t>Red solar frente al valor real en los cuatro días de campaña</a:t>
+              <a:t>Red solar frente al valor real: arriba el día soleado, abajo el nublado</a:t>
             </a:r>
             <a:endParaRPr lang="en-US" sz="1050" dirty="0"/>
           </a:p>
@@ -17855,7 +17812,7 @@
         </p:nvSpPr>
         <p:spPr>
           <a:xfrm>
-            <a:off x="6324448" y="4096512"/>
+            <a:off x="6324448" y="4055732"/>
             <a:ext cx="5364328" cy="274320"/>
           </a:xfrm>
           <a:prstGeom prst="rect">
@@ -17894,7 +17851,7 @@
         </p:nvSpPr>
         <p:spPr>
           <a:xfrm>
-            <a:off x="502920" y="4553712"/>
+            <a:off x="502920" y="4512932"/>
             <a:ext cx="5364328" cy="566928"/>
           </a:xfrm>
           <a:prstGeom prst="rect">
@@ -17933,7 +17890,7 @@
         </p:nvSpPr>
         <p:spPr>
           <a:xfrm>
-            <a:off x="502920" y="5102352"/>
+            <a:off x="502920" y="5061572"/>
             <a:ext cx="5364328" cy="713232"/>
           </a:xfrm>
           <a:prstGeom prst="rect">
@@ -17975,7 +17932,7 @@
         </p:nvSpPr>
         <p:spPr>
           <a:xfrm>
-            <a:off x="6324448" y="4553712"/>
+            <a:off x="6324448" y="4512932"/>
             <a:ext cx="5364328" cy="566928"/>
           </a:xfrm>
           <a:prstGeom prst="rect">
@@ -18014,7 +17971,7 @@
         </p:nvSpPr>
         <p:spPr>
           <a:xfrm>
-            <a:off x="6324448" y="5102352"/>
+            <a:off x="6324448" y="5061572"/>
             <a:ext cx="5364328" cy="713232"/>
           </a:xfrm>
           <a:prstGeom prst="rect">
